--- a/Kyrgyzstan_Education_Stats_WithConclusion.pptx
+++ b/Kyrgyzstan_Education_Stats_WithConclusion.pptx
@@ -5,25 +5,26 @@
     <p:sldMasterId id="2147483648" r:id="rId1"/>
   </p:sldMasterIdLst>
   <p:notesMasterIdLst>
-    <p:notesMasterId r:id="rId18"/>
+    <p:notesMasterId r:id="rId19"/>
   </p:notesMasterIdLst>
   <p:sldIdLst>
     <p:sldId id="256" r:id="rId2"/>
-    <p:sldId id="257" r:id="rId3"/>
-    <p:sldId id="258" r:id="rId4"/>
-    <p:sldId id="259" r:id="rId5"/>
-    <p:sldId id="266" r:id="rId6"/>
-    <p:sldId id="260" r:id="rId7"/>
-    <p:sldId id="261" r:id="rId8"/>
-    <p:sldId id="267" r:id="rId9"/>
-    <p:sldId id="262" r:id="rId10"/>
-    <p:sldId id="271" r:id="rId11"/>
-    <p:sldId id="263" r:id="rId12"/>
-    <p:sldId id="264" r:id="rId13"/>
-    <p:sldId id="268" r:id="rId14"/>
-    <p:sldId id="269" r:id="rId15"/>
-    <p:sldId id="265" r:id="rId16"/>
-    <p:sldId id="270" r:id="rId17"/>
+    <p:sldId id="272" r:id="rId3"/>
+    <p:sldId id="273" r:id="rId4"/>
+    <p:sldId id="258" r:id="rId5"/>
+    <p:sldId id="259" r:id="rId6"/>
+    <p:sldId id="266" r:id="rId7"/>
+    <p:sldId id="260" r:id="rId8"/>
+    <p:sldId id="261" r:id="rId9"/>
+    <p:sldId id="267" r:id="rId10"/>
+    <p:sldId id="262" r:id="rId11"/>
+    <p:sldId id="271" r:id="rId12"/>
+    <p:sldId id="263" r:id="rId13"/>
+    <p:sldId id="264" r:id="rId14"/>
+    <p:sldId id="268" r:id="rId15"/>
+    <p:sldId id="269" r:id="rId16"/>
+    <p:sldId id="265" r:id="rId17"/>
+    <p:sldId id="270" r:id="rId18"/>
   </p:sldIdLst>
   <p:sldSz cx="9144000" cy="5143500" type="screen16x9"/>
   <p:notesSz cx="5143500" cy="9144000"/>
@@ -336,90 +337,6 @@
 </p:notes>
 </file>
 
-<file path=ppt/notesSlides/notesSlide10.xml><?xml version="1.0" encoding="utf-8"?>
-<p:notes xmlns:a="http://schemas.openxmlformats.org/drawingml/2006/main" xmlns:r="http://schemas.openxmlformats.org/officeDocument/2006/relationships" xmlns:p="http://schemas.openxmlformats.org/presentationml/2006/main">
-  <p:cSld>
-    <p:spTree>
-      <p:nvGrpSpPr>
-        <p:cNvPr id="1" name=""/>
-        <p:cNvGrpSpPr/>
-        <p:nvPr/>
-      </p:nvGrpSpPr>
-      <p:grpSpPr>
-        <a:xfrm>
-          <a:off x="0" y="0"/>
-          <a:ext cx="0" cy="0"/>
-          <a:chOff x="0" y="0"/>
-          <a:chExt cx="0" cy="0"/>
-        </a:xfrm>
-      </p:grpSpPr>
-      <p:sp>
-        <p:nvSpPr>
-          <p:cNvPr id="2" name="Slide Image Placeholder 1"/>
-          <p:cNvSpPr>
-            <a:spLocks noGrp="1" noRot="1" noChangeAspect="1"/>
-          </p:cNvSpPr>
-          <p:nvPr>
-            <p:ph type="sldImg"/>
-          </p:nvPr>
-        </p:nvSpPr>
-        <p:spPr/>
-      </p:sp>
-      <p:sp>
-        <p:nvSpPr>
-          <p:cNvPr id="3" name="Notes Placeholder 2"/>
-          <p:cNvSpPr>
-            <a:spLocks noGrp="1"/>
-          </p:cNvSpPr>
-          <p:nvPr>
-            <p:ph type="body" idx="1"/>
-          </p:nvPr>
-        </p:nvSpPr>
-        <p:spPr/>
-        <p:txBody>
-          <a:bodyPr/>
-          <a:lstStyle/>
-          <a:p>
-            <a:endParaRPr lang="en-US" dirty="0"/>
-          </a:p>
-        </p:txBody>
-      </p:sp>
-      <p:sp>
-        <p:nvSpPr>
-          <p:cNvPr id="4" name="Slide Number Placeholder 3"/>
-          <p:cNvSpPr>
-            <a:spLocks noGrp="1"/>
-          </p:cNvSpPr>
-          <p:nvPr>
-            <p:ph type="sldNum" sz="quarter" idx="10"/>
-          </p:nvPr>
-        </p:nvSpPr>
-        <p:spPr/>
-        <p:txBody>
-          <a:bodyPr/>
-          <a:lstStyle/>
-          <a:p>
-            <a:fld id="{F7021451-1387-4CA6-816F-3879F97B5CBC}" type="slidenum">
-              <a:rPr lang="en-US"/>
-              <a:t>15</a:t>
-            </a:fld>
-            <a:endParaRPr lang="en-US"/>
-          </a:p>
-        </p:txBody>
-      </p:sp>
-    </p:spTree>
-    <p:extLst>
-      <p:ext uri="{BB962C8B-B14F-4D97-AF65-F5344CB8AC3E}">
-        <p14:creationId xmlns:p14="http://schemas.microsoft.com/office/powerpoint/2010/main" val="1024086991"/>
-      </p:ext>
-    </p:extLst>
-  </p:cSld>
-  <p:clrMapOvr>
-    <a:masterClrMapping/>
-  </p:clrMapOvr>
-</p:notes>
-</file>
-
 <file path=ppt/notesSlides/notesSlide2.xml><?xml version="1.0" encoding="utf-8"?>
 <p:notes xmlns:a="http://schemas.openxmlformats.org/drawingml/2006/main" xmlns:r="http://schemas.openxmlformats.org/officeDocument/2006/relationships" xmlns:p="http://schemas.openxmlformats.org/presentationml/2006/main">
   <p:cSld>
@@ -485,7 +402,7 @@
           <a:p>
             <a:fld id="{F7021451-1387-4CA6-816F-3879F97B5CBC}" type="slidenum">
               <a:rPr lang="en-US"/>
-              <a:t>2</a:t>
+              <a:t>4</a:t>
             </a:fld>
             <a:endParaRPr lang="en-US"/>
           </a:p>
@@ -569,7 +486,7 @@
           <a:p>
             <a:fld id="{F7021451-1387-4CA6-816F-3879F97B5CBC}" type="slidenum">
               <a:rPr lang="en-US"/>
-              <a:t>3</a:t>
+              <a:t>5</a:t>
             </a:fld>
             <a:endParaRPr lang="en-US"/>
           </a:p>
@@ -653,7 +570,7 @@
           <a:p>
             <a:fld id="{F7021451-1387-4CA6-816F-3879F97B5CBC}" type="slidenum">
               <a:rPr lang="en-US"/>
-              <a:t>4</a:t>
+              <a:t>7</a:t>
             </a:fld>
             <a:endParaRPr lang="en-US"/>
           </a:p>
@@ -737,7 +654,7 @@
           <a:p>
             <a:fld id="{F7021451-1387-4CA6-816F-3879F97B5CBC}" type="slidenum">
               <a:rPr lang="en-US"/>
-              <a:t>6</a:t>
+              <a:t>8</a:t>
             </a:fld>
             <a:endParaRPr lang="en-US"/>
           </a:p>
@@ -821,7 +738,7 @@
           <a:p>
             <a:fld id="{F7021451-1387-4CA6-816F-3879F97B5CBC}" type="slidenum">
               <a:rPr lang="en-US"/>
-              <a:t>7</a:t>
+              <a:t>10</a:t>
             </a:fld>
             <a:endParaRPr lang="en-US"/>
           </a:p>
@@ -905,7 +822,7 @@
           <a:p>
             <a:fld id="{F7021451-1387-4CA6-816F-3879F97B5CBC}" type="slidenum">
               <a:rPr lang="en-US"/>
-              <a:t>9</a:t>
+              <a:t>12</a:t>
             </a:fld>
             <a:endParaRPr lang="en-US"/>
           </a:p>
@@ -989,7 +906,7 @@
           <a:p>
             <a:fld id="{F7021451-1387-4CA6-816F-3879F97B5CBC}" type="slidenum">
               <a:rPr lang="en-US"/>
-              <a:t>11</a:t>
+              <a:t>13</a:t>
             </a:fld>
             <a:endParaRPr lang="en-US"/>
           </a:p>
@@ -1073,7 +990,7 @@
           <a:p>
             <a:fld id="{F7021451-1387-4CA6-816F-3879F97B5CBC}" type="slidenum">
               <a:rPr lang="en-US"/>
-              <a:t>12</a:t>
+              <a:t>16</a:t>
             </a:fld>
             <a:endParaRPr lang="en-US"/>
           </a:p>
@@ -1645,6 +1562,2282 @@
 
 <file path=ppt/slides/slide10.xml><?xml version="1.0" encoding="utf-8"?>
 <p:sld xmlns:a="http://schemas.openxmlformats.org/drawingml/2006/main" xmlns:r="http://schemas.openxmlformats.org/officeDocument/2006/relationships" xmlns:p="http://schemas.openxmlformats.org/presentationml/2006/main">
+  <p:cSld name="Slide 7">
+    <p:bg>
+      <p:bgPr>
+        <a:solidFill>
+          <a:srgbClr val="F4F7FB"/>
+        </a:solidFill>
+        <a:effectLst/>
+      </p:bgPr>
+    </p:bg>
+    <p:spTree>
+      <p:nvGrpSpPr>
+        <p:cNvPr id="1" name=""/>
+        <p:cNvGrpSpPr/>
+        <p:nvPr/>
+      </p:nvGrpSpPr>
+      <p:grpSpPr>
+        <a:xfrm>
+          <a:off x="0" y="0"/>
+          <a:ext cx="0" cy="0"/>
+          <a:chOff x="0" y="0"/>
+          <a:chExt cx="0" cy="0"/>
+        </a:xfrm>
+      </p:grpSpPr>
+      <p:sp>
+        <p:nvSpPr>
+          <p:cNvPr id="2" name="Shape 0"/>
+          <p:cNvSpPr/>
+          <p:nvPr/>
+        </p:nvSpPr>
+        <p:spPr>
+          <a:xfrm>
+            <a:off x="0" y="0"/>
+            <a:ext cx="9144000" cy="685800"/>
+          </a:xfrm>
+          <a:prstGeom prst="rect">
+            <a:avLst/>
+          </a:prstGeom>
+          <a:solidFill>
+            <a:srgbClr val="1A2F5A"/>
+          </a:solidFill>
+          <a:ln w="12700">
+            <a:solidFill>
+              <a:srgbClr val="1A2F5A"/>
+            </a:solidFill>
+            <a:prstDash val="solid"/>
+          </a:ln>
+        </p:spPr>
+      </p:sp>
+      <p:sp>
+        <p:nvSpPr>
+          <p:cNvPr id="3" name="Text 1"/>
+          <p:cNvSpPr/>
+          <p:nvPr/>
+        </p:nvSpPr>
+        <p:spPr>
+          <a:xfrm>
+            <a:off x="274320" y="0"/>
+            <a:ext cx="8595360" cy="685800"/>
+          </a:xfrm>
+          <a:prstGeom prst="rect">
+            <a:avLst/>
+          </a:prstGeom>
+          <a:noFill/>
+          <a:ln/>
+        </p:spPr>
+        <p:txBody>
+          <a:bodyPr wrap="square" rtlCol="0" anchor="ctr"/>
+          <a:lstStyle/>
+          <a:p>
+            <a:pPr marL="0" indent="0">
+              <a:buNone/>
+            </a:pPr>
+            <a:r>
+              <a:rPr lang="en-US" sz="2000" b="1" dirty="0">
+                <a:solidFill>
+                  <a:srgbClr val="FFFFFF"/>
+                </a:solidFill>
+                <a:latin typeface="Calibri" pitchFamily="34" charset="0"/>
+                <a:ea typeface="Calibri" pitchFamily="34" charset="-122"/>
+                <a:cs typeface="Calibri" pitchFamily="34" charset="-120"/>
+              </a:rPr>
+              <a:t>7 · Hypothesis Testing — CIS vs Non-CIS Growth</a:t>
+            </a:r>
+            <a:endParaRPr lang="en-US" sz="2000" dirty="0"/>
+          </a:p>
+        </p:txBody>
+      </p:sp>
+      <p:sp>
+        <p:nvSpPr>
+          <p:cNvPr id="4" name="Text 2"/>
+          <p:cNvSpPr/>
+          <p:nvPr/>
+        </p:nvSpPr>
+        <p:spPr>
+          <a:xfrm>
+            <a:off x="274320" y="777240"/>
+            <a:ext cx="8595360" cy="274320"/>
+          </a:xfrm>
+          <a:prstGeom prst="rect">
+            <a:avLst/>
+          </a:prstGeom>
+          <a:noFill/>
+          <a:ln/>
+        </p:spPr>
+        <p:txBody>
+          <a:bodyPr wrap="square" rtlCol="0" anchor="ctr"/>
+          <a:lstStyle/>
+          <a:p>
+            <a:pPr marL="0" indent="0">
+              <a:buNone/>
+            </a:pPr>
+            <a:r>
+              <a:rPr lang="en-US" sz="1200" b="1" dirty="0">
+                <a:solidFill>
+                  <a:srgbClr val="1A2F5A"/>
+                </a:solidFill>
+                <a:latin typeface="Calibri" pitchFamily="34" charset="0"/>
+                <a:ea typeface="Calibri" pitchFamily="34" charset="-122"/>
+                <a:cs typeface="Calibri" pitchFamily="34" charset="-120"/>
+              </a:rPr>
+              <a:t>Growth Rate Descriptive Statistics (Annual YoY %)</a:t>
+            </a:r>
+            <a:endParaRPr lang="en-US" sz="1200" dirty="0"/>
+          </a:p>
+        </p:txBody>
+      </p:sp>
+      <p:graphicFrame>
+        <p:nvGraphicFramePr>
+          <p:cNvPr id="8" name="Table 0"/>
+          <p:cNvGraphicFramePr>
+            <a:graphicFrameLocks noGrp="1"/>
+          </p:cNvGraphicFramePr>
+          <p:nvPr>
+            <p:extLst>
+              <p:ext uri="{D42A27DB-BD31-4B8C-83A1-F6EECF244321}">
+                <p14:modId xmlns:p14="http://schemas.microsoft.com/office/powerpoint/2010/main" val="2530508409"/>
+              </p:ext>
+            </p:extLst>
+          </p:nvPr>
+        </p:nvGraphicFramePr>
+        <p:xfrm>
+          <a:off x="274320" y="1097280"/>
+          <a:ext cx="3200400" cy="2338762"/>
+        </p:xfrm>
+        <a:graphic>
+          <a:graphicData uri="http://schemas.openxmlformats.org/drawingml/2006/table">
+            <a:tbl>
+              <a:tblPr/>
+              <a:tblGrid>
+                <a:gridCol w="1280160">
+                  <a:extLst>
+                    <a:ext uri="{9D8B030D-6E8A-4147-A177-3AD203B41FA5}">
+                      <a16:colId xmlns:a16="http://schemas.microsoft.com/office/drawing/2014/main" val="20000"/>
+                    </a:ext>
+                  </a:extLst>
+                </a:gridCol>
+                <a:gridCol w="960120">
+                  <a:extLst>
+                    <a:ext uri="{9D8B030D-6E8A-4147-A177-3AD203B41FA5}">
+                      <a16:colId xmlns:a16="http://schemas.microsoft.com/office/drawing/2014/main" val="20001"/>
+                    </a:ext>
+                  </a:extLst>
+                </a:gridCol>
+                <a:gridCol w="960120">
+                  <a:extLst>
+                    <a:ext uri="{9D8B030D-6E8A-4147-A177-3AD203B41FA5}">
+                      <a16:colId xmlns:a16="http://schemas.microsoft.com/office/drawing/2014/main" val="20002"/>
+                    </a:ext>
+                  </a:extLst>
+                </a:gridCol>
+              </a:tblGrid>
+              <a:tr h="326571">
+                <a:tc>
+                  <a:txBody>
+                    <a:bodyPr/>
+                    <a:lstStyle/>
+                    <a:p>
+                      <a:pPr marL="0" indent="0">
+                        <a:buNone/>
+                      </a:pPr>
+                      <a:endParaRPr lang="en-US" sz="1100" dirty="0">
+                        <a:latin typeface="Calibri" charset="0"/>
+                        <a:ea typeface="Calibri" charset="0"/>
+                        <a:cs typeface="Calibri" charset="0"/>
+                      </a:endParaRPr>
+                    </a:p>
+                  </a:txBody>
+                  <a:tcPr>
+                    <a:lnL w="5080" cap="flat" cmpd="sng" algn="ctr">
+                      <a:solidFill>
+                        <a:srgbClr val="E2E8F0"/>
+                      </a:solidFill>
+                      <a:prstDash val="solid"/>
+                      <a:round/>
+                      <a:headEnd type="none" w="med" len="med"/>
+                      <a:tailEnd type="none" w="med" len="med"/>
+                    </a:lnL>
+                    <a:lnR w="5080" cap="flat" cmpd="sng" algn="ctr">
+                      <a:solidFill>
+                        <a:srgbClr val="E2E8F0"/>
+                      </a:solidFill>
+                      <a:prstDash val="solid"/>
+                      <a:round/>
+                      <a:headEnd type="none" w="med" len="med"/>
+                      <a:tailEnd type="none" w="med" len="med"/>
+                    </a:lnR>
+                    <a:lnT w="5080" cap="flat" cmpd="sng" algn="ctr">
+                      <a:solidFill>
+                        <a:srgbClr val="E2E8F0"/>
+                      </a:solidFill>
+                      <a:prstDash val="solid"/>
+                      <a:round/>
+                      <a:headEnd type="none" w="med" len="med"/>
+                      <a:tailEnd type="none" w="med" len="med"/>
+                    </a:lnT>
+                    <a:lnB w="5080" cap="flat" cmpd="sng" algn="ctr">
+                      <a:solidFill>
+                        <a:srgbClr val="E2E8F0"/>
+                      </a:solidFill>
+                      <a:prstDash val="solid"/>
+                      <a:round/>
+                      <a:headEnd type="none" w="med" len="med"/>
+                      <a:tailEnd type="none" w="med" len="med"/>
+                    </a:lnB>
+                    <a:solidFill>
+                      <a:srgbClr val="1A2F5A"/>
+                    </a:solidFill>
+                  </a:tcPr>
+                </a:tc>
+                <a:tc>
+                  <a:txBody>
+                    <a:bodyPr/>
+                    <a:lstStyle/>
+                    <a:p>
+                      <a:pPr marL="0" indent="0" algn="ctr">
+                        <a:buNone/>
+                      </a:pPr>
+                      <a:r>
+                        <a:rPr lang="en-US" sz="1100" b="1" dirty="0">
+                          <a:solidFill>
+                            <a:srgbClr val="FFFFFF"/>
+                          </a:solidFill>
+                          <a:latin typeface="Calibri" pitchFamily="34" charset="0"/>
+                          <a:ea typeface="Calibri" pitchFamily="34" charset="-122"/>
+                          <a:cs typeface="Calibri" pitchFamily="34" charset="-120"/>
+                        </a:rPr>
+                        <a:t>CIS</a:t>
+                      </a:r>
+                      <a:endParaRPr lang="en-US" sz="1100" dirty="0">
+                        <a:latin typeface="Calibri" charset="0"/>
+                        <a:ea typeface="Calibri" charset="0"/>
+                        <a:cs typeface="Calibri" charset="0"/>
+                      </a:endParaRPr>
+                    </a:p>
+                  </a:txBody>
+                  <a:tcPr>
+                    <a:lnL w="5080" cap="flat" cmpd="sng" algn="ctr">
+                      <a:solidFill>
+                        <a:srgbClr val="E2E8F0"/>
+                      </a:solidFill>
+                      <a:prstDash val="solid"/>
+                      <a:round/>
+                      <a:headEnd type="none" w="med" len="med"/>
+                      <a:tailEnd type="none" w="med" len="med"/>
+                    </a:lnL>
+                    <a:lnR w="5080" cap="flat" cmpd="sng" algn="ctr">
+                      <a:solidFill>
+                        <a:srgbClr val="E2E8F0"/>
+                      </a:solidFill>
+                      <a:prstDash val="solid"/>
+                      <a:round/>
+                      <a:headEnd type="none" w="med" len="med"/>
+                      <a:tailEnd type="none" w="med" len="med"/>
+                    </a:lnR>
+                    <a:lnT w="5080" cap="flat" cmpd="sng" algn="ctr">
+                      <a:solidFill>
+                        <a:srgbClr val="E2E8F0"/>
+                      </a:solidFill>
+                      <a:prstDash val="solid"/>
+                      <a:round/>
+                      <a:headEnd type="none" w="med" len="med"/>
+                      <a:tailEnd type="none" w="med" len="med"/>
+                    </a:lnT>
+                    <a:lnB w="5080" cap="flat" cmpd="sng" algn="ctr">
+                      <a:solidFill>
+                        <a:srgbClr val="E2E8F0"/>
+                      </a:solidFill>
+                      <a:prstDash val="solid"/>
+                      <a:round/>
+                      <a:headEnd type="none" w="med" len="med"/>
+                      <a:tailEnd type="none" w="med" len="med"/>
+                    </a:lnB>
+                    <a:solidFill>
+                      <a:srgbClr val="1A2F5A"/>
+                    </a:solidFill>
+                  </a:tcPr>
+                </a:tc>
+                <a:tc>
+                  <a:txBody>
+                    <a:bodyPr/>
+                    <a:lstStyle/>
+                    <a:p>
+                      <a:pPr marL="0" indent="0" algn="ctr">
+                        <a:buNone/>
+                      </a:pPr>
+                      <a:r>
+                        <a:rPr lang="en-US" sz="1100" b="1" dirty="0">
+                          <a:solidFill>
+                            <a:srgbClr val="FFFFFF"/>
+                          </a:solidFill>
+                          <a:latin typeface="Calibri" pitchFamily="34" charset="0"/>
+                          <a:ea typeface="Calibri" pitchFamily="34" charset="-122"/>
+                          <a:cs typeface="Calibri" pitchFamily="34" charset="-120"/>
+                        </a:rPr>
+                        <a:t>Non-CIS</a:t>
+                      </a:r>
+                      <a:endParaRPr lang="en-US" sz="1100" dirty="0">
+                        <a:latin typeface="Calibri" charset="0"/>
+                        <a:ea typeface="Calibri" charset="0"/>
+                        <a:cs typeface="Calibri" charset="0"/>
+                      </a:endParaRPr>
+                    </a:p>
+                  </a:txBody>
+                  <a:tcPr>
+                    <a:lnL w="5080" cap="flat" cmpd="sng" algn="ctr">
+                      <a:solidFill>
+                        <a:srgbClr val="E2E8F0"/>
+                      </a:solidFill>
+                      <a:prstDash val="solid"/>
+                      <a:round/>
+                      <a:headEnd type="none" w="med" len="med"/>
+                      <a:tailEnd type="none" w="med" len="med"/>
+                    </a:lnL>
+                    <a:lnR w="5080" cap="flat" cmpd="sng" algn="ctr">
+                      <a:solidFill>
+                        <a:srgbClr val="E2E8F0"/>
+                      </a:solidFill>
+                      <a:prstDash val="solid"/>
+                      <a:round/>
+                      <a:headEnd type="none" w="med" len="med"/>
+                      <a:tailEnd type="none" w="med" len="med"/>
+                    </a:lnR>
+                    <a:lnT w="5080" cap="flat" cmpd="sng" algn="ctr">
+                      <a:solidFill>
+                        <a:srgbClr val="E2E8F0"/>
+                      </a:solidFill>
+                      <a:prstDash val="solid"/>
+                      <a:round/>
+                      <a:headEnd type="none" w="med" len="med"/>
+                      <a:tailEnd type="none" w="med" len="med"/>
+                    </a:lnT>
+                    <a:lnB w="5080" cap="flat" cmpd="sng" algn="ctr">
+                      <a:solidFill>
+                        <a:srgbClr val="E2E8F0"/>
+                      </a:solidFill>
+                      <a:prstDash val="solid"/>
+                      <a:round/>
+                      <a:headEnd type="none" w="med" len="med"/>
+                      <a:tailEnd type="none" w="med" len="med"/>
+                    </a:lnB>
+                    <a:solidFill>
+                      <a:srgbClr val="1A2F5A"/>
+                    </a:solidFill>
+                  </a:tcPr>
+                </a:tc>
+                <a:extLst>
+                  <a:ext uri="{0D108BD9-81ED-4DB2-BD59-A6C34878D82A}">
+                    <a16:rowId xmlns:a16="http://schemas.microsoft.com/office/drawing/2014/main" val="10000"/>
+                  </a:ext>
+                </a:extLst>
+              </a:tr>
+              <a:tr h="326571">
+                <a:tc>
+                  <a:txBody>
+                    <a:bodyPr/>
+                    <a:lstStyle/>
+                    <a:p>
+                      <a:pPr marL="0" indent="0">
+                        <a:buNone/>
+                      </a:pPr>
+                      <a:r>
+                        <a:rPr lang="en-US" sz="1100" dirty="0">
+                          <a:solidFill>
+                            <a:srgbClr val="1E293B"/>
+                          </a:solidFill>
+                          <a:latin typeface="Calibri" pitchFamily="34" charset="0"/>
+                          <a:ea typeface="Calibri" pitchFamily="34" charset="-122"/>
+                          <a:cs typeface="Calibri" pitchFamily="34" charset="-120"/>
+                        </a:rPr>
+                        <a:t>n</a:t>
+                      </a:r>
+                      <a:endParaRPr lang="en-US" sz="1100" dirty="0">
+                        <a:latin typeface="Calibri" charset="0"/>
+                        <a:ea typeface="Calibri" charset="0"/>
+                        <a:cs typeface="Calibri" charset="0"/>
+                      </a:endParaRPr>
+                    </a:p>
+                  </a:txBody>
+                  <a:tcPr>
+                    <a:lnL w="5080" cap="flat" cmpd="sng" algn="ctr">
+                      <a:solidFill>
+                        <a:srgbClr val="E2E8F0"/>
+                      </a:solidFill>
+                      <a:prstDash val="solid"/>
+                      <a:round/>
+                      <a:headEnd type="none" w="med" len="med"/>
+                      <a:tailEnd type="none" w="med" len="med"/>
+                    </a:lnL>
+                    <a:lnR w="5080" cap="flat" cmpd="sng" algn="ctr">
+                      <a:solidFill>
+                        <a:srgbClr val="E2E8F0"/>
+                      </a:solidFill>
+                      <a:prstDash val="solid"/>
+                      <a:round/>
+                      <a:headEnd type="none" w="med" len="med"/>
+                      <a:tailEnd type="none" w="med" len="med"/>
+                    </a:lnR>
+                    <a:lnT w="5080" cap="flat" cmpd="sng" algn="ctr">
+                      <a:solidFill>
+                        <a:srgbClr val="E2E8F0"/>
+                      </a:solidFill>
+                      <a:prstDash val="solid"/>
+                      <a:round/>
+                      <a:headEnd type="none" w="med" len="med"/>
+                      <a:tailEnd type="none" w="med" len="med"/>
+                    </a:lnT>
+                    <a:lnB w="5080" cap="flat" cmpd="sng" algn="ctr">
+                      <a:solidFill>
+                        <a:srgbClr val="E2E8F0"/>
+                      </a:solidFill>
+                      <a:prstDash val="solid"/>
+                      <a:round/>
+                      <a:headEnd type="none" w="med" len="med"/>
+                      <a:tailEnd type="none" w="med" len="med"/>
+                    </a:lnB>
+                    <a:solidFill>
+                      <a:srgbClr val="FFFFFF"/>
+                    </a:solidFill>
+                  </a:tcPr>
+                </a:tc>
+                <a:tc>
+                  <a:txBody>
+                    <a:bodyPr/>
+                    <a:lstStyle/>
+                    <a:p>
+                      <a:pPr marL="0" indent="0" algn="ctr">
+                        <a:buNone/>
+                      </a:pPr>
+                      <a:r>
+                        <a:rPr lang="en-US" sz="1100" dirty="0">
+                          <a:solidFill>
+                            <a:srgbClr val="1E293B"/>
+                          </a:solidFill>
+                          <a:latin typeface="Calibri" pitchFamily="34" charset="0"/>
+                          <a:ea typeface="Calibri" pitchFamily="34" charset="-122"/>
+                          <a:cs typeface="Calibri" pitchFamily="34" charset="-120"/>
+                        </a:rPr>
+                        <a:t>14</a:t>
+                      </a:r>
+                      <a:endParaRPr lang="en-US" sz="1100" dirty="0">
+                        <a:latin typeface="Calibri" charset="0"/>
+                        <a:ea typeface="Calibri" charset="0"/>
+                        <a:cs typeface="Calibri" charset="0"/>
+                      </a:endParaRPr>
+                    </a:p>
+                  </a:txBody>
+                  <a:tcPr>
+                    <a:lnL w="5080" cap="flat" cmpd="sng" algn="ctr">
+                      <a:solidFill>
+                        <a:srgbClr val="E2E8F0"/>
+                      </a:solidFill>
+                      <a:prstDash val="solid"/>
+                      <a:round/>
+                      <a:headEnd type="none" w="med" len="med"/>
+                      <a:tailEnd type="none" w="med" len="med"/>
+                    </a:lnL>
+                    <a:lnR w="5080" cap="flat" cmpd="sng" algn="ctr">
+                      <a:solidFill>
+                        <a:srgbClr val="E2E8F0"/>
+                      </a:solidFill>
+                      <a:prstDash val="solid"/>
+                      <a:round/>
+                      <a:headEnd type="none" w="med" len="med"/>
+                      <a:tailEnd type="none" w="med" len="med"/>
+                    </a:lnR>
+                    <a:lnT w="5080" cap="flat" cmpd="sng" algn="ctr">
+                      <a:solidFill>
+                        <a:srgbClr val="E2E8F0"/>
+                      </a:solidFill>
+                      <a:prstDash val="solid"/>
+                      <a:round/>
+                      <a:headEnd type="none" w="med" len="med"/>
+                      <a:tailEnd type="none" w="med" len="med"/>
+                    </a:lnT>
+                    <a:lnB w="5080" cap="flat" cmpd="sng" algn="ctr">
+                      <a:solidFill>
+                        <a:srgbClr val="E2E8F0"/>
+                      </a:solidFill>
+                      <a:prstDash val="solid"/>
+                      <a:round/>
+                      <a:headEnd type="none" w="med" len="med"/>
+                      <a:tailEnd type="none" w="med" len="med"/>
+                    </a:lnB>
+                    <a:solidFill>
+                      <a:srgbClr val="FFFFFF"/>
+                    </a:solidFill>
+                  </a:tcPr>
+                </a:tc>
+                <a:tc>
+                  <a:txBody>
+                    <a:bodyPr/>
+                    <a:lstStyle/>
+                    <a:p>
+                      <a:pPr marL="0" indent="0" algn="ctr">
+                        <a:buNone/>
+                      </a:pPr>
+                      <a:r>
+                        <a:rPr lang="en-US" sz="1100" dirty="0">
+                          <a:solidFill>
+                            <a:srgbClr val="1E293B"/>
+                          </a:solidFill>
+                          <a:latin typeface="Calibri" pitchFamily="34" charset="0"/>
+                          <a:ea typeface="Calibri" pitchFamily="34" charset="-122"/>
+                          <a:cs typeface="Calibri" pitchFamily="34" charset="-120"/>
+                        </a:rPr>
+                        <a:t>14</a:t>
+                      </a:r>
+                      <a:endParaRPr lang="en-US" sz="1100" dirty="0">
+                        <a:latin typeface="Calibri" charset="0"/>
+                        <a:ea typeface="Calibri" charset="0"/>
+                        <a:cs typeface="Calibri" charset="0"/>
+                      </a:endParaRPr>
+                    </a:p>
+                  </a:txBody>
+                  <a:tcPr>
+                    <a:lnL w="5080" cap="flat" cmpd="sng" algn="ctr">
+                      <a:solidFill>
+                        <a:srgbClr val="E2E8F0"/>
+                      </a:solidFill>
+                      <a:prstDash val="solid"/>
+                      <a:round/>
+                      <a:headEnd type="none" w="med" len="med"/>
+                      <a:tailEnd type="none" w="med" len="med"/>
+                    </a:lnL>
+                    <a:lnR w="5080" cap="flat" cmpd="sng" algn="ctr">
+                      <a:solidFill>
+                        <a:srgbClr val="E2E8F0"/>
+                      </a:solidFill>
+                      <a:prstDash val="solid"/>
+                      <a:round/>
+                      <a:headEnd type="none" w="med" len="med"/>
+                      <a:tailEnd type="none" w="med" len="med"/>
+                    </a:lnR>
+                    <a:lnT w="5080" cap="flat" cmpd="sng" algn="ctr">
+                      <a:solidFill>
+                        <a:srgbClr val="E2E8F0"/>
+                      </a:solidFill>
+                      <a:prstDash val="solid"/>
+                      <a:round/>
+                      <a:headEnd type="none" w="med" len="med"/>
+                      <a:tailEnd type="none" w="med" len="med"/>
+                    </a:lnT>
+                    <a:lnB w="5080" cap="flat" cmpd="sng" algn="ctr">
+                      <a:solidFill>
+                        <a:srgbClr val="E2E8F0"/>
+                      </a:solidFill>
+                      <a:prstDash val="solid"/>
+                      <a:round/>
+                      <a:headEnd type="none" w="med" len="med"/>
+                      <a:tailEnd type="none" w="med" len="med"/>
+                    </a:lnB>
+                    <a:solidFill>
+                      <a:srgbClr val="FFFFFF"/>
+                    </a:solidFill>
+                  </a:tcPr>
+                </a:tc>
+                <a:extLst>
+                  <a:ext uri="{0D108BD9-81ED-4DB2-BD59-A6C34878D82A}">
+                    <a16:rowId xmlns:a16="http://schemas.microsoft.com/office/drawing/2014/main" val="10001"/>
+                  </a:ext>
+                </a:extLst>
+              </a:tr>
+              <a:tr h="326571">
+                <a:tc>
+                  <a:txBody>
+                    <a:bodyPr/>
+                    <a:lstStyle/>
+                    <a:p>
+                      <a:pPr marL="0" indent="0">
+                        <a:buNone/>
+                      </a:pPr>
+                      <a:r>
+                        <a:rPr lang="en-US" sz="1100" dirty="0">
+                          <a:solidFill>
+                            <a:srgbClr val="1E293B"/>
+                          </a:solidFill>
+                          <a:latin typeface="Calibri" pitchFamily="34" charset="0"/>
+                          <a:ea typeface="Calibri" pitchFamily="34" charset="-122"/>
+                          <a:cs typeface="Calibri" pitchFamily="34" charset="-120"/>
+                        </a:rPr>
+                        <a:t>Mean</a:t>
+                      </a:r>
+                      <a:endParaRPr lang="en-US" sz="1100" dirty="0">
+                        <a:latin typeface="Calibri" charset="0"/>
+                        <a:ea typeface="Calibri" charset="0"/>
+                        <a:cs typeface="Calibri" charset="0"/>
+                      </a:endParaRPr>
+                    </a:p>
+                  </a:txBody>
+                  <a:tcPr>
+                    <a:lnL w="5080" cap="flat" cmpd="sng" algn="ctr">
+                      <a:solidFill>
+                        <a:srgbClr val="E2E8F0"/>
+                      </a:solidFill>
+                      <a:prstDash val="solid"/>
+                      <a:round/>
+                      <a:headEnd type="none" w="med" len="med"/>
+                      <a:tailEnd type="none" w="med" len="med"/>
+                    </a:lnL>
+                    <a:lnR w="5080" cap="flat" cmpd="sng" algn="ctr">
+                      <a:solidFill>
+                        <a:srgbClr val="E2E8F0"/>
+                      </a:solidFill>
+                      <a:prstDash val="solid"/>
+                      <a:round/>
+                      <a:headEnd type="none" w="med" len="med"/>
+                      <a:tailEnd type="none" w="med" len="med"/>
+                    </a:lnR>
+                    <a:lnT w="5080" cap="flat" cmpd="sng" algn="ctr">
+                      <a:solidFill>
+                        <a:srgbClr val="E2E8F0"/>
+                      </a:solidFill>
+                      <a:prstDash val="solid"/>
+                      <a:round/>
+                      <a:headEnd type="none" w="med" len="med"/>
+                      <a:tailEnd type="none" w="med" len="med"/>
+                    </a:lnT>
+                    <a:lnB w="5080" cap="flat" cmpd="sng" algn="ctr">
+                      <a:solidFill>
+                        <a:srgbClr val="E2E8F0"/>
+                      </a:solidFill>
+                      <a:prstDash val="solid"/>
+                      <a:round/>
+                      <a:headEnd type="none" w="med" len="med"/>
+                      <a:tailEnd type="none" w="med" len="med"/>
+                    </a:lnB>
+                    <a:solidFill>
+                      <a:srgbClr val="EBF3FB"/>
+                    </a:solidFill>
+                  </a:tcPr>
+                </a:tc>
+                <a:tc>
+                  <a:txBody>
+                    <a:bodyPr/>
+                    <a:lstStyle/>
+                    <a:p>
+                      <a:pPr marL="0" indent="0" algn="ctr">
+                        <a:buNone/>
+                      </a:pPr>
+                      <a:r>
+                        <a:rPr lang="en-US" sz="1100" dirty="0">
+                          <a:solidFill>
+                            <a:srgbClr val="1E293B"/>
+                          </a:solidFill>
+                          <a:latin typeface="Calibri" pitchFamily="34" charset="0"/>
+                          <a:ea typeface="Calibri" pitchFamily="34" charset="-122"/>
+                          <a:cs typeface="Calibri" pitchFamily="34" charset="-120"/>
+                        </a:rPr>
+                        <a:t>14.59%</a:t>
+                      </a:r>
+                      <a:endParaRPr lang="en-US" sz="1100" dirty="0">
+                        <a:latin typeface="Calibri" charset="0"/>
+                        <a:ea typeface="Calibri" charset="0"/>
+                        <a:cs typeface="Calibri" charset="0"/>
+                      </a:endParaRPr>
+                    </a:p>
+                  </a:txBody>
+                  <a:tcPr>
+                    <a:lnL w="5080" cap="flat" cmpd="sng" algn="ctr">
+                      <a:solidFill>
+                        <a:srgbClr val="E2E8F0"/>
+                      </a:solidFill>
+                      <a:prstDash val="solid"/>
+                      <a:round/>
+                      <a:headEnd type="none" w="med" len="med"/>
+                      <a:tailEnd type="none" w="med" len="med"/>
+                    </a:lnL>
+                    <a:lnR w="5080" cap="flat" cmpd="sng" algn="ctr">
+                      <a:solidFill>
+                        <a:srgbClr val="E2E8F0"/>
+                      </a:solidFill>
+                      <a:prstDash val="solid"/>
+                      <a:round/>
+                      <a:headEnd type="none" w="med" len="med"/>
+                      <a:tailEnd type="none" w="med" len="med"/>
+                    </a:lnR>
+                    <a:lnT w="5080" cap="flat" cmpd="sng" algn="ctr">
+                      <a:solidFill>
+                        <a:srgbClr val="E2E8F0"/>
+                      </a:solidFill>
+                      <a:prstDash val="solid"/>
+                      <a:round/>
+                      <a:headEnd type="none" w="med" len="med"/>
+                      <a:tailEnd type="none" w="med" len="med"/>
+                    </a:lnT>
+                    <a:lnB w="5080" cap="flat" cmpd="sng" algn="ctr">
+                      <a:solidFill>
+                        <a:srgbClr val="E2E8F0"/>
+                      </a:solidFill>
+                      <a:prstDash val="solid"/>
+                      <a:round/>
+                      <a:headEnd type="none" w="med" len="med"/>
+                      <a:tailEnd type="none" w="med" len="med"/>
+                    </a:lnB>
+                    <a:solidFill>
+                      <a:srgbClr val="EBF3FB"/>
+                    </a:solidFill>
+                  </a:tcPr>
+                </a:tc>
+                <a:tc>
+                  <a:txBody>
+                    <a:bodyPr/>
+                    <a:lstStyle/>
+                    <a:p>
+                      <a:pPr marL="0" indent="0" algn="ctr">
+                        <a:buNone/>
+                      </a:pPr>
+                      <a:r>
+                        <a:rPr lang="en-US" sz="1100" dirty="0">
+                          <a:solidFill>
+                            <a:srgbClr val="1E293B"/>
+                          </a:solidFill>
+                          <a:latin typeface="Calibri" pitchFamily="34" charset="0"/>
+                          <a:ea typeface="Calibri" pitchFamily="34" charset="-122"/>
+                          <a:cs typeface="Calibri" pitchFamily="34" charset="-120"/>
+                        </a:rPr>
+                        <a:t>16.19%</a:t>
+                      </a:r>
+                      <a:endParaRPr lang="en-US" sz="1100" dirty="0">
+                        <a:latin typeface="Calibri" charset="0"/>
+                        <a:ea typeface="Calibri" charset="0"/>
+                        <a:cs typeface="Calibri" charset="0"/>
+                      </a:endParaRPr>
+                    </a:p>
+                  </a:txBody>
+                  <a:tcPr>
+                    <a:lnL w="5080" cap="flat" cmpd="sng" algn="ctr">
+                      <a:solidFill>
+                        <a:srgbClr val="E2E8F0"/>
+                      </a:solidFill>
+                      <a:prstDash val="solid"/>
+                      <a:round/>
+                      <a:headEnd type="none" w="med" len="med"/>
+                      <a:tailEnd type="none" w="med" len="med"/>
+                    </a:lnL>
+                    <a:lnR w="5080" cap="flat" cmpd="sng" algn="ctr">
+                      <a:solidFill>
+                        <a:srgbClr val="E2E8F0"/>
+                      </a:solidFill>
+                      <a:prstDash val="solid"/>
+                      <a:round/>
+                      <a:headEnd type="none" w="med" len="med"/>
+                      <a:tailEnd type="none" w="med" len="med"/>
+                    </a:lnR>
+                    <a:lnT w="5080" cap="flat" cmpd="sng" algn="ctr">
+                      <a:solidFill>
+                        <a:srgbClr val="E2E8F0"/>
+                      </a:solidFill>
+                      <a:prstDash val="solid"/>
+                      <a:round/>
+                      <a:headEnd type="none" w="med" len="med"/>
+                      <a:tailEnd type="none" w="med" len="med"/>
+                    </a:lnT>
+                    <a:lnB w="5080" cap="flat" cmpd="sng" algn="ctr">
+                      <a:solidFill>
+                        <a:srgbClr val="E2E8F0"/>
+                      </a:solidFill>
+                      <a:prstDash val="solid"/>
+                      <a:round/>
+                      <a:headEnd type="none" w="med" len="med"/>
+                      <a:tailEnd type="none" w="med" len="med"/>
+                    </a:lnB>
+                    <a:solidFill>
+                      <a:srgbClr val="EBF3FB"/>
+                    </a:solidFill>
+                  </a:tcPr>
+                </a:tc>
+                <a:extLst>
+                  <a:ext uri="{0D108BD9-81ED-4DB2-BD59-A6C34878D82A}">
+                    <a16:rowId xmlns:a16="http://schemas.microsoft.com/office/drawing/2014/main" val="10002"/>
+                  </a:ext>
+                </a:extLst>
+              </a:tr>
+              <a:tr h="379336">
+                <a:tc>
+                  <a:txBody>
+                    <a:bodyPr/>
+                    <a:lstStyle/>
+                    <a:p>
+                      <a:pPr marL="0" indent="0">
+                        <a:buNone/>
+                      </a:pPr>
+                      <a:r>
+                        <a:rPr lang="en-US" sz="1100" dirty="0">
+                          <a:solidFill>
+                            <a:srgbClr val="1E293B"/>
+                          </a:solidFill>
+                          <a:latin typeface="Calibri" pitchFamily="34" charset="0"/>
+                          <a:ea typeface="Calibri" pitchFamily="34" charset="-122"/>
+                          <a:cs typeface="Calibri" pitchFamily="34" charset="-120"/>
+                        </a:rPr>
+                        <a:t>Median</a:t>
+                      </a:r>
+                      <a:endParaRPr lang="en-US" sz="1100" dirty="0">
+                        <a:latin typeface="Calibri" charset="0"/>
+                        <a:ea typeface="Calibri" charset="0"/>
+                        <a:cs typeface="Calibri" charset="0"/>
+                      </a:endParaRPr>
+                    </a:p>
+                  </a:txBody>
+                  <a:tcPr>
+                    <a:lnL w="5080" cap="flat" cmpd="sng" algn="ctr">
+                      <a:solidFill>
+                        <a:srgbClr val="E2E8F0"/>
+                      </a:solidFill>
+                      <a:prstDash val="solid"/>
+                      <a:round/>
+                      <a:headEnd type="none" w="med" len="med"/>
+                      <a:tailEnd type="none" w="med" len="med"/>
+                    </a:lnL>
+                    <a:lnR w="5080" cap="flat" cmpd="sng" algn="ctr">
+                      <a:solidFill>
+                        <a:srgbClr val="E2E8F0"/>
+                      </a:solidFill>
+                      <a:prstDash val="solid"/>
+                      <a:round/>
+                      <a:headEnd type="none" w="med" len="med"/>
+                      <a:tailEnd type="none" w="med" len="med"/>
+                    </a:lnR>
+                    <a:lnT w="5080" cap="flat" cmpd="sng" algn="ctr">
+                      <a:solidFill>
+                        <a:srgbClr val="E2E8F0"/>
+                      </a:solidFill>
+                      <a:prstDash val="solid"/>
+                      <a:round/>
+                      <a:headEnd type="none" w="med" len="med"/>
+                      <a:tailEnd type="none" w="med" len="med"/>
+                    </a:lnT>
+                    <a:lnB w="5080" cap="flat" cmpd="sng" algn="ctr">
+                      <a:solidFill>
+                        <a:srgbClr val="E2E8F0"/>
+                      </a:solidFill>
+                      <a:prstDash val="solid"/>
+                      <a:round/>
+                      <a:headEnd type="none" w="med" len="med"/>
+                      <a:tailEnd type="none" w="med" len="med"/>
+                    </a:lnB>
+                    <a:solidFill>
+                      <a:srgbClr val="FFFFFF"/>
+                    </a:solidFill>
+                  </a:tcPr>
+                </a:tc>
+                <a:tc>
+                  <a:txBody>
+                    <a:bodyPr/>
+                    <a:lstStyle/>
+                    <a:p>
+                      <a:pPr marL="0" indent="0" algn="ctr">
+                        <a:buNone/>
+                      </a:pPr>
+                      <a:r>
+                        <a:rPr lang="en-US" sz="1100" dirty="0">
+                          <a:solidFill>
+                            <a:srgbClr val="1E293B"/>
+                          </a:solidFill>
+                          <a:latin typeface="Calibri" pitchFamily="34" charset="0"/>
+                          <a:ea typeface="Calibri" pitchFamily="34" charset="-122"/>
+                          <a:cs typeface="Calibri" pitchFamily="34" charset="-120"/>
+                        </a:rPr>
+                        <a:t>3.02%</a:t>
+                      </a:r>
+                      <a:endParaRPr lang="en-US" sz="1100" dirty="0">
+                        <a:latin typeface="Calibri" charset="0"/>
+                        <a:ea typeface="Calibri" charset="0"/>
+                        <a:cs typeface="Calibri" charset="0"/>
+                      </a:endParaRPr>
+                    </a:p>
+                  </a:txBody>
+                  <a:tcPr>
+                    <a:lnL w="5080" cap="flat" cmpd="sng" algn="ctr">
+                      <a:solidFill>
+                        <a:srgbClr val="E2E8F0"/>
+                      </a:solidFill>
+                      <a:prstDash val="solid"/>
+                      <a:round/>
+                      <a:headEnd type="none" w="med" len="med"/>
+                      <a:tailEnd type="none" w="med" len="med"/>
+                    </a:lnL>
+                    <a:lnR w="5080" cap="flat" cmpd="sng" algn="ctr">
+                      <a:solidFill>
+                        <a:srgbClr val="E2E8F0"/>
+                      </a:solidFill>
+                      <a:prstDash val="solid"/>
+                      <a:round/>
+                      <a:headEnd type="none" w="med" len="med"/>
+                      <a:tailEnd type="none" w="med" len="med"/>
+                    </a:lnR>
+                    <a:lnT w="5080" cap="flat" cmpd="sng" algn="ctr">
+                      <a:solidFill>
+                        <a:srgbClr val="E2E8F0"/>
+                      </a:solidFill>
+                      <a:prstDash val="solid"/>
+                      <a:round/>
+                      <a:headEnd type="none" w="med" len="med"/>
+                      <a:tailEnd type="none" w="med" len="med"/>
+                    </a:lnT>
+                    <a:lnB w="5080" cap="flat" cmpd="sng" algn="ctr">
+                      <a:solidFill>
+                        <a:srgbClr val="E2E8F0"/>
+                      </a:solidFill>
+                      <a:prstDash val="solid"/>
+                      <a:round/>
+                      <a:headEnd type="none" w="med" len="med"/>
+                      <a:tailEnd type="none" w="med" len="med"/>
+                    </a:lnB>
+                    <a:solidFill>
+                      <a:srgbClr val="FFFFFF"/>
+                    </a:solidFill>
+                  </a:tcPr>
+                </a:tc>
+                <a:tc>
+                  <a:txBody>
+                    <a:bodyPr/>
+                    <a:lstStyle/>
+                    <a:p>
+                      <a:pPr marL="0" indent="0" algn="ctr">
+                        <a:buNone/>
+                      </a:pPr>
+                      <a:r>
+                        <a:rPr lang="en-US" sz="1100" dirty="0">
+                          <a:solidFill>
+                            <a:srgbClr val="1E293B"/>
+                          </a:solidFill>
+                          <a:latin typeface="Calibri" pitchFamily="34" charset="0"/>
+                          <a:ea typeface="Calibri" pitchFamily="34" charset="-122"/>
+                          <a:cs typeface="Calibri" pitchFamily="34" charset="-120"/>
+                        </a:rPr>
+                        <a:t>18.35%</a:t>
+                      </a:r>
+                      <a:endParaRPr lang="en-US" sz="1100" dirty="0">
+                        <a:latin typeface="Calibri" charset="0"/>
+                        <a:ea typeface="Calibri" charset="0"/>
+                        <a:cs typeface="Calibri" charset="0"/>
+                      </a:endParaRPr>
+                    </a:p>
+                  </a:txBody>
+                  <a:tcPr>
+                    <a:lnL w="5080" cap="flat" cmpd="sng" algn="ctr">
+                      <a:solidFill>
+                        <a:srgbClr val="E2E8F0"/>
+                      </a:solidFill>
+                      <a:prstDash val="solid"/>
+                      <a:round/>
+                      <a:headEnd type="none" w="med" len="med"/>
+                      <a:tailEnd type="none" w="med" len="med"/>
+                    </a:lnL>
+                    <a:lnR w="5080" cap="flat" cmpd="sng" algn="ctr">
+                      <a:solidFill>
+                        <a:srgbClr val="E2E8F0"/>
+                      </a:solidFill>
+                      <a:prstDash val="solid"/>
+                      <a:round/>
+                      <a:headEnd type="none" w="med" len="med"/>
+                      <a:tailEnd type="none" w="med" len="med"/>
+                    </a:lnR>
+                    <a:lnT w="5080" cap="flat" cmpd="sng" algn="ctr">
+                      <a:solidFill>
+                        <a:srgbClr val="E2E8F0"/>
+                      </a:solidFill>
+                      <a:prstDash val="solid"/>
+                      <a:round/>
+                      <a:headEnd type="none" w="med" len="med"/>
+                      <a:tailEnd type="none" w="med" len="med"/>
+                    </a:lnT>
+                    <a:lnB w="5080" cap="flat" cmpd="sng" algn="ctr">
+                      <a:solidFill>
+                        <a:srgbClr val="E2E8F0"/>
+                      </a:solidFill>
+                      <a:prstDash val="solid"/>
+                      <a:round/>
+                      <a:headEnd type="none" w="med" len="med"/>
+                      <a:tailEnd type="none" w="med" len="med"/>
+                    </a:lnB>
+                    <a:solidFill>
+                      <a:srgbClr val="FFFFFF"/>
+                    </a:solidFill>
+                  </a:tcPr>
+                </a:tc>
+                <a:extLst>
+                  <a:ext uri="{0D108BD9-81ED-4DB2-BD59-A6C34878D82A}">
+                    <a16:rowId xmlns:a16="http://schemas.microsoft.com/office/drawing/2014/main" val="10003"/>
+                  </a:ext>
+                </a:extLst>
+              </a:tr>
+              <a:tr h="326571">
+                <a:tc>
+                  <a:txBody>
+                    <a:bodyPr/>
+                    <a:lstStyle/>
+                    <a:p>
+                      <a:pPr marL="0" indent="0">
+                        <a:buNone/>
+                      </a:pPr>
+                      <a:r>
+                        <a:rPr lang="en-US" sz="1100" dirty="0">
+                          <a:solidFill>
+                            <a:srgbClr val="1E293B"/>
+                          </a:solidFill>
+                          <a:latin typeface="Calibri" pitchFamily="34" charset="0"/>
+                          <a:ea typeface="Calibri" pitchFamily="34" charset="-122"/>
+                          <a:cs typeface="Calibri" pitchFamily="34" charset="-120"/>
+                        </a:rPr>
+                        <a:t>Std Dev</a:t>
+                      </a:r>
+                      <a:endParaRPr lang="en-US" sz="1100" dirty="0">
+                        <a:latin typeface="Calibri" charset="0"/>
+                        <a:ea typeface="Calibri" charset="0"/>
+                        <a:cs typeface="Calibri" charset="0"/>
+                      </a:endParaRPr>
+                    </a:p>
+                  </a:txBody>
+                  <a:tcPr>
+                    <a:lnL w="5080" cap="flat" cmpd="sng" algn="ctr">
+                      <a:solidFill>
+                        <a:srgbClr val="E2E8F0"/>
+                      </a:solidFill>
+                      <a:prstDash val="solid"/>
+                      <a:round/>
+                      <a:headEnd type="none" w="med" len="med"/>
+                      <a:tailEnd type="none" w="med" len="med"/>
+                    </a:lnL>
+                    <a:lnR w="5080" cap="flat" cmpd="sng" algn="ctr">
+                      <a:solidFill>
+                        <a:srgbClr val="E2E8F0"/>
+                      </a:solidFill>
+                      <a:prstDash val="solid"/>
+                      <a:round/>
+                      <a:headEnd type="none" w="med" len="med"/>
+                      <a:tailEnd type="none" w="med" len="med"/>
+                    </a:lnR>
+                    <a:lnT w="5080" cap="flat" cmpd="sng" algn="ctr">
+                      <a:solidFill>
+                        <a:srgbClr val="E2E8F0"/>
+                      </a:solidFill>
+                      <a:prstDash val="solid"/>
+                      <a:round/>
+                      <a:headEnd type="none" w="med" len="med"/>
+                      <a:tailEnd type="none" w="med" len="med"/>
+                    </a:lnT>
+                    <a:lnB w="5080" cap="flat" cmpd="sng" algn="ctr">
+                      <a:solidFill>
+                        <a:srgbClr val="E2E8F0"/>
+                      </a:solidFill>
+                      <a:prstDash val="solid"/>
+                      <a:round/>
+                      <a:headEnd type="none" w="med" len="med"/>
+                      <a:tailEnd type="none" w="med" len="med"/>
+                    </a:lnB>
+                    <a:solidFill>
+                      <a:srgbClr val="EBF3FB"/>
+                    </a:solidFill>
+                  </a:tcPr>
+                </a:tc>
+                <a:tc>
+                  <a:txBody>
+                    <a:bodyPr/>
+                    <a:lstStyle/>
+                    <a:p>
+                      <a:pPr marL="0" indent="0" algn="ctr">
+                        <a:buNone/>
+                      </a:pPr>
+                      <a:r>
+                        <a:rPr lang="en-US" sz="1100" dirty="0">
+                          <a:solidFill>
+                            <a:srgbClr val="1E293B"/>
+                          </a:solidFill>
+                          <a:latin typeface="Calibri" pitchFamily="34" charset="0"/>
+                          <a:ea typeface="Calibri" pitchFamily="34" charset="-122"/>
+                          <a:cs typeface="Calibri" pitchFamily="34" charset="-120"/>
+                        </a:rPr>
+                        <a:t>50.02%</a:t>
+                      </a:r>
+                      <a:endParaRPr lang="en-US" sz="1100" dirty="0">
+                        <a:latin typeface="Calibri" charset="0"/>
+                        <a:ea typeface="Calibri" charset="0"/>
+                        <a:cs typeface="Calibri" charset="0"/>
+                      </a:endParaRPr>
+                    </a:p>
+                  </a:txBody>
+                  <a:tcPr>
+                    <a:lnL w="5080" cap="flat" cmpd="sng" algn="ctr">
+                      <a:solidFill>
+                        <a:srgbClr val="E2E8F0"/>
+                      </a:solidFill>
+                      <a:prstDash val="solid"/>
+                      <a:round/>
+                      <a:headEnd type="none" w="med" len="med"/>
+                      <a:tailEnd type="none" w="med" len="med"/>
+                    </a:lnL>
+                    <a:lnR w="5080" cap="flat" cmpd="sng" algn="ctr">
+                      <a:solidFill>
+                        <a:srgbClr val="E2E8F0"/>
+                      </a:solidFill>
+                      <a:prstDash val="solid"/>
+                      <a:round/>
+                      <a:headEnd type="none" w="med" len="med"/>
+                      <a:tailEnd type="none" w="med" len="med"/>
+                    </a:lnR>
+                    <a:lnT w="5080" cap="flat" cmpd="sng" algn="ctr">
+                      <a:solidFill>
+                        <a:srgbClr val="E2E8F0"/>
+                      </a:solidFill>
+                      <a:prstDash val="solid"/>
+                      <a:round/>
+                      <a:headEnd type="none" w="med" len="med"/>
+                      <a:tailEnd type="none" w="med" len="med"/>
+                    </a:lnT>
+                    <a:lnB w="5080" cap="flat" cmpd="sng" algn="ctr">
+                      <a:solidFill>
+                        <a:srgbClr val="E2E8F0"/>
+                      </a:solidFill>
+                      <a:prstDash val="solid"/>
+                      <a:round/>
+                      <a:headEnd type="none" w="med" len="med"/>
+                      <a:tailEnd type="none" w="med" len="med"/>
+                    </a:lnB>
+                    <a:solidFill>
+                      <a:srgbClr val="EBF3FB"/>
+                    </a:solidFill>
+                  </a:tcPr>
+                </a:tc>
+                <a:tc>
+                  <a:txBody>
+                    <a:bodyPr/>
+                    <a:lstStyle/>
+                    <a:p>
+                      <a:pPr marL="0" indent="0" algn="ctr">
+                        <a:buNone/>
+                      </a:pPr>
+                      <a:r>
+                        <a:rPr lang="en-US" sz="1100" dirty="0">
+                          <a:solidFill>
+                            <a:srgbClr val="1E293B"/>
+                          </a:solidFill>
+                          <a:latin typeface="Calibri" pitchFamily="34" charset="0"/>
+                          <a:ea typeface="Calibri" pitchFamily="34" charset="-122"/>
+                          <a:cs typeface="Calibri" pitchFamily="34" charset="-120"/>
+                        </a:rPr>
+                        <a:t>15.47%</a:t>
+                      </a:r>
+                      <a:endParaRPr lang="en-US" sz="1100" dirty="0">
+                        <a:latin typeface="Calibri" charset="0"/>
+                        <a:ea typeface="Calibri" charset="0"/>
+                        <a:cs typeface="Calibri" charset="0"/>
+                      </a:endParaRPr>
+                    </a:p>
+                  </a:txBody>
+                  <a:tcPr>
+                    <a:lnL w="5080" cap="flat" cmpd="sng" algn="ctr">
+                      <a:solidFill>
+                        <a:srgbClr val="E2E8F0"/>
+                      </a:solidFill>
+                      <a:prstDash val="solid"/>
+                      <a:round/>
+                      <a:headEnd type="none" w="med" len="med"/>
+                      <a:tailEnd type="none" w="med" len="med"/>
+                    </a:lnL>
+                    <a:lnR w="5080" cap="flat" cmpd="sng" algn="ctr">
+                      <a:solidFill>
+                        <a:srgbClr val="E2E8F0"/>
+                      </a:solidFill>
+                      <a:prstDash val="solid"/>
+                      <a:round/>
+                      <a:headEnd type="none" w="med" len="med"/>
+                      <a:tailEnd type="none" w="med" len="med"/>
+                    </a:lnR>
+                    <a:lnT w="5080" cap="flat" cmpd="sng" algn="ctr">
+                      <a:solidFill>
+                        <a:srgbClr val="E2E8F0"/>
+                      </a:solidFill>
+                      <a:prstDash val="solid"/>
+                      <a:round/>
+                      <a:headEnd type="none" w="med" len="med"/>
+                      <a:tailEnd type="none" w="med" len="med"/>
+                    </a:lnT>
+                    <a:lnB w="5080" cap="flat" cmpd="sng" algn="ctr">
+                      <a:solidFill>
+                        <a:srgbClr val="E2E8F0"/>
+                      </a:solidFill>
+                      <a:prstDash val="solid"/>
+                      <a:round/>
+                      <a:headEnd type="none" w="med" len="med"/>
+                      <a:tailEnd type="none" w="med" len="med"/>
+                    </a:lnB>
+                    <a:solidFill>
+                      <a:srgbClr val="EBF3FB"/>
+                    </a:solidFill>
+                  </a:tcPr>
+                </a:tc>
+                <a:extLst>
+                  <a:ext uri="{0D108BD9-81ED-4DB2-BD59-A6C34878D82A}">
+                    <a16:rowId xmlns:a16="http://schemas.microsoft.com/office/drawing/2014/main" val="10004"/>
+                  </a:ext>
+                </a:extLst>
+              </a:tr>
+              <a:tr h="326571">
+                <a:tc>
+                  <a:txBody>
+                    <a:bodyPr/>
+                    <a:lstStyle/>
+                    <a:p>
+                      <a:pPr marL="0" indent="0">
+                        <a:buNone/>
+                      </a:pPr>
+                      <a:r>
+                        <a:rPr lang="en-US" sz="1100" dirty="0">
+                          <a:solidFill>
+                            <a:srgbClr val="1E293B"/>
+                          </a:solidFill>
+                          <a:latin typeface="Calibri" pitchFamily="34" charset="0"/>
+                          <a:ea typeface="Calibri" pitchFamily="34" charset="-122"/>
+                          <a:cs typeface="Calibri" pitchFamily="34" charset="-120"/>
+                        </a:rPr>
+                        <a:t>Min</a:t>
+                      </a:r>
+                      <a:endParaRPr lang="en-US" sz="1100" dirty="0">
+                        <a:latin typeface="Calibri" charset="0"/>
+                        <a:ea typeface="Calibri" charset="0"/>
+                        <a:cs typeface="Calibri" charset="0"/>
+                      </a:endParaRPr>
+                    </a:p>
+                  </a:txBody>
+                  <a:tcPr>
+                    <a:lnL w="5080" cap="flat" cmpd="sng" algn="ctr">
+                      <a:solidFill>
+                        <a:srgbClr val="E2E8F0"/>
+                      </a:solidFill>
+                      <a:prstDash val="solid"/>
+                      <a:round/>
+                      <a:headEnd type="none" w="med" len="med"/>
+                      <a:tailEnd type="none" w="med" len="med"/>
+                    </a:lnL>
+                    <a:lnR w="5080" cap="flat" cmpd="sng" algn="ctr">
+                      <a:solidFill>
+                        <a:srgbClr val="E2E8F0"/>
+                      </a:solidFill>
+                      <a:prstDash val="solid"/>
+                      <a:round/>
+                      <a:headEnd type="none" w="med" len="med"/>
+                      <a:tailEnd type="none" w="med" len="med"/>
+                    </a:lnR>
+                    <a:lnT w="5080" cap="flat" cmpd="sng" algn="ctr">
+                      <a:solidFill>
+                        <a:srgbClr val="E2E8F0"/>
+                      </a:solidFill>
+                      <a:prstDash val="solid"/>
+                      <a:round/>
+                      <a:headEnd type="none" w="med" len="med"/>
+                      <a:tailEnd type="none" w="med" len="med"/>
+                    </a:lnT>
+                    <a:lnB w="5080" cap="flat" cmpd="sng" algn="ctr">
+                      <a:solidFill>
+                        <a:srgbClr val="E2E8F0"/>
+                      </a:solidFill>
+                      <a:prstDash val="solid"/>
+                      <a:round/>
+                      <a:headEnd type="none" w="med" len="med"/>
+                      <a:tailEnd type="none" w="med" len="med"/>
+                    </a:lnB>
+                    <a:solidFill>
+                      <a:srgbClr val="FFFFFF"/>
+                    </a:solidFill>
+                  </a:tcPr>
+                </a:tc>
+                <a:tc>
+                  <a:txBody>
+                    <a:bodyPr/>
+                    <a:lstStyle/>
+                    <a:p>
+                      <a:pPr marL="0" indent="0" algn="ctr">
+                        <a:buNone/>
+                      </a:pPr>
+                      <a:r>
+                        <a:rPr lang="en-US" sz="1100" dirty="0">
+                          <a:solidFill>
+                            <a:srgbClr val="DC2626"/>
+                          </a:solidFill>
+                          <a:latin typeface="Calibri" pitchFamily="34" charset="0"/>
+                          <a:ea typeface="Calibri" pitchFamily="34" charset="-122"/>
+                          <a:cs typeface="Calibri" pitchFamily="34" charset="-120"/>
+                        </a:rPr>
+                        <a:t>-35.16%</a:t>
+                      </a:r>
+                      <a:endParaRPr lang="en-US" sz="1100" dirty="0">
+                        <a:latin typeface="Calibri" charset="0"/>
+                        <a:ea typeface="Calibri" charset="0"/>
+                        <a:cs typeface="Calibri" charset="0"/>
+                      </a:endParaRPr>
+                    </a:p>
+                  </a:txBody>
+                  <a:tcPr>
+                    <a:lnL w="5080" cap="flat" cmpd="sng" algn="ctr">
+                      <a:solidFill>
+                        <a:srgbClr val="E2E8F0"/>
+                      </a:solidFill>
+                      <a:prstDash val="solid"/>
+                      <a:round/>
+                      <a:headEnd type="none" w="med" len="med"/>
+                      <a:tailEnd type="none" w="med" len="med"/>
+                    </a:lnL>
+                    <a:lnR w="5080" cap="flat" cmpd="sng" algn="ctr">
+                      <a:solidFill>
+                        <a:srgbClr val="E2E8F0"/>
+                      </a:solidFill>
+                      <a:prstDash val="solid"/>
+                      <a:round/>
+                      <a:headEnd type="none" w="med" len="med"/>
+                      <a:tailEnd type="none" w="med" len="med"/>
+                    </a:lnR>
+                    <a:lnT w="5080" cap="flat" cmpd="sng" algn="ctr">
+                      <a:solidFill>
+                        <a:srgbClr val="E2E8F0"/>
+                      </a:solidFill>
+                      <a:prstDash val="solid"/>
+                      <a:round/>
+                      <a:headEnd type="none" w="med" len="med"/>
+                      <a:tailEnd type="none" w="med" len="med"/>
+                    </a:lnT>
+                    <a:lnB w="5080" cap="flat" cmpd="sng" algn="ctr">
+                      <a:solidFill>
+                        <a:srgbClr val="E2E8F0"/>
+                      </a:solidFill>
+                      <a:prstDash val="solid"/>
+                      <a:round/>
+                      <a:headEnd type="none" w="med" len="med"/>
+                      <a:tailEnd type="none" w="med" len="med"/>
+                    </a:lnB>
+                    <a:solidFill>
+                      <a:srgbClr val="FFFFFF"/>
+                    </a:solidFill>
+                  </a:tcPr>
+                </a:tc>
+                <a:tc>
+                  <a:txBody>
+                    <a:bodyPr/>
+                    <a:lstStyle/>
+                    <a:p>
+                      <a:pPr marL="0" indent="0" algn="ctr">
+                        <a:buNone/>
+                      </a:pPr>
+                      <a:r>
+                        <a:rPr lang="en-US" sz="1100" dirty="0">
+                          <a:solidFill>
+                            <a:srgbClr val="DC2626"/>
+                          </a:solidFill>
+                          <a:latin typeface="Calibri" pitchFamily="34" charset="0"/>
+                          <a:ea typeface="Calibri" pitchFamily="34" charset="-122"/>
+                          <a:cs typeface="Calibri" pitchFamily="34" charset="-120"/>
+                        </a:rPr>
+                        <a:t>-7.93%</a:t>
+                      </a:r>
+                      <a:endParaRPr lang="en-US" sz="1100" dirty="0">
+                        <a:latin typeface="Calibri" charset="0"/>
+                        <a:ea typeface="Calibri" charset="0"/>
+                        <a:cs typeface="Calibri" charset="0"/>
+                      </a:endParaRPr>
+                    </a:p>
+                  </a:txBody>
+                  <a:tcPr>
+                    <a:lnL w="5080" cap="flat" cmpd="sng" algn="ctr">
+                      <a:solidFill>
+                        <a:srgbClr val="E2E8F0"/>
+                      </a:solidFill>
+                      <a:prstDash val="solid"/>
+                      <a:round/>
+                      <a:headEnd type="none" w="med" len="med"/>
+                      <a:tailEnd type="none" w="med" len="med"/>
+                    </a:lnL>
+                    <a:lnR w="5080" cap="flat" cmpd="sng" algn="ctr">
+                      <a:solidFill>
+                        <a:srgbClr val="E2E8F0"/>
+                      </a:solidFill>
+                      <a:prstDash val="solid"/>
+                      <a:round/>
+                      <a:headEnd type="none" w="med" len="med"/>
+                      <a:tailEnd type="none" w="med" len="med"/>
+                    </a:lnR>
+                    <a:lnT w="5080" cap="flat" cmpd="sng" algn="ctr">
+                      <a:solidFill>
+                        <a:srgbClr val="E2E8F0"/>
+                      </a:solidFill>
+                      <a:prstDash val="solid"/>
+                      <a:round/>
+                      <a:headEnd type="none" w="med" len="med"/>
+                      <a:tailEnd type="none" w="med" len="med"/>
+                    </a:lnT>
+                    <a:lnB w="5080" cap="flat" cmpd="sng" algn="ctr">
+                      <a:solidFill>
+                        <a:srgbClr val="E2E8F0"/>
+                      </a:solidFill>
+                      <a:prstDash val="solid"/>
+                      <a:round/>
+                      <a:headEnd type="none" w="med" len="med"/>
+                      <a:tailEnd type="none" w="med" len="med"/>
+                    </a:lnB>
+                    <a:solidFill>
+                      <a:srgbClr val="FFFFFF"/>
+                    </a:solidFill>
+                  </a:tcPr>
+                </a:tc>
+                <a:extLst>
+                  <a:ext uri="{0D108BD9-81ED-4DB2-BD59-A6C34878D82A}">
+                    <a16:rowId xmlns:a16="http://schemas.microsoft.com/office/drawing/2014/main" val="10005"/>
+                  </a:ext>
+                </a:extLst>
+              </a:tr>
+              <a:tr h="326571">
+                <a:tc>
+                  <a:txBody>
+                    <a:bodyPr/>
+                    <a:lstStyle/>
+                    <a:p>
+                      <a:pPr marL="0" indent="0">
+                        <a:buNone/>
+                      </a:pPr>
+                      <a:r>
+                        <a:rPr lang="en-US" sz="1100" dirty="0">
+                          <a:solidFill>
+                            <a:srgbClr val="1E293B"/>
+                          </a:solidFill>
+                          <a:latin typeface="Calibri" pitchFamily="34" charset="0"/>
+                          <a:ea typeface="Calibri" pitchFamily="34" charset="-122"/>
+                          <a:cs typeface="Calibri" pitchFamily="34" charset="-120"/>
+                        </a:rPr>
+                        <a:t>Max</a:t>
+                      </a:r>
+                      <a:endParaRPr lang="en-US" sz="1100" dirty="0">
+                        <a:latin typeface="Calibri" charset="0"/>
+                        <a:ea typeface="Calibri" charset="0"/>
+                        <a:cs typeface="Calibri" charset="0"/>
+                      </a:endParaRPr>
+                    </a:p>
+                  </a:txBody>
+                  <a:tcPr>
+                    <a:lnL w="5080" cap="flat" cmpd="sng" algn="ctr">
+                      <a:solidFill>
+                        <a:srgbClr val="E2E8F0"/>
+                      </a:solidFill>
+                      <a:prstDash val="solid"/>
+                      <a:round/>
+                      <a:headEnd type="none" w="med" len="med"/>
+                      <a:tailEnd type="none" w="med" len="med"/>
+                    </a:lnL>
+                    <a:lnR w="5080" cap="flat" cmpd="sng" algn="ctr">
+                      <a:solidFill>
+                        <a:srgbClr val="E2E8F0"/>
+                      </a:solidFill>
+                      <a:prstDash val="solid"/>
+                      <a:round/>
+                      <a:headEnd type="none" w="med" len="med"/>
+                      <a:tailEnd type="none" w="med" len="med"/>
+                    </a:lnR>
+                    <a:lnT w="5080" cap="flat" cmpd="sng" algn="ctr">
+                      <a:solidFill>
+                        <a:srgbClr val="E2E8F0"/>
+                      </a:solidFill>
+                      <a:prstDash val="solid"/>
+                      <a:round/>
+                      <a:headEnd type="none" w="med" len="med"/>
+                      <a:tailEnd type="none" w="med" len="med"/>
+                    </a:lnT>
+                    <a:lnB w="5080" cap="flat" cmpd="sng" algn="ctr">
+                      <a:solidFill>
+                        <a:srgbClr val="E2E8F0"/>
+                      </a:solidFill>
+                      <a:prstDash val="solid"/>
+                      <a:round/>
+                      <a:headEnd type="none" w="med" len="med"/>
+                      <a:tailEnd type="none" w="med" len="med"/>
+                    </a:lnB>
+                    <a:solidFill>
+                      <a:srgbClr val="EBF3FB"/>
+                    </a:solidFill>
+                  </a:tcPr>
+                </a:tc>
+                <a:tc>
+                  <a:txBody>
+                    <a:bodyPr/>
+                    <a:lstStyle/>
+                    <a:p>
+                      <a:pPr marL="0" indent="0" algn="ctr">
+                        <a:buNone/>
+                      </a:pPr>
+                      <a:r>
+                        <a:rPr lang="en-US" sz="1100" dirty="0">
+                          <a:solidFill>
+                            <a:srgbClr val="16A34A"/>
+                          </a:solidFill>
+                          <a:latin typeface="Calibri" pitchFamily="34" charset="0"/>
+                          <a:ea typeface="Calibri" pitchFamily="34" charset="-122"/>
+                          <a:cs typeface="Calibri" pitchFamily="34" charset="-120"/>
+                        </a:rPr>
+                        <a:t>140.18%</a:t>
+                      </a:r>
+                      <a:endParaRPr lang="en-US" sz="1100" dirty="0">
+                        <a:latin typeface="Calibri" charset="0"/>
+                        <a:ea typeface="Calibri" charset="0"/>
+                        <a:cs typeface="Calibri" charset="0"/>
+                      </a:endParaRPr>
+                    </a:p>
+                  </a:txBody>
+                  <a:tcPr>
+                    <a:lnL w="5080" cap="flat" cmpd="sng" algn="ctr">
+                      <a:solidFill>
+                        <a:srgbClr val="E2E8F0"/>
+                      </a:solidFill>
+                      <a:prstDash val="solid"/>
+                      <a:round/>
+                      <a:headEnd type="none" w="med" len="med"/>
+                      <a:tailEnd type="none" w="med" len="med"/>
+                    </a:lnL>
+                    <a:lnR w="5080" cap="flat" cmpd="sng" algn="ctr">
+                      <a:solidFill>
+                        <a:srgbClr val="E2E8F0"/>
+                      </a:solidFill>
+                      <a:prstDash val="solid"/>
+                      <a:round/>
+                      <a:headEnd type="none" w="med" len="med"/>
+                      <a:tailEnd type="none" w="med" len="med"/>
+                    </a:lnR>
+                    <a:lnT w="5080" cap="flat" cmpd="sng" algn="ctr">
+                      <a:solidFill>
+                        <a:srgbClr val="E2E8F0"/>
+                      </a:solidFill>
+                      <a:prstDash val="solid"/>
+                      <a:round/>
+                      <a:headEnd type="none" w="med" len="med"/>
+                      <a:tailEnd type="none" w="med" len="med"/>
+                    </a:lnT>
+                    <a:lnB w="5080" cap="flat" cmpd="sng" algn="ctr">
+                      <a:solidFill>
+                        <a:srgbClr val="E2E8F0"/>
+                      </a:solidFill>
+                      <a:prstDash val="solid"/>
+                      <a:round/>
+                      <a:headEnd type="none" w="med" len="med"/>
+                      <a:tailEnd type="none" w="med" len="med"/>
+                    </a:lnB>
+                    <a:solidFill>
+                      <a:srgbClr val="EBF3FB"/>
+                    </a:solidFill>
+                  </a:tcPr>
+                </a:tc>
+                <a:tc>
+                  <a:txBody>
+                    <a:bodyPr/>
+                    <a:lstStyle/>
+                    <a:p>
+                      <a:pPr marL="0" indent="0" algn="ctr">
+                        <a:buNone/>
+                      </a:pPr>
+                      <a:r>
+                        <a:rPr lang="en-US" sz="1100" dirty="0">
+                          <a:solidFill>
+                            <a:srgbClr val="16A34A"/>
+                          </a:solidFill>
+                          <a:latin typeface="Calibri" pitchFamily="34" charset="0"/>
+                          <a:ea typeface="Calibri" pitchFamily="34" charset="-122"/>
+                          <a:cs typeface="Calibri" pitchFamily="34" charset="-120"/>
+                        </a:rPr>
+                        <a:t>43.13%</a:t>
+                      </a:r>
+                      <a:endParaRPr lang="en-US" sz="1100" dirty="0">
+                        <a:latin typeface="Calibri" charset="0"/>
+                        <a:ea typeface="Calibri" charset="0"/>
+                        <a:cs typeface="Calibri" charset="0"/>
+                      </a:endParaRPr>
+                    </a:p>
+                  </a:txBody>
+                  <a:tcPr>
+                    <a:lnL w="5080" cap="flat" cmpd="sng" algn="ctr">
+                      <a:solidFill>
+                        <a:srgbClr val="E2E8F0"/>
+                      </a:solidFill>
+                      <a:prstDash val="solid"/>
+                      <a:round/>
+                      <a:headEnd type="none" w="med" len="med"/>
+                      <a:tailEnd type="none" w="med" len="med"/>
+                    </a:lnL>
+                    <a:lnR w="5080" cap="flat" cmpd="sng" algn="ctr">
+                      <a:solidFill>
+                        <a:srgbClr val="E2E8F0"/>
+                      </a:solidFill>
+                      <a:prstDash val="solid"/>
+                      <a:round/>
+                      <a:headEnd type="none" w="med" len="med"/>
+                      <a:tailEnd type="none" w="med" len="med"/>
+                    </a:lnR>
+                    <a:lnT w="5080" cap="flat" cmpd="sng" algn="ctr">
+                      <a:solidFill>
+                        <a:srgbClr val="E2E8F0"/>
+                      </a:solidFill>
+                      <a:prstDash val="solid"/>
+                      <a:round/>
+                      <a:headEnd type="none" w="med" len="med"/>
+                      <a:tailEnd type="none" w="med" len="med"/>
+                    </a:lnT>
+                    <a:lnB w="5080" cap="flat" cmpd="sng" algn="ctr">
+                      <a:solidFill>
+                        <a:srgbClr val="E2E8F0"/>
+                      </a:solidFill>
+                      <a:prstDash val="solid"/>
+                      <a:round/>
+                      <a:headEnd type="none" w="med" len="med"/>
+                      <a:tailEnd type="none" w="med" len="med"/>
+                    </a:lnB>
+                    <a:solidFill>
+                      <a:srgbClr val="EBF3FB"/>
+                    </a:solidFill>
+                  </a:tcPr>
+                </a:tc>
+                <a:extLst>
+                  <a:ext uri="{0D108BD9-81ED-4DB2-BD59-A6C34878D82A}">
+                    <a16:rowId xmlns:a16="http://schemas.microsoft.com/office/drawing/2014/main" val="10006"/>
+                  </a:ext>
+                </a:extLst>
+              </a:tr>
+            </a:tbl>
+          </a:graphicData>
+        </a:graphic>
+      </p:graphicFrame>
+      <p:sp>
+        <p:nvSpPr>
+          <p:cNvPr id="6" name="Text 3"/>
+          <p:cNvSpPr/>
+          <p:nvPr/>
+        </p:nvSpPr>
+        <p:spPr>
+          <a:xfrm>
+            <a:off x="3749040" y="777240"/>
+            <a:ext cx="5120640" cy="274320"/>
+          </a:xfrm>
+          <a:prstGeom prst="rect">
+            <a:avLst/>
+          </a:prstGeom>
+          <a:noFill/>
+          <a:ln/>
+        </p:spPr>
+        <p:txBody>
+          <a:bodyPr wrap="square" rtlCol="0" anchor="ctr"/>
+          <a:lstStyle/>
+          <a:p>
+            <a:pPr marL="0" indent="0">
+              <a:buNone/>
+            </a:pPr>
+            <a:r>
+              <a:rPr lang="en-US" sz="1200" b="1" dirty="0">
+                <a:solidFill>
+                  <a:srgbClr val="1A2F5A"/>
+                </a:solidFill>
+                <a:latin typeface="Calibri" pitchFamily="34" charset="0"/>
+                <a:ea typeface="Calibri" pitchFamily="34" charset="-122"/>
+                <a:cs typeface="Calibri" pitchFamily="34" charset="-120"/>
+              </a:rPr>
+              <a:t>Statistical Tests</a:t>
+            </a:r>
+            <a:endParaRPr lang="en-US" sz="1200" dirty="0"/>
+          </a:p>
+        </p:txBody>
+      </p:sp>
+      <p:sp>
+        <p:nvSpPr>
+          <p:cNvPr id="7" name="Shape 4"/>
+          <p:cNvSpPr/>
+          <p:nvPr/>
+        </p:nvSpPr>
+        <p:spPr>
+          <a:xfrm>
+            <a:off x="3749040" y="1097280"/>
+            <a:ext cx="5120640" cy="1005840"/>
+          </a:xfrm>
+          <a:prstGeom prst="rect">
+            <a:avLst/>
+          </a:prstGeom>
+          <a:solidFill>
+            <a:srgbClr val="FFF7ED"/>
+          </a:solidFill>
+          <a:ln w="12700">
+            <a:solidFill>
+              <a:srgbClr val="E2E8F0"/>
+            </a:solidFill>
+            <a:prstDash val="solid"/>
+          </a:ln>
+          <a:effectLst>
+            <a:outerShdw blurRad="38100" dist="12700" dir="8100000" algn="bl" rotWithShape="0">
+              <a:srgbClr val="000000">
+                <a:alpha val="7000"/>
+              </a:srgbClr>
+            </a:outerShdw>
+          </a:effectLst>
+        </p:spPr>
+      </p:sp>
+      <p:sp>
+        <p:nvSpPr>
+          <p:cNvPr id="5" name="Text 5"/>
+          <p:cNvSpPr/>
+          <p:nvPr/>
+        </p:nvSpPr>
+        <p:spPr>
+          <a:xfrm>
+            <a:off x="3858768" y="1143000"/>
+            <a:ext cx="3200400" cy="256032"/>
+          </a:xfrm>
+          <a:prstGeom prst="rect">
+            <a:avLst/>
+          </a:prstGeom>
+          <a:noFill/>
+          <a:ln/>
+        </p:spPr>
+        <p:txBody>
+          <a:bodyPr wrap="square" rtlCol="0" anchor="ctr"/>
+          <a:lstStyle/>
+          <a:p>
+            <a:pPr marL="0" indent="0">
+              <a:buNone/>
+            </a:pPr>
+            <a:r>
+              <a:rPr lang="en-US" sz="1100" b="1" dirty="0">
+                <a:solidFill>
+                  <a:srgbClr val="1A2F5A"/>
+                </a:solidFill>
+                <a:latin typeface="Calibri" pitchFamily="34" charset="0"/>
+                <a:ea typeface="Calibri" pitchFamily="34" charset="-122"/>
+                <a:cs typeface="Calibri" pitchFamily="34" charset="-120"/>
+              </a:rPr>
+              <a:t>Welch t-test (one-tailed)</a:t>
+            </a:r>
+            <a:endParaRPr lang="en-US" sz="1100" dirty="0"/>
+          </a:p>
+        </p:txBody>
+      </p:sp>
+      <p:sp>
+        <p:nvSpPr>
+          <p:cNvPr id="9" name="Text 6"/>
+          <p:cNvSpPr/>
+          <p:nvPr/>
+        </p:nvSpPr>
+        <p:spPr>
+          <a:xfrm>
+            <a:off x="3858768" y="1389888"/>
+            <a:ext cx="3017520" cy="502920"/>
+          </a:xfrm>
+          <a:prstGeom prst="rect">
+            <a:avLst/>
+          </a:prstGeom>
+          <a:noFill/>
+          <a:ln/>
+        </p:spPr>
+        <p:txBody>
+          <a:bodyPr wrap="square" rtlCol="0" anchor="ctr"/>
+          <a:lstStyle/>
+          <a:p>
+            <a:pPr marL="0" indent="0">
+              <a:buNone/>
+            </a:pPr>
+            <a:r>
+              <a:rPr lang="en-US" sz="950" dirty="0">
+                <a:solidFill>
+                  <a:srgbClr val="64748B"/>
+                </a:solidFill>
+                <a:latin typeface="Calibri" pitchFamily="34" charset="0"/>
+                <a:ea typeface="Calibri" pitchFamily="34" charset="-122"/>
+                <a:cs typeface="Calibri" pitchFamily="34" charset="-120"/>
+              </a:rPr>
+              <a:t>H₀: mean growth Non-CIS ≤ CIS   ·   t-statistic = 0.1141   ·   p (two-tailed) = 0.9107   ·   p (one-tailed) = 0.4553</a:t>
+            </a:r>
+            <a:endParaRPr lang="en-US" sz="950" dirty="0"/>
+          </a:p>
+        </p:txBody>
+      </p:sp>
+      <p:sp>
+        <p:nvSpPr>
+          <p:cNvPr id="10" name="Shape 7"/>
+          <p:cNvSpPr/>
+          <p:nvPr/>
+        </p:nvSpPr>
+        <p:spPr>
+          <a:xfrm>
+            <a:off x="6995160" y="1234440"/>
+            <a:ext cx="1737360" cy="685800"/>
+          </a:xfrm>
+          <a:prstGeom prst="rect">
+            <a:avLst/>
+          </a:prstGeom>
+          <a:solidFill>
+            <a:srgbClr val="D97706"/>
+          </a:solidFill>
+          <a:ln w="12700">
+            <a:solidFill>
+              <a:srgbClr val="D97706"/>
+            </a:solidFill>
+            <a:prstDash val="solid"/>
+          </a:ln>
+        </p:spPr>
+      </p:sp>
+      <p:sp>
+        <p:nvSpPr>
+          <p:cNvPr id="11" name="Text 8"/>
+          <p:cNvSpPr/>
+          <p:nvPr/>
+        </p:nvSpPr>
+        <p:spPr>
+          <a:xfrm>
+            <a:off x="6995160" y="1234440"/>
+            <a:ext cx="1737360" cy="685800"/>
+          </a:xfrm>
+          <a:prstGeom prst="rect">
+            <a:avLst/>
+          </a:prstGeom>
+          <a:noFill/>
+          <a:ln/>
+        </p:spPr>
+        <p:txBody>
+          <a:bodyPr wrap="square" rtlCol="0" anchor="ctr"/>
+          <a:lstStyle/>
+          <a:p>
+            <a:pPr marL="0" indent="0" algn="ctr">
+              <a:buNone/>
+            </a:pPr>
+            <a:r>
+              <a:rPr lang="en-US" sz="1000" b="1" dirty="0">
+                <a:solidFill>
+                  <a:srgbClr val="FFFFFF"/>
+                </a:solidFill>
+                <a:latin typeface="Calibri" pitchFamily="34" charset="0"/>
+                <a:ea typeface="Calibri" pitchFamily="34" charset="-122"/>
+                <a:cs typeface="Calibri" pitchFamily="34" charset="-120"/>
+              </a:rPr>
+              <a:t>FAIL TO REJECT H₀</a:t>
+            </a:r>
+            <a:endParaRPr lang="en-US" sz="1000" dirty="0"/>
+          </a:p>
+        </p:txBody>
+      </p:sp>
+      <p:sp>
+        <p:nvSpPr>
+          <p:cNvPr id="12" name="Shape 9"/>
+          <p:cNvSpPr/>
+          <p:nvPr/>
+        </p:nvSpPr>
+        <p:spPr>
+          <a:xfrm>
+            <a:off x="3749040" y="2194560"/>
+            <a:ext cx="5120640" cy="1005840"/>
+          </a:xfrm>
+          <a:prstGeom prst="rect">
+            <a:avLst/>
+          </a:prstGeom>
+          <a:solidFill>
+            <a:srgbClr val="F0FDF4"/>
+          </a:solidFill>
+          <a:ln w="12700">
+            <a:solidFill>
+              <a:srgbClr val="E2E8F0"/>
+            </a:solidFill>
+            <a:prstDash val="solid"/>
+          </a:ln>
+          <a:effectLst>
+            <a:outerShdw blurRad="38100" dist="12700" dir="8100000" algn="bl" rotWithShape="0">
+              <a:srgbClr val="000000">
+                <a:alpha val="7000"/>
+              </a:srgbClr>
+            </a:outerShdw>
+          </a:effectLst>
+        </p:spPr>
+      </p:sp>
+      <p:sp>
+        <p:nvSpPr>
+          <p:cNvPr id="13" name="Text 10"/>
+          <p:cNvSpPr/>
+          <p:nvPr/>
+        </p:nvSpPr>
+        <p:spPr>
+          <a:xfrm>
+            <a:off x="3858768" y="2240280"/>
+            <a:ext cx="3200400" cy="256032"/>
+          </a:xfrm>
+          <a:prstGeom prst="rect">
+            <a:avLst/>
+          </a:prstGeom>
+          <a:noFill/>
+          <a:ln/>
+        </p:spPr>
+        <p:txBody>
+          <a:bodyPr wrap="square" rtlCol="0" anchor="ctr"/>
+          <a:lstStyle/>
+          <a:p>
+            <a:pPr marL="0" indent="0">
+              <a:buNone/>
+            </a:pPr>
+            <a:r>
+              <a:rPr lang="en-US" sz="1100" b="1" dirty="0">
+                <a:solidFill>
+                  <a:srgbClr val="1A2F5A"/>
+                </a:solidFill>
+                <a:latin typeface="Calibri" pitchFamily="34" charset="0"/>
+                <a:ea typeface="Calibri" pitchFamily="34" charset="-122"/>
+                <a:cs typeface="Calibri" pitchFamily="34" charset="-120"/>
+              </a:rPr>
+              <a:t>Mann-Whitney U test</a:t>
+            </a:r>
+            <a:endParaRPr lang="en-US" sz="1100" dirty="0"/>
+          </a:p>
+        </p:txBody>
+      </p:sp>
+      <p:sp>
+        <p:nvSpPr>
+          <p:cNvPr id="14" name="Text 11"/>
+          <p:cNvSpPr/>
+          <p:nvPr/>
+        </p:nvSpPr>
+        <p:spPr>
+          <a:xfrm>
+            <a:off x="3858768" y="2487168"/>
+            <a:ext cx="3017520" cy="502920"/>
+          </a:xfrm>
+          <a:prstGeom prst="rect">
+            <a:avLst/>
+          </a:prstGeom>
+          <a:noFill/>
+          <a:ln/>
+        </p:spPr>
+        <p:txBody>
+          <a:bodyPr wrap="square" rtlCol="0" anchor="ctr"/>
+          <a:lstStyle/>
+          <a:p>
+            <a:pPr marL="0" indent="0">
+              <a:buNone/>
+            </a:pPr>
+            <a:r>
+              <a:rPr lang="en-US" sz="950" dirty="0">
+                <a:solidFill>
+                  <a:srgbClr val="64748B"/>
+                </a:solidFill>
+                <a:latin typeface="Calibri" pitchFamily="34" charset="0"/>
+                <a:ea typeface="Calibri" pitchFamily="34" charset="-122"/>
+                <a:cs typeface="Calibri" pitchFamily="34" charset="-120"/>
+              </a:rPr>
+              <a:t>Non-parametric alternative   ·   U-statistic = 135.0   ·   p-value = 0.0468</a:t>
+            </a:r>
+            <a:endParaRPr lang="en-US" sz="950" dirty="0"/>
+          </a:p>
+        </p:txBody>
+      </p:sp>
+      <p:sp>
+        <p:nvSpPr>
+          <p:cNvPr id="15" name="Shape 12"/>
+          <p:cNvSpPr/>
+          <p:nvPr/>
+        </p:nvSpPr>
+        <p:spPr>
+          <a:xfrm>
+            <a:off x="6995160" y="2331720"/>
+            <a:ext cx="1737360" cy="685800"/>
+          </a:xfrm>
+          <a:prstGeom prst="rect">
+            <a:avLst/>
+          </a:prstGeom>
+          <a:solidFill>
+            <a:srgbClr val="16A34A"/>
+          </a:solidFill>
+          <a:ln w="12700">
+            <a:solidFill>
+              <a:srgbClr val="16A34A"/>
+            </a:solidFill>
+            <a:prstDash val="solid"/>
+          </a:ln>
+        </p:spPr>
+      </p:sp>
+      <p:sp>
+        <p:nvSpPr>
+          <p:cNvPr id="16" name="Text 13"/>
+          <p:cNvSpPr/>
+          <p:nvPr/>
+        </p:nvSpPr>
+        <p:spPr>
+          <a:xfrm>
+            <a:off x="6995160" y="2331720"/>
+            <a:ext cx="1737360" cy="685800"/>
+          </a:xfrm>
+          <a:prstGeom prst="rect">
+            <a:avLst/>
+          </a:prstGeom>
+          <a:noFill/>
+          <a:ln/>
+        </p:spPr>
+        <p:txBody>
+          <a:bodyPr wrap="square" rtlCol="0" anchor="ctr"/>
+          <a:lstStyle/>
+          <a:p>
+            <a:pPr marL="0" indent="0" algn="ctr">
+              <a:buNone/>
+            </a:pPr>
+            <a:r>
+              <a:rPr lang="en-US" sz="1000" b="1" dirty="0">
+                <a:solidFill>
+                  <a:srgbClr val="FFFFFF"/>
+                </a:solidFill>
+                <a:latin typeface="Calibri" pitchFamily="34" charset="0"/>
+                <a:ea typeface="Calibri" pitchFamily="34" charset="-122"/>
+                <a:cs typeface="Calibri" pitchFamily="34" charset="-120"/>
+              </a:rPr>
+              <a:t>REJECT H₀</a:t>
+            </a:r>
+            <a:endParaRPr lang="en-US" sz="1000" dirty="0"/>
+          </a:p>
+        </p:txBody>
+      </p:sp>
+      <p:sp>
+        <p:nvSpPr>
+          <p:cNvPr id="17" name="Shape 14"/>
+          <p:cNvSpPr/>
+          <p:nvPr/>
+        </p:nvSpPr>
+        <p:spPr>
+          <a:xfrm>
+            <a:off x="3749040" y="3291840"/>
+            <a:ext cx="5120640" cy="1005840"/>
+          </a:xfrm>
+          <a:prstGeom prst="rect">
+            <a:avLst/>
+          </a:prstGeom>
+          <a:solidFill>
+            <a:srgbClr val="F8FAFC"/>
+          </a:solidFill>
+          <a:ln w="12700">
+            <a:solidFill>
+              <a:srgbClr val="E2E8F0"/>
+            </a:solidFill>
+            <a:prstDash val="solid"/>
+          </a:ln>
+          <a:effectLst>
+            <a:outerShdw blurRad="38100" dist="12700" dir="8100000" algn="bl" rotWithShape="0">
+              <a:srgbClr val="000000">
+                <a:alpha val="7000"/>
+              </a:srgbClr>
+            </a:outerShdw>
+          </a:effectLst>
+        </p:spPr>
+      </p:sp>
+      <p:sp>
+        <p:nvSpPr>
+          <p:cNvPr id="18" name="Text 15"/>
+          <p:cNvSpPr/>
+          <p:nvPr/>
+        </p:nvSpPr>
+        <p:spPr>
+          <a:xfrm>
+            <a:off x="3858768" y="3337560"/>
+            <a:ext cx="3200400" cy="256032"/>
+          </a:xfrm>
+          <a:prstGeom prst="rect">
+            <a:avLst/>
+          </a:prstGeom>
+          <a:noFill/>
+          <a:ln/>
+        </p:spPr>
+        <p:txBody>
+          <a:bodyPr wrap="square" rtlCol="0" anchor="ctr"/>
+          <a:lstStyle/>
+          <a:p>
+            <a:pPr marL="0" indent="0">
+              <a:buNone/>
+            </a:pPr>
+            <a:r>
+              <a:rPr lang="en-US" sz="1100" b="1" dirty="0">
+                <a:solidFill>
+                  <a:srgbClr val="1A2F5A"/>
+                </a:solidFill>
+                <a:latin typeface="Calibri" pitchFamily="34" charset="0"/>
+                <a:ea typeface="Calibri" pitchFamily="34" charset="-122"/>
+                <a:cs typeface="Calibri" pitchFamily="34" charset="-120"/>
+              </a:rPr>
+              <a:t>Cohen's d Effect Size</a:t>
+            </a:r>
+            <a:endParaRPr lang="en-US" sz="1100" dirty="0"/>
+          </a:p>
+        </p:txBody>
+      </p:sp>
+      <p:sp>
+        <p:nvSpPr>
+          <p:cNvPr id="19" name="Text 16"/>
+          <p:cNvSpPr/>
+          <p:nvPr/>
+        </p:nvSpPr>
+        <p:spPr>
+          <a:xfrm>
+            <a:off x="3858768" y="3584448"/>
+            <a:ext cx="3017520" cy="502920"/>
+          </a:xfrm>
+          <a:prstGeom prst="rect">
+            <a:avLst/>
+          </a:prstGeom>
+          <a:noFill/>
+          <a:ln/>
+        </p:spPr>
+        <p:txBody>
+          <a:bodyPr wrap="square" rtlCol="0" anchor="ctr"/>
+          <a:lstStyle/>
+          <a:p>
+            <a:pPr marL="0" indent="0">
+              <a:buNone/>
+            </a:pPr>
+            <a:r>
+              <a:rPr lang="en-US" sz="950" dirty="0">
+                <a:solidFill>
+                  <a:srgbClr val="64748B"/>
+                </a:solidFill>
+                <a:latin typeface="Calibri" pitchFamily="34" charset="0"/>
+                <a:ea typeface="Calibri" pitchFamily="34" charset="-122"/>
+                <a:cs typeface="Calibri" pitchFamily="34" charset="-120"/>
+              </a:rPr>
+              <a:t>d = 0.0431   ·   (small effect)</a:t>
+            </a:r>
+            <a:endParaRPr lang="en-US" sz="950" dirty="0"/>
+          </a:p>
+        </p:txBody>
+      </p:sp>
+      <p:sp>
+        <p:nvSpPr>
+          <p:cNvPr id="20" name="Shape 17"/>
+          <p:cNvSpPr/>
+          <p:nvPr/>
+        </p:nvSpPr>
+        <p:spPr>
+          <a:xfrm>
+            <a:off x="6995160" y="3429000"/>
+            <a:ext cx="1737360" cy="685800"/>
+          </a:xfrm>
+          <a:prstGeom prst="rect">
+            <a:avLst/>
+          </a:prstGeom>
+          <a:solidFill>
+            <a:srgbClr val="64748B"/>
+          </a:solidFill>
+          <a:ln w="12700">
+            <a:solidFill>
+              <a:srgbClr val="64748B"/>
+            </a:solidFill>
+            <a:prstDash val="solid"/>
+          </a:ln>
+        </p:spPr>
+      </p:sp>
+      <p:sp>
+        <p:nvSpPr>
+          <p:cNvPr id="21" name="Text 18"/>
+          <p:cNvSpPr/>
+          <p:nvPr/>
+        </p:nvSpPr>
+        <p:spPr>
+          <a:xfrm>
+            <a:off x="6995160" y="3429000"/>
+            <a:ext cx="1737360" cy="685800"/>
+          </a:xfrm>
+          <a:prstGeom prst="rect">
+            <a:avLst/>
+          </a:prstGeom>
+          <a:noFill/>
+          <a:ln/>
+        </p:spPr>
+        <p:txBody>
+          <a:bodyPr wrap="square" rtlCol="0" anchor="ctr"/>
+          <a:lstStyle/>
+          <a:p>
+            <a:pPr marL="0" indent="0" algn="ctr">
+              <a:buNone/>
+            </a:pPr>
+            <a:r>
+              <a:rPr lang="en-US" sz="1000" b="1" dirty="0">
+                <a:solidFill>
+                  <a:srgbClr val="FFFFFF"/>
+                </a:solidFill>
+                <a:latin typeface="Calibri" pitchFamily="34" charset="0"/>
+                <a:ea typeface="Calibri" pitchFamily="34" charset="-122"/>
+                <a:cs typeface="Calibri" pitchFamily="34" charset="-120"/>
+              </a:rPr>
+              <a:t>SMALL EFFECT</a:t>
+            </a:r>
+            <a:endParaRPr lang="en-US" sz="1000" dirty="0"/>
+          </a:p>
+        </p:txBody>
+      </p:sp>
+      <p:sp>
+        <p:nvSpPr>
+          <p:cNvPr id="22" name="Shape 19"/>
+          <p:cNvSpPr/>
+          <p:nvPr/>
+        </p:nvSpPr>
+        <p:spPr>
+          <a:xfrm>
+            <a:off x="274320" y="4343400"/>
+            <a:ext cx="8595360" cy="640080"/>
+          </a:xfrm>
+          <a:prstGeom prst="rect">
+            <a:avLst/>
+          </a:prstGeom>
+          <a:solidFill>
+            <a:srgbClr val="FFF3CD"/>
+          </a:solidFill>
+          <a:ln w="12700">
+            <a:solidFill>
+              <a:srgbClr val="F59E0B"/>
+            </a:solidFill>
+            <a:prstDash val="solid"/>
+          </a:ln>
+        </p:spPr>
+      </p:sp>
+      <p:sp>
+        <p:nvSpPr>
+          <p:cNvPr id="23" name="Text 20"/>
+          <p:cNvSpPr/>
+          <p:nvPr/>
+        </p:nvSpPr>
+        <p:spPr>
+          <a:xfrm>
+            <a:off x="365760" y="4361688"/>
+            <a:ext cx="8412480" cy="603504"/>
+          </a:xfrm>
+          <a:prstGeom prst="rect">
+            <a:avLst/>
+          </a:prstGeom>
+          <a:noFill/>
+          <a:ln/>
+        </p:spPr>
+        <p:txBody>
+          <a:bodyPr wrap="square" rtlCol="0" anchor="ctr"/>
+          <a:lstStyle/>
+          <a:p>
+            <a:pPr marL="0" indent="0">
+              <a:buNone/>
+            </a:pPr>
+            <a:r>
+              <a:rPr lang="en-US" sz="1000" dirty="0">
+                <a:solidFill>
+                  <a:srgbClr val="1E293B"/>
+                </a:solidFill>
+                <a:latin typeface="Calibri" pitchFamily="34" charset="0"/>
+                <a:ea typeface="Calibri" pitchFamily="34" charset="-122"/>
+                <a:cs typeface="Calibri" pitchFamily="34" charset="-120"/>
+              </a:rPr>
+              <a:t>Conclusion: Mann-Whitney U test (p=0.0468) rejects H₀ at α=0.05, but Welch t-test (p=0.4553) fails to reject. Mixed results due to CIS outliers (140% spike in 2019). Cohen's d = 0.04 indicates negligible practical effect.</a:t>
+            </a:r>
+            <a:endParaRPr lang="en-US" sz="1000" dirty="0"/>
+          </a:p>
+        </p:txBody>
+      </p:sp>
+    </p:spTree>
+  </p:cSld>
+  <p:clrMapOvr>
+    <a:masterClrMapping/>
+  </p:clrMapOvr>
+</p:sld>
+</file>
+
+<file path=ppt/slides/slide11.xml><?xml version="1.0" encoding="utf-8"?>
+<p:sld xmlns:a="http://schemas.openxmlformats.org/drawingml/2006/main" xmlns:r="http://schemas.openxmlformats.org/officeDocument/2006/relationships" xmlns:p="http://schemas.openxmlformats.org/presentationml/2006/main">
   <p:cSld>
     <p:spTree>
       <p:nvGrpSpPr>
@@ -1703,7 +3896,7 @@
 </p:sld>
 </file>
 
-<file path=ppt/slides/slide11.xml><?xml version="1.0" encoding="utf-8"?>
+<file path=ppt/slides/slide12.xml><?xml version="1.0" encoding="utf-8"?>
 <p:sld xmlns:a="http://schemas.openxmlformats.org/drawingml/2006/main" xmlns:r="http://schemas.openxmlformats.org/officeDocument/2006/relationships" xmlns:p="http://schemas.openxmlformats.org/presentationml/2006/main">
   <p:cSld name="Slide 8">
     <p:bg>
@@ -6084,7 +8277,7 @@
 </p:sld>
 </file>
 
-<file path=ppt/slides/slide12.xml><?xml version="1.0" encoding="utf-8"?>
+<file path=ppt/slides/slide13.xml><?xml version="1.0" encoding="utf-8"?>
 <p:sld xmlns:a="http://schemas.openxmlformats.org/drawingml/2006/main" xmlns:r="http://schemas.openxmlformats.org/officeDocument/2006/relationships" xmlns:p="http://schemas.openxmlformats.org/presentationml/2006/main">
   <p:cSld name="Slide 9">
     <p:bg>
@@ -8319,7 +10512,7 @@
 </p:sld>
 </file>
 
-<file path=ppt/slides/slide13.xml><?xml version="1.0" encoding="utf-8"?>
+<file path=ppt/slides/slide14.xml><?xml version="1.0" encoding="utf-8"?>
 <p:sld xmlns:a="http://schemas.openxmlformats.org/drawingml/2006/main" xmlns:r="http://schemas.openxmlformats.org/officeDocument/2006/relationships" xmlns:p="http://schemas.openxmlformats.org/presentationml/2006/main">
   <p:cSld>
     <p:spTree>
@@ -8379,7 +10572,7 @@
 </p:sld>
 </file>
 
-<file path=ppt/slides/slide14.xml><?xml version="1.0" encoding="utf-8"?>
+<file path=ppt/slides/slide15.xml><?xml version="1.0" encoding="utf-8"?>
 <p:sld xmlns:a="http://schemas.openxmlformats.org/drawingml/2006/main" xmlns:r="http://schemas.openxmlformats.org/officeDocument/2006/relationships" xmlns:p="http://schemas.openxmlformats.org/presentationml/2006/main">
   <p:cSld>
     <p:spTree>
@@ -8439,7 +10632,7 @@
 </p:sld>
 </file>
 
-<file path=ppt/slides/slide15.xml><?xml version="1.0" encoding="utf-8"?>
+<file path=ppt/slides/slide16.xml><?xml version="1.0" encoding="utf-8"?>
 <p:sld xmlns:a="http://schemas.openxmlformats.org/drawingml/2006/main" xmlns:r="http://schemas.openxmlformats.org/officeDocument/2006/relationships" xmlns:p="http://schemas.openxmlformats.org/presentationml/2006/main">
   <p:cSld name="Slide 10">
     <p:bg>
@@ -10866,7 +13059,7 @@
 </p:sld>
 </file>
 
-<file path=ppt/slides/slide16.xml><?xml version="1.0" encoding="utf-8"?>
+<file path=ppt/slides/slide17.xml><?xml version="1.0" encoding="utf-8"?>
 <p:sld xmlns:a="http://schemas.openxmlformats.org/drawingml/2006/main" xmlns:r="http://schemas.openxmlformats.org/officeDocument/2006/relationships" xmlns:p="http://schemas.openxmlformats.org/presentationml/2006/main">
   <p:cSld name="Conclusion">
     <p:bg>
@@ -11417,15 +13610,7 @@
 
 <file path=ppt/slides/slide2.xml><?xml version="1.0" encoding="utf-8"?>
 <p:sld xmlns:a="http://schemas.openxmlformats.org/drawingml/2006/main" xmlns:r="http://schemas.openxmlformats.org/officeDocument/2006/relationships" xmlns:p="http://schemas.openxmlformats.org/presentationml/2006/main">
-  <p:cSld name="Slide 2">
-    <p:bg>
-      <p:bgPr>
-        <a:solidFill>
-          <a:srgbClr val="F4F7FB"/>
-        </a:solidFill>
-        <a:effectLst/>
-      </p:bgPr>
-    </p:bg>
+  <p:cSld>
     <p:spTree>
       <p:nvGrpSpPr>
         <p:cNvPr id="1" name=""/>
@@ -11442,7 +13627,238 @@
       </p:grpSpPr>
       <p:sp>
         <p:nvSpPr>
-          <p:cNvPr id="2" name="Shape 0"/>
+          <p:cNvPr id="3" name="TextBox 2">
+            <a:extLst>
+              <a:ext uri="{FF2B5EF4-FFF2-40B4-BE49-F238E27FC236}">
+                <a16:creationId xmlns:a16="http://schemas.microsoft.com/office/drawing/2014/main" id="{FB601A59-4311-A50E-76E8-37964ABF4592}"/>
+              </a:ext>
+            </a:extLst>
+          </p:cNvPr>
+          <p:cNvSpPr txBox="1"/>
+          <p:nvPr/>
+        </p:nvSpPr>
+        <p:spPr>
+          <a:xfrm>
+            <a:off x="400050" y="812743"/>
+            <a:ext cx="8220808" cy="3697551"/>
+          </a:xfrm>
+          <a:prstGeom prst="rect">
+            <a:avLst/>
+          </a:prstGeom>
+          <a:noFill/>
+        </p:spPr>
+        <p:txBody>
+          <a:bodyPr wrap="square">
+            <a:spAutoFit/>
+          </a:bodyPr>
+          <a:lstStyle/>
+          <a:p>
+            <a:pPr>
+              <a:lnSpc>
+                <a:spcPts val="1425"/>
+              </a:lnSpc>
+              <a:buNone/>
+            </a:pPr>
+            <a:r>
+              <a:rPr lang="en-US" b="1" dirty="0">
+                <a:effectLst/>
+                <a:latin typeface="Consolas" panose="020B0609020204030204" pitchFamily="49" charset="0"/>
+              </a:rPr>
+              <a:t> </a:t>
+            </a:r>
+            <a:br>
+              <a:rPr lang="en-US" b="0" dirty="0">
+                <a:solidFill>
+                  <a:srgbClr val="BBBEBF"/>
+                </a:solidFill>
+                <a:effectLst/>
+                <a:latin typeface="Consolas" panose="020B0609020204030204" pitchFamily="49" charset="0"/>
+              </a:rPr>
+            </a:br>
+            <a:endParaRPr lang="en-US" b="0" dirty="0">
+              <a:solidFill>
+                <a:srgbClr val="BBBEBF"/>
+              </a:solidFill>
+              <a:effectLst/>
+              <a:latin typeface="Consolas" panose="020B0609020204030204" pitchFamily="49" charset="0"/>
+            </a:endParaRPr>
+          </a:p>
+          <a:p>
+            <a:pPr>
+              <a:lnSpc>
+                <a:spcPts val="1425"/>
+              </a:lnSpc>
+              <a:buNone/>
+            </a:pPr>
+            <a:r>
+              <a:rPr lang="en-US" b="1" dirty="0">
+                <a:effectLst/>
+                <a:latin typeface="Consolas" panose="020B0609020204030204" pitchFamily="49" charset="0"/>
+              </a:rPr>
+              <a:t>This report analyzes four official statistical datasets published by the National Statistics Committee of the Kyrgyz Republic, covering the period from 1989 to 2025. The datasets capture:</a:t>
+            </a:r>
+          </a:p>
+          <a:p>
+            <a:pPr>
+              <a:lnSpc>
+                <a:spcPts val="1425"/>
+              </a:lnSpc>
+              <a:buNone/>
+            </a:pPr>
+            <a:br>
+              <a:rPr lang="en-US" b="1" dirty="0">
+                <a:effectLst/>
+                <a:latin typeface="Consolas" panose="020B0609020204030204" pitchFamily="49" charset="0"/>
+              </a:rPr>
+            </a:br>
+            <a:endParaRPr lang="en-US" b="1" dirty="0">
+              <a:effectLst/>
+              <a:latin typeface="Consolas" panose="020B0609020204030204" pitchFamily="49" charset="0"/>
+            </a:endParaRPr>
+          </a:p>
+          <a:p>
+            <a:pPr marL="342900" indent="-342900">
+              <a:lnSpc>
+                <a:spcPts val="1425"/>
+              </a:lnSpc>
+              <a:buAutoNum type="arabicPeriod"/>
+            </a:pPr>
+            <a:r>
+              <a:rPr lang="en-US" b="1" dirty="0">
+                <a:solidFill>
+                  <a:srgbClr val="FF0000"/>
+                </a:solidFill>
+                <a:effectLst/>
+                <a:latin typeface="Consolas" panose="020B0609020204030204" pitchFamily="49" charset="0"/>
+              </a:rPr>
+              <a:t>**Literacy rates and education attainment** </a:t>
+            </a:r>
+            <a:r>
+              <a:rPr lang="en-US" b="1" dirty="0">
+                <a:effectLst/>
+                <a:latin typeface="Consolas" panose="020B0609020204030204" pitchFamily="49" charset="0"/>
+              </a:rPr>
+              <a:t>across four census years (1989, 1999, 2009, 2022)</a:t>
+            </a:r>
+          </a:p>
+          <a:p>
+            <a:pPr marL="342900" indent="-342900">
+              <a:lnSpc>
+                <a:spcPts val="1425"/>
+              </a:lnSpc>
+              <a:buAutoNum type="arabicPeriod"/>
+            </a:pPr>
+            <a:endParaRPr lang="en-US" b="1" dirty="0">
+              <a:effectLst/>
+              <a:latin typeface="Consolas" panose="020B0609020204030204" pitchFamily="49" charset="0"/>
+            </a:endParaRPr>
+          </a:p>
+          <a:p>
+            <a:pPr>
+              <a:lnSpc>
+                <a:spcPts val="1425"/>
+              </a:lnSpc>
+              <a:buNone/>
+            </a:pPr>
+            <a:r>
+              <a:rPr lang="en-US" b="1" dirty="0">
+                <a:solidFill>
+                  <a:srgbClr val="FF0000"/>
+                </a:solidFill>
+                <a:effectLst/>
+                <a:latin typeface="Consolas" panose="020B0609020204030204" pitchFamily="49" charset="0"/>
+              </a:rPr>
+              <a:t>2. **Foreign student enrollment** </a:t>
+            </a:r>
+            <a:r>
+              <a:rPr lang="en-US" b="1" dirty="0">
+                <a:effectLst/>
+                <a:latin typeface="Consolas" panose="020B0609020204030204" pitchFamily="49" charset="0"/>
+              </a:rPr>
+              <a:t>from CIS and non-CIS countries in Kyrgyz higher education institutions (2010–2024)</a:t>
+            </a:r>
+          </a:p>
+          <a:p>
+            <a:pPr>
+              <a:lnSpc>
+                <a:spcPts val="1425"/>
+              </a:lnSpc>
+              <a:buNone/>
+            </a:pPr>
+            <a:endParaRPr lang="en-US" b="1" dirty="0">
+              <a:effectLst/>
+              <a:latin typeface="Consolas" panose="020B0609020204030204" pitchFamily="49" charset="0"/>
+            </a:endParaRPr>
+          </a:p>
+          <a:p>
+            <a:pPr>
+              <a:lnSpc>
+                <a:spcPts val="1425"/>
+              </a:lnSpc>
+              <a:buNone/>
+            </a:pPr>
+            <a:r>
+              <a:rPr lang="en-US" b="1" dirty="0">
+                <a:solidFill>
+                  <a:srgbClr val="FF0000"/>
+                </a:solidFill>
+                <a:effectLst/>
+                <a:latin typeface="Consolas" panose="020B0609020204030204" pitchFamily="49" charset="0"/>
+              </a:rPr>
+              <a:t>3. **State budget allocations** </a:t>
+            </a:r>
+            <a:r>
+              <a:rPr lang="en-US" b="1" dirty="0">
+                <a:effectLst/>
+                <a:latin typeface="Consolas" panose="020B0609020204030204" pitchFamily="49" charset="0"/>
+              </a:rPr>
+              <a:t>to the education sector across major sub-sectors (2001–2025 projected)</a:t>
+            </a:r>
+          </a:p>
+          <a:p>
+            <a:pPr>
+              <a:lnSpc>
+                <a:spcPts val="1425"/>
+              </a:lnSpc>
+              <a:buNone/>
+            </a:pPr>
+            <a:br>
+              <a:rPr lang="en-US" b="1" dirty="0">
+                <a:effectLst/>
+                <a:latin typeface="Consolas" panose="020B0609020204030204" pitchFamily="49" charset="0"/>
+              </a:rPr>
+            </a:br>
+            <a:endParaRPr lang="en-US" b="1" dirty="0">
+              <a:effectLst/>
+              <a:latin typeface="Consolas" panose="020B0609020204030204" pitchFamily="49" charset="0"/>
+            </a:endParaRPr>
+          </a:p>
+          <a:p>
+            <a:pPr>
+              <a:lnSpc>
+                <a:spcPts val="1425"/>
+              </a:lnSpc>
+              <a:buNone/>
+            </a:pPr>
+            <a:r>
+              <a:rPr lang="en-US" b="1" dirty="0">
+                <a:effectLst/>
+                <a:latin typeface="Consolas" panose="020B0609020204030204" pitchFamily="49" charset="0"/>
+              </a:rPr>
+              <a:t>The datasets are trilingual (Kyrgyz, Russian, English) and reflect post-Soviet education system transformations.</a:t>
+            </a:r>
+          </a:p>
+        </p:txBody>
+      </p:sp>
+      <p:sp>
+        <p:nvSpPr>
+          <p:cNvPr id="4" name="Shape 0">
+            <a:extLst>
+              <a:ext uri="{FF2B5EF4-FFF2-40B4-BE49-F238E27FC236}">
+                <a16:creationId xmlns:a16="http://schemas.microsoft.com/office/drawing/2014/main" id="{3ED880C1-56B9-9068-2ECE-1B21F80C148E}"/>
+              </a:ext>
+            </a:extLst>
+          </p:cNvPr>
           <p:cNvSpPr/>
           <p:nvPr/>
         </p:nvSpPr>
@@ -11464,1091 +13880,60 @@
             <a:prstDash val="solid"/>
           </a:ln>
         </p:spPr>
-      </p:sp>
-      <p:sp>
-        <p:nvSpPr>
-          <p:cNvPr id="3" name="Text 1"/>
-          <p:cNvSpPr/>
-          <p:nvPr/>
-        </p:nvSpPr>
-        <p:spPr>
-          <a:xfrm>
-            <a:off x="274320" y="0"/>
-            <a:ext cx="8595360" cy="685800"/>
-          </a:xfrm>
-          <a:prstGeom prst="rect">
-            <a:avLst/>
-          </a:prstGeom>
-          <a:noFill/>
-          <a:ln/>
-        </p:spPr>
         <p:txBody>
-          <a:bodyPr wrap="square" rtlCol="0" anchor="ctr"/>
+          <a:bodyPr/>
           <a:lstStyle/>
           <a:p>
-            <a:pPr marL="0" indent="0">
+            <a:pPr>
+              <a:lnSpc>
+                <a:spcPts val="1425"/>
+              </a:lnSpc>
               <a:buNone/>
             </a:pPr>
             <a:r>
-              <a:rPr lang="en-US" sz="2200" b="1" dirty="0">
-                <a:solidFill>
-                  <a:srgbClr val="FFFFFF"/>
-                </a:solidFill>
-                <a:latin typeface="Calibri" pitchFamily="34" charset="0"/>
-                <a:ea typeface="Calibri" pitchFamily="34" charset="-122"/>
-                <a:cs typeface="Calibri" pitchFamily="34" charset="-120"/>
+              <a:rPr lang="en-US" b="1" dirty="0">
+                <a:latin typeface="Consolas" panose="020B0609020204030204" pitchFamily="49" charset="0"/>
               </a:rPr>
-              <a:t>Key Metrics at a Glance</a:t>
+              <a:t>   </a:t>
             </a:r>
-            <a:endParaRPr lang="en-US" sz="2200" dirty="0"/>
           </a:p>
-        </p:txBody>
-      </p:sp>
-      <p:sp>
-        <p:nvSpPr>
-          <p:cNvPr id="4" name="Shape 2"/>
-          <p:cNvSpPr/>
-          <p:nvPr/>
-        </p:nvSpPr>
-        <p:spPr>
-          <a:xfrm>
-            <a:off x="237744" y="841248"/>
-            <a:ext cx="2743200" cy="1737360"/>
-          </a:xfrm>
-          <a:prstGeom prst="rect">
-            <a:avLst/>
-          </a:prstGeom>
-          <a:solidFill>
-            <a:srgbClr val="FFFFFF"/>
-          </a:solidFill>
-          <a:ln w="12700">
-            <a:solidFill>
-              <a:srgbClr val="E2E8F0"/>
-            </a:solidFill>
-            <a:prstDash val="solid"/>
-          </a:ln>
-          <a:effectLst>
-            <a:outerShdw blurRad="50800" dist="25400" dir="8100000" algn="bl" rotWithShape="0">
-              <a:srgbClr val="000000">
-                <a:alpha val="8000"/>
-              </a:srgbClr>
-            </a:outerShdw>
-          </a:effectLst>
-        </p:spPr>
-      </p:sp>
-      <p:sp>
-        <p:nvSpPr>
-          <p:cNvPr id="5" name="Shape 3"/>
-          <p:cNvSpPr/>
-          <p:nvPr/>
-        </p:nvSpPr>
-        <p:spPr>
-          <a:xfrm>
-            <a:off x="237744" y="841248"/>
-            <a:ext cx="2743200" cy="64008"/>
-          </a:xfrm>
-          <a:prstGeom prst="rect">
-            <a:avLst/>
-          </a:prstGeom>
-          <a:solidFill>
-            <a:srgbClr val="0D7377"/>
-          </a:solidFill>
-          <a:ln w="12700">
-            <a:solidFill>
-              <a:srgbClr val="0D7377"/>
-            </a:solidFill>
-            <a:prstDash val="solid"/>
-          </a:ln>
-        </p:spPr>
-      </p:sp>
-      <p:sp>
-        <p:nvSpPr>
-          <p:cNvPr id="6" name="Text 4"/>
-          <p:cNvSpPr/>
-          <p:nvPr/>
-        </p:nvSpPr>
-        <p:spPr>
-          <a:xfrm>
-            <a:off x="237744" y="1005840"/>
-            <a:ext cx="2743200" cy="777240"/>
-          </a:xfrm>
-          <a:prstGeom prst="rect">
-            <a:avLst/>
-          </a:prstGeom>
-          <a:noFill/>
-          <a:ln/>
-        </p:spPr>
-        <p:txBody>
-          <a:bodyPr wrap="square" rtlCol="0" anchor="ctr"/>
-          <a:lstStyle/>
           <a:p>
-            <a:pPr marL="0" indent="0" algn="ctr">
+            <a:pPr>
+              <a:lnSpc>
+                <a:spcPts val="1425"/>
+              </a:lnSpc>
               <a:buNone/>
             </a:pPr>
             <a:r>
-              <a:rPr lang="en-US" sz="3600" b="1" dirty="0">
+              <a:rPr lang="en-US" b="1" dirty="0">
+                <a:latin typeface="Consolas" panose="020B0609020204030204" pitchFamily="49" charset="0"/>
+              </a:rPr>
+              <a:t>   </a:t>
+            </a:r>
+            <a:r>
+              <a:rPr lang="en-US" b="1" dirty="0">
                 <a:solidFill>
-                  <a:srgbClr val="1A2F5A"/>
+                  <a:schemeClr val="bg1"/>
                 </a:solidFill>
-                <a:latin typeface="Calibri" pitchFamily="34" charset="0"/>
-                <a:ea typeface="Calibri" pitchFamily="34" charset="-122"/>
-                <a:cs typeface="Calibri" pitchFamily="34" charset="-120"/>
+                <a:latin typeface="Consolas" panose="020B0609020204030204" pitchFamily="49" charset="0"/>
               </a:rPr>
-              <a:t>80,701</a:t>
+              <a:t>Dataset Description</a:t>
             </a:r>
-            <a:endParaRPr lang="en-US" sz="3600" dirty="0"/>
-          </a:p>
-        </p:txBody>
-      </p:sp>
-      <p:sp>
-        <p:nvSpPr>
-          <p:cNvPr id="7" name="Text 5"/>
-          <p:cNvSpPr/>
-          <p:nvPr/>
-        </p:nvSpPr>
-        <p:spPr>
-          <a:xfrm>
-            <a:off x="237744" y="1755648"/>
-            <a:ext cx="2743200" cy="457200"/>
-          </a:xfrm>
-          <a:prstGeom prst="rect">
-            <a:avLst/>
-          </a:prstGeom>
-          <a:noFill/>
-          <a:ln/>
-        </p:spPr>
-        <p:txBody>
-          <a:bodyPr wrap="square" rtlCol="0" anchor="ctr"/>
-          <a:lstStyle/>
-          <a:p>
-            <a:pPr marL="0" indent="0" algn="ctr">
-              <a:buNone/>
-            </a:pPr>
-            <a:r>
-              <a:rPr lang="en-US" sz="1200" dirty="0">
-                <a:solidFill>
-                  <a:srgbClr val="64748B"/>
-                </a:solidFill>
-                <a:latin typeface="Calibri" pitchFamily="34" charset="0"/>
-                <a:ea typeface="Calibri" pitchFamily="34" charset="-122"/>
-                <a:cs typeface="Calibri" pitchFamily="34" charset="-120"/>
-              </a:rPr>
-              <a:t>Peak total enrollment</a:t>
-            </a:r>
-            <a:endParaRPr lang="en-US" sz="1200" dirty="0"/>
-          </a:p>
-        </p:txBody>
-      </p:sp>
-      <p:sp>
-        <p:nvSpPr>
-          <p:cNvPr id="8" name="Text 6"/>
-          <p:cNvSpPr/>
-          <p:nvPr/>
-        </p:nvSpPr>
-        <p:spPr>
-          <a:xfrm>
-            <a:off x="237744" y="2167128"/>
-            <a:ext cx="2743200" cy="320040"/>
-          </a:xfrm>
-          <a:prstGeom prst="rect">
-            <a:avLst/>
-          </a:prstGeom>
-          <a:noFill/>
-          <a:ln/>
-        </p:spPr>
-        <p:txBody>
-          <a:bodyPr wrap="square" rtlCol="0" anchor="ctr"/>
-          <a:lstStyle/>
-          <a:p>
-            <a:pPr marL="0" indent="0" algn="ctr">
-              <a:buNone/>
-            </a:pPr>
-            <a:r>
-              <a:rPr lang="en-US" sz="1100" i="1" dirty="0">
-                <a:solidFill>
-                  <a:srgbClr val="14BDBD"/>
-                </a:solidFill>
-                <a:latin typeface="Calibri" pitchFamily="34" charset="0"/>
-                <a:ea typeface="Calibri" pitchFamily="34" charset="-122"/>
-                <a:cs typeface="Calibri" pitchFamily="34" charset="-120"/>
-              </a:rPr>
-              <a:t>2021</a:t>
-            </a:r>
-            <a:endParaRPr lang="en-US" sz="1100" dirty="0"/>
-          </a:p>
-        </p:txBody>
-      </p:sp>
-      <p:sp>
-        <p:nvSpPr>
-          <p:cNvPr id="9" name="Shape 7"/>
-          <p:cNvSpPr/>
-          <p:nvPr/>
-        </p:nvSpPr>
-        <p:spPr>
-          <a:xfrm>
-            <a:off x="3136392" y="841248"/>
-            <a:ext cx="2743200" cy="1737360"/>
-          </a:xfrm>
-          <a:prstGeom prst="rect">
-            <a:avLst/>
-          </a:prstGeom>
-          <a:solidFill>
-            <a:srgbClr val="FFFFFF"/>
-          </a:solidFill>
-          <a:ln w="12700">
-            <a:solidFill>
-              <a:srgbClr val="E2E8F0"/>
-            </a:solidFill>
-            <a:prstDash val="solid"/>
-          </a:ln>
-          <a:effectLst>
-            <a:outerShdw blurRad="50800" dist="25400" dir="8100000" algn="bl" rotWithShape="0">
-              <a:srgbClr val="000000">
-                <a:alpha val="8000"/>
-              </a:srgbClr>
-            </a:outerShdw>
-          </a:effectLst>
-        </p:spPr>
-      </p:sp>
-      <p:sp>
-        <p:nvSpPr>
-          <p:cNvPr id="10" name="Shape 8"/>
-          <p:cNvSpPr/>
-          <p:nvPr/>
-        </p:nvSpPr>
-        <p:spPr>
-          <a:xfrm>
-            <a:off x="3136392" y="841248"/>
-            <a:ext cx="2743200" cy="64008"/>
-          </a:xfrm>
-          <a:prstGeom prst="rect">
-            <a:avLst/>
-          </a:prstGeom>
-          <a:solidFill>
-            <a:srgbClr val="0D7377"/>
-          </a:solidFill>
-          <a:ln w="12700">
-            <a:solidFill>
-              <a:srgbClr val="0D7377"/>
-            </a:solidFill>
-            <a:prstDash val="solid"/>
-          </a:ln>
-        </p:spPr>
-      </p:sp>
-      <p:sp>
-        <p:nvSpPr>
-          <p:cNvPr id="11" name="Text 9"/>
-          <p:cNvSpPr/>
-          <p:nvPr/>
-        </p:nvSpPr>
-        <p:spPr>
-          <a:xfrm>
-            <a:off x="3136392" y="1005840"/>
-            <a:ext cx="2743200" cy="777240"/>
-          </a:xfrm>
-          <a:prstGeom prst="rect">
-            <a:avLst/>
-          </a:prstGeom>
-          <a:noFill/>
-          <a:ln/>
-        </p:spPr>
-        <p:txBody>
-          <a:bodyPr wrap="square" rtlCol="0" anchor="ctr"/>
-          <a:lstStyle/>
-          <a:p>
-            <a:pPr marL="0" indent="0" algn="ctr">
-              <a:buNone/>
-            </a:pPr>
-            <a:r>
-              <a:rPr lang="en-US" sz="3600" b="1" dirty="0">
-                <a:solidFill>
-                  <a:srgbClr val="1A2F5A"/>
-                </a:solidFill>
-                <a:latin typeface="Calibri" pitchFamily="34" charset="0"/>
-                <a:ea typeface="Calibri" pitchFamily="34" charset="-122"/>
-                <a:cs typeface="Calibri" pitchFamily="34" charset="-120"/>
-              </a:rPr>
-              <a:t>15.23%</a:t>
-            </a:r>
-            <a:endParaRPr lang="en-US" sz="3600" dirty="0"/>
-          </a:p>
-        </p:txBody>
-      </p:sp>
-      <p:sp>
-        <p:nvSpPr>
-          <p:cNvPr id="12" name="Text 10"/>
-          <p:cNvSpPr/>
-          <p:nvPr/>
-        </p:nvSpPr>
-        <p:spPr>
-          <a:xfrm>
-            <a:off x="3136392" y="1755648"/>
-            <a:ext cx="2743200" cy="457200"/>
-          </a:xfrm>
-          <a:prstGeom prst="rect">
-            <a:avLst/>
-          </a:prstGeom>
-          <a:noFill/>
-          <a:ln/>
-        </p:spPr>
-        <p:txBody>
-          <a:bodyPr wrap="square" rtlCol="0" anchor="ctr"/>
-          <a:lstStyle/>
-          <a:p>
-            <a:pPr marL="0" indent="0" algn="ctr">
-              <a:buNone/>
-            </a:pPr>
-            <a:r>
-              <a:rPr lang="en-US" sz="1200" dirty="0">
-                <a:solidFill>
-                  <a:srgbClr val="64748B"/>
-                </a:solidFill>
-                <a:latin typeface="Calibri" pitchFamily="34" charset="0"/>
-                <a:ea typeface="Calibri" pitchFamily="34" charset="-122"/>
-                <a:cs typeface="Calibri" pitchFamily="34" charset="-120"/>
-              </a:rPr>
-              <a:t>Non-CIS CAGR</a:t>
-            </a:r>
-            <a:endParaRPr lang="en-US" sz="1200" dirty="0"/>
-          </a:p>
-        </p:txBody>
-      </p:sp>
-      <p:sp>
-        <p:nvSpPr>
-          <p:cNvPr id="13" name="Text 11"/>
-          <p:cNvSpPr/>
-          <p:nvPr/>
-        </p:nvSpPr>
-        <p:spPr>
-          <a:xfrm>
-            <a:off x="3136392" y="2167128"/>
-            <a:ext cx="2743200" cy="320040"/>
-          </a:xfrm>
-          <a:prstGeom prst="rect">
-            <a:avLst/>
-          </a:prstGeom>
-          <a:noFill/>
-          <a:ln/>
-        </p:spPr>
-        <p:txBody>
-          <a:bodyPr wrap="square" rtlCol="0" anchor="ctr"/>
-          <a:lstStyle/>
-          <a:p>
-            <a:pPr marL="0" indent="0" algn="ctr">
-              <a:buNone/>
-            </a:pPr>
-            <a:r>
-              <a:rPr lang="en-US" sz="1100" i="1" dirty="0">
-                <a:solidFill>
-                  <a:srgbClr val="14BDBD"/>
-                </a:solidFill>
-                <a:latin typeface="Calibri" pitchFamily="34" charset="0"/>
-                <a:ea typeface="Calibri" pitchFamily="34" charset="-122"/>
-                <a:cs typeface="Calibri" pitchFamily="34" charset="-120"/>
-              </a:rPr>
-              <a:t>2010–2024</a:t>
-            </a:r>
-            <a:endParaRPr lang="en-US" sz="1100" dirty="0"/>
-          </a:p>
-        </p:txBody>
-      </p:sp>
-      <p:sp>
-        <p:nvSpPr>
-          <p:cNvPr id="14" name="Shape 12"/>
-          <p:cNvSpPr/>
-          <p:nvPr/>
-        </p:nvSpPr>
-        <p:spPr>
-          <a:xfrm>
-            <a:off x="6035040" y="841248"/>
-            <a:ext cx="2743200" cy="1737360"/>
-          </a:xfrm>
-          <a:prstGeom prst="rect">
-            <a:avLst/>
-          </a:prstGeom>
-          <a:solidFill>
-            <a:srgbClr val="FFFFFF"/>
-          </a:solidFill>
-          <a:ln w="12700">
-            <a:solidFill>
-              <a:srgbClr val="E2E8F0"/>
-            </a:solidFill>
-            <a:prstDash val="solid"/>
-          </a:ln>
-          <a:effectLst>
-            <a:outerShdw blurRad="50800" dist="25400" dir="8100000" algn="bl" rotWithShape="0">
-              <a:srgbClr val="000000">
-                <a:alpha val="8000"/>
-              </a:srgbClr>
-            </a:outerShdw>
-          </a:effectLst>
-        </p:spPr>
-      </p:sp>
-      <p:sp>
-        <p:nvSpPr>
-          <p:cNvPr id="15" name="Shape 13"/>
-          <p:cNvSpPr/>
-          <p:nvPr/>
-        </p:nvSpPr>
-        <p:spPr>
-          <a:xfrm>
-            <a:off x="6035040" y="841248"/>
-            <a:ext cx="2743200" cy="64008"/>
-          </a:xfrm>
-          <a:prstGeom prst="rect">
-            <a:avLst/>
-          </a:prstGeom>
-          <a:solidFill>
-            <a:srgbClr val="0D7377"/>
-          </a:solidFill>
-          <a:ln w="12700">
-            <a:solidFill>
-              <a:srgbClr val="0D7377"/>
-            </a:solidFill>
-            <a:prstDash val="solid"/>
-          </a:ln>
-        </p:spPr>
-      </p:sp>
-      <p:sp>
-        <p:nvSpPr>
-          <p:cNvPr id="16" name="Text 14"/>
-          <p:cNvSpPr/>
-          <p:nvPr/>
-        </p:nvSpPr>
-        <p:spPr>
-          <a:xfrm>
-            <a:off x="6035040" y="1005840"/>
-            <a:ext cx="2743200" cy="777240"/>
-          </a:xfrm>
-          <a:prstGeom prst="rect">
-            <a:avLst/>
-          </a:prstGeom>
-          <a:noFill/>
-          <a:ln/>
-        </p:spPr>
-        <p:txBody>
-          <a:bodyPr wrap="square" rtlCol="0" anchor="ctr"/>
-          <a:lstStyle/>
-          <a:p>
-            <a:pPr marL="0" indent="0" algn="ctr">
-              <a:buNone/>
-            </a:pPr>
-            <a:r>
-              <a:rPr lang="en-US" sz="3600" b="1" dirty="0">
-                <a:solidFill>
-                  <a:srgbClr val="1A2F5A"/>
-                </a:solidFill>
-                <a:latin typeface="Calibri" pitchFamily="34" charset="0"/>
-                <a:ea typeface="Calibri" pitchFamily="34" charset="-122"/>
-                <a:cs typeface="Calibri" pitchFamily="34" charset="-120"/>
-              </a:rPr>
-              <a:t>29.5×</a:t>
-            </a:r>
-            <a:endParaRPr lang="en-US" sz="3600" dirty="0"/>
-          </a:p>
-        </p:txBody>
-      </p:sp>
-      <p:sp>
-        <p:nvSpPr>
-          <p:cNvPr id="17" name="Text 15"/>
-          <p:cNvSpPr/>
-          <p:nvPr/>
-        </p:nvSpPr>
-        <p:spPr>
-          <a:xfrm>
-            <a:off x="6035040" y="1755648"/>
-            <a:ext cx="2743200" cy="457200"/>
-          </a:xfrm>
-          <a:prstGeom prst="rect">
-            <a:avLst/>
-          </a:prstGeom>
-          <a:noFill/>
-          <a:ln/>
-        </p:spPr>
-        <p:txBody>
-          <a:bodyPr wrap="square" rtlCol="0" anchor="ctr"/>
-          <a:lstStyle/>
-          <a:p>
-            <a:pPr marL="0" indent="0" algn="ctr">
-              <a:buNone/>
-            </a:pPr>
-            <a:r>
-              <a:rPr lang="en-US" sz="1200" dirty="0">
-                <a:solidFill>
-                  <a:srgbClr val="64748B"/>
-                </a:solidFill>
-                <a:latin typeface="Calibri" pitchFamily="34" charset="0"/>
-                <a:ea typeface="Calibri" pitchFamily="34" charset="-122"/>
-                <a:cs typeface="Calibri" pitchFamily="34" charset="-120"/>
-              </a:rPr>
-              <a:t>Budget growth</a:t>
-            </a:r>
-            <a:endParaRPr lang="en-US" sz="1200" dirty="0"/>
-          </a:p>
-        </p:txBody>
-      </p:sp>
-      <p:sp>
-        <p:nvSpPr>
-          <p:cNvPr id="18" name="Text 16"/>
-          <p:cNvSpPr/>
-          <p:nvPr/>
-        </p:nvSpPr>
-        <p:spPr>
-          <a:xfrm>
-            <a:off x="6035040" y="2167128"/>
-            <a:ext cx="2743200" cy="320040"/>
-          </a:xfrm>
-          <a:prstGeom prst="rect">
-            <a:avLst/>
-          </a:prstGeom>
-          <a:noFill/>
-          <a:ln/>
-        </p:spPr>
-        <p:txBody>
-          <a:bodyPr wrap="square" rtlCol="0" anchor="ctr"/>
-          <a:lstStyle/>
-          <a:p>
-            <a:pPr marL="0" indent="0" algn="ctr">
-              <a:buNone/>
-            </a:pPr>
-            <a:r>
-              <a:rPr lang="en-US" sz="1100" i="1" dirty="0">
-                <a:solidFill>
-                  <a:srgbClr val="14BDBD"/>
-                </a:solidFill>
-                <a:latin typeface="Calibri" pitchFamily="34" charset="0"/>
-                <a:ea typeface="Calibri" pitchFamily="34" charset="-122"/>
-                <a:cs typeface="Calibri" pitchFamily="34" charset="-120"/>
-              </a:rPr>
-              <a:t>2001–2024 nominal</a:t>
-            </a:r>
-            <a:endParaRPr lang="en-US" sz="1100" dirty="0"/>
-          </a:p>
-        </p:txBody>
-      </p:sp>
-      <p:sp>
-        <p:nvSpPr>
-          <p:cNvPr id="19" name="Shape 17"/>
-          <p:cNvSpPr/>
-          <p:nvPr/>
-        </p:nvSpPr>
-        <p:spPr>
-          <a:xfrm>
-            <a:off x="237744" y="2734056"/>
-            <a:ext cx="2743200" cy="1737360"/>
-          </a:xfrm>
-          <a:prstGeom prst="rect">
-            <a:avLst/>
-          </a:prstGeom>
-          <a:solidFill>
-            <a:srgbClr val="FFFFFF"/>
-          </a:solidFill>
-          <a:ln w="12700">
-            <a:solidFill>
-              <a:srgbClr val="E2E8F0"/>
-            </a:solidFill>
-            <a:prstDash val="solid"/>
-          </a:ln>
-          <a:effectLst>
-            <a:outerShdw blurRad="50800" dist="25400" dir="8100000" algn="bl" rotWithShape="0">
-              <a:srgbClr val="000000">
-                <a:alpha val="8000"/>
-              </a:srgbClr>
-            </a:outerShdw>
-          </a:effectLst>
-        </p:spPr>
-      </p:sp>
-      <p:sp>
-        <p:nvSpPr>
-          <p:cNvPr id="20" name="Shape 18"/>
-          <p:cNvSpPr/>
-          <p:nvPr/>
-        </p:nvSpPr>
-        <p:spPr>
-          <a:xfrm>
-            <a:off x="237744" y="2734056"/>
-            <a:ext cx="2743200" cy="64008"/>
-          </a:xfrm>
-          <a:prstGeom prst="rect">
-            <a:avLst/>
-          </a:prstGeom>
-          <a:solidFill>
-            <a:srgbClr val="0D7377"/>
-          </a:solidFill>
-          <a:ln w="12700">
-            <a:solidFill>
-              <a:srgbClr val="0D7377"/>
-            </a:solidFill>
-            <a:prstDash val="solid"/>
-          </a:ln>
-        </p:spPr>
-      </p:sp>
-      <p:sp>
-        <p:nvSpPr>
-          <p:cNvPr id="21" name="Text 19"/>
-          <p:cNvSpPr/>
-          <p:nvPr/>
-        </p:nvSpPr>
-        <p:spPr>
-          <a:xfrm>
-            <a:off x="237744" y="2898648"/>
-            <a:ext cx="2743200" cy="777240"/>
-          </a:xfrm>
-          <a:prstGeom prst="rect">
-            <a:avLst/>
-          </a:prstGeom>
-          <a:noFill/>
-          <a:ln/>
-        </p:spPr>
-        <p:txBody>
-          <a:bodyPr wrap="square" rtlCol="0" anchor="ctr"/>
-          <a:lstStyle/>
-          <a:p>
-            <a:pPr marL="0" indent="0" algn="ctr">
-              <a:buNone/>
-            </a:pPr>
-            <a:r>
-              <a:rPr lang="en-US" sz="3600" b="1" dirty="0">
-                <a:solidFill>
-                  <a:srgbClr val="1A2F5A"/>
-                </a:solidFill>
-                <a:latin typeface="Calibri" pitchFamily="34" charset="0"/>
-                <a:ea typeface="Calibri" pitchFamily="34" charset="-122"/>
-                <a:cs typeface="Calibri" pitchFamily="34" charset="-120"/>
-              </a:rPr>
-              <a:t>+0.74</a:t>
-            </a:r>
-            <a:endParaRPr lang="en-US" sz="3600" dirty="0"/>
-          </a:p>
-        </p:txBody>
-      </p:sp>
-      <p:sp>
-        <p:nvSpPr>
-          <p:cNvPr id="22" name="Text 20"/>
-          <p:cNvSpPr/>
-          <p:nvPr/>
-        </p:nvSpPr>
-        <p:spPr>
-          <a:xfrm>
-            <a:off x="237744" y="3648456"/>
-            <a:ext cx="2743200" cy="457200"/>
-          </a:xfrm>
-          <a:prstGeom prst="rect">
-            <a:avLst/>
-          </a:prstGeom>
-          <a:noFill/>
-          <a:ln/>
-        </p:spPr>
-        <p:txBody>
-          <a:bodyPr wrap="square" rtlCol="0" anchor="ctr"/>
-          <a:lstStyle/>
-          <a:p>
-            <a:pPr marL="0" indent="0" algn="ctr">
-              <a:buNone/>
-            </a:pPr>
-            <a:r>
-              <a:rPr lang="en-US" sz="1200" dirty="0">
-                <a:solidFill>
-                  <a:srgbClr val="64748B"/>
-                </a:solidFill>
-                <a:latin typeface="Calibri" pitchFamily="34" charset="0"/>
-                <a:ea typeface="Calibri" pitchFamily="34" charset="-122"/>
-                <a:cs typeface="Calibri" pitchFamily="34" charset="-120"/>
-              </a:rPr>
-              <a:t>Pearson r</a:t>
-            </a:r>
-            <a:endParaRPr lang="en-US" sz="1200" dirty="0"/>
-          </a:p>
-        </p:txBody>
-      </p:sp>
-      <p:sp>
-        <p:nvSpPr>
-          <p:cNvPr id="23" name="Text 21"/>
-          <p:cNvSpPr/>
-          <p:nvPr/>
-        </p:nvSpPr>
-        <p:spPr>
-          <a:xfrm>
-            <a:off x="237744" y="4059936"/>
-            <a:ext cx="2743200" cy="320040"/>
-          </a:xfrm>
-          <a:prstGeom prst="rect">
-            <a:avLst/>
-          </a:prstGeom>
-          <a:noFill/>
-          <a:ln/>
-        </p:spPr>
-        <p:txBody>
-          <a:bodyPr wrap="square" rtlCol="0" anchor="ctr"/>
-          <a:lstStyle/>
-          <a:p>
-            <a:pPr marL="0" indent="0" algn="ctr">
-              <a:buNone/>
-            </a:pPr>
-            <a:r>
-              <a:rPr lang="en-US" sz="1100" i="1" dirty="0">
-                <a:solidFill>
-                  <a:srgbClr val="14BDBD"/>
-                </a:solidFill>
-                <a:latin typeface="Calibri" pitchFamily="34" charset="0"/>
-                <a:ea typeface="Calibri" pitchFamily="34" charset="-122"/>
-                <a:cs typeface="Calibri" pitchFamily="34" charset="-120"/>
-              </a:rPr>
-              <a:t>Total Students vs Budget</a:t>
-            </a:r>
-            <a:endParaRPr lang="en-US" sz="1100" dirty="0"/>
-          </a:p>
-        </p:txBody>
-      </p:sp>
-      <p:sp>
-        <p:nvSpPr>
-          <p:cNvPr id="24" name="Shape 22"/>
-          <p:cNvSpPr/>
-          <p:nvPr/>
-        </p:nvSpPr>
-        <p:spPr>
-          <a:xfrm>
-            <a:off x="3136392" y="2734056"/>
-            <a:ext cx="2743200" cy="1737360"/>
-          </a:xfrm>
-          <a:prstGeom prst="rect">
-            <a:avLst/>
-          </a:prstGeom>
-          <a:solidFill>
-            <a:srgbClr val="FFFFFF"/>
-          </a:solidFill>
-          <a:ln w="12700">
-            <a:solidFill>
-              <a:srgbClr val="E2E8F0"/>
-            </a:solidFill>
-            <a:prstDash val="solid"/>
-          </a:ln>
-          <a:effectLst>
-            <a:outerShdw blurRad="50800" dist="25400" dir="8100000" algn="bl" rotWithShape="0">
-              <a:srgbClr val="000000">
-                <a:alpha val="8000"/>
-              </a:srgbClr>
-            </a:outerShdw>
-          </a:effectLst>
-        </p:spPr>
-      </p:sp>
-      <p:sp>
-        <p:nvSpPr>
-          <p:cNvPr id="25" name="Shape 23"/>
-          <p:cNvSpPr/>
-          <p:nvPr/>
-        </p:nvSpPr>
-        <p:spPr>
-          <a:xfrm>
-            <a:off x="3136392" y="2734056"/>
-            <a:ext cx="2743200" cy="64008"/>
-          </a:xfrm>
-          <a:prstGeom prst="rect">
-            <a:avLst/>
-          </a:prstGeom>
-          <a:solidFill>
-            <a:srgbClr val="0D7377"/>
-          </a:solidFill>
-          <a:ln w="12700">
-            <a:solidFill>
-              <a:srgbClr val="0D7377"/>
-            </a:solidFill>
-            <a:prstDash val="solid"/>
-          </a:ln>
-        </p:spPr>
-      </p:sp>
-      <p:sp>
-        <p:nvSpPr>
-          <p:cNvPr id="26" name="Text 24"/>
-          <p:cNvSpPr/>
-          <p:nvPr/>
-        </p:nvSpPr>
-        <p:spPr>
-          <a:xfrm>
-            <a:off x="3136392" y="2898648"/>
-            <a:ext cx="2743200" cy="777240"/>
-          </a:xfrm>
-          <a:prstGeom prst="rect">
-            <a:avLst/>
-          </a:prstGeom>
-          <a:noFill/>
-          <a:ln/>
-        </p:spPr>
-        <p:txBody>
-          <a:bodyPr wrap="square" rtlCol="0" anchor="ctr"/>
-          <a:lstStyle/>
-          <a:p>
-            <a:pPr marL="0" indent="0" algn="ctr">
-              <a:buNone/>
-            </a:pPr>
-            <a:r>
-              <a:rPr lang="en-US" sz="3600" b="1" dirty="0">
-                <a:solidFill>
-                  <a:srgbClr val="1A2F5A"/>
-                </a:solidFill>
-                <a:latin typeface="Calibri" pitchFamily="34" charset="0"/>
-                <a:ea typeface="Calibri" pitchFamily="34" charset="-122"/>
-                <a:cs typeface="Calibri" pitchFamily="34" charset="-120"/>
-              </a:rPr>
-              <a:t>54.4%</a:t>
-            </a:r>
-            <a:endParaRPr lang="en-US" sz="3600" dirty="0"/>
-          </a:p>
-        </p:txBody>
-      </p:sp>
-      <p:sp>
-        <p:nvSpPr>
-          <p:cNvPr id="27" name="Text 25"/>
-          <p:cNvSpPr/>
-          <p:nvPr/>
-        </p:nvSpPr>
-        <p:spPr>
-          <a:xfrm>
-            <a:off x="3136392" y="3648456"/>
-            <a:ext cx="2743200" cy="457200"/>
-          </a:xfrm>
-          <a:prstGeom prst="rect">
-            <a:avLst/>
-          </a:prstGeom>
-          <a:noFill/>
-          <a:ln/>
-        </p:spPr>
-        <p:txBody>
-          <a:bodyPr wrap="square" rtlCol="0" anchor="ctr"/>
-          <a:lstStyle/>
-          <a:p>
-            <a:pPr marL="0" indent="0" algn="ctr">
-              <a:buNone/>
-            </a:pPr>
-            <a:r>
-              <a:rPr lang="en-US" sz="1200" dirty="0">
-                <a:solidFill>
-                  <a:srgbClr val="64748B"/>
-                </a:solidFill>
-                <a:latin typeface="Calibri" pitchFamily="34" charset="0"/>
-                <a:ea typeface="Calibri" pitchFamily="34" charset="-122"/>
-                <a:cs typeface="Calibri" pitchFamily="34" charset="-120"/>
-              </a:rPr>
-              <a:t>Regression R²</a:t>
-            </a:r>
-            <a:endParaRPr lang="en-US" sz="1200" dirty="0"/>
-          </a:p>
-        </p:txBody>
-      </p:sp>
-      <p:sp>
-        <p:nvSpPr>
-          <p:cNvPr id="28" name="Text 26"/>
-          <p:cNvSpPr/>
-          <p:nvPr/>
-        </p:nvSpPr>
-        <p:spPr>
-          <a:xfrm>
-            <a:off x="3136392" y="4059936"/>
-            <a:ext cx="2743200" cy="320040"/>
-          </a:xfrm>
-          <a:prstGeom prst="rect">
-            <a:avLst/>
-          </a:prstGeom>
-          <a:noFill/>
-          <a:ln/>
-        </p:spPr>
-        <p:txBody>
-          <a:bodyPr wrap="square" rtlCol="0" anchor="ctr"/>
-          <a:lstStyle/>
-          <a:p>
-            <a:pPr marL="0" indent="0" algn="ctr">
-              <a:buNone/>
-            </a:pPr>
-            <a:r>
-              <a:rPr lang="en-US" sz="1100" i="1" dirty="0">
-                <a:solidFill>
-                  <a:srgbClr val="14BDBD"/>
-                </a:solidFill>
-                <a:latin typeface="Calibri" pitchFamily="34" charset="0"/>
-                <a:ea typeface="Calibri" pitchFamily="34" charset="-122"/>
-                <a:cs typeface="Calibri" pitchFamily="34" charset="-120"/>
-              </a:rPr>
-              <a:t>Budget → Students</a:t>
-            </a:r>
-            <a:endParaRPr lang="en-US" sz="1100" dirty="0"/>
-          </a:p>
-        </p:txBody>
-      </p:sp>
-      <p:sp>
-        <p:nvSpPr>
-          <p:cNvPr id="29" name="Shape 27"/>
-          <p:cNvSpPr/>
-          <p:nvPr/>
-        </p:nvSpPr>
-        <p:spPr>
-          <a:xfrm>
-            <a:off x="6035040" y="2734056"/>
-            <a:ext cx="2743200" cy="1737360"/>
-          </a:xfrm>
-          <a:prstGeom prst="rect">
-            <a:avLst/>
-          </a:prstGeom>
-          <a:solidFill>
-            <a:srgbClr val="FFFFFF"/>
-          </a:solidFill>
-          <a:ln w="12700">
-            <a:solidFill>
-              <a:srgbClr val="E2E8F0"/>
-            </a:solidFill>
-            <a:prstDash val="solid"/>
-          </a:ln>
-          <a:effectLst>
-            <a:outerShdw blurRad="50800" dist="25400" dir="8100000" algn="bl" rotWithShape="0">
-              <a:srgbClr val="000000">
-                <a:alpha val="8000"/>
-              </a:srgbClr>
-            </a:outerShdw>
-          </a:effectLst>
-        </p:spPr>
-      </p:sp>
-      <p:sp>
-        <p:nvSpPr>
-          <p:cNvPr id="30" name="Shape 28"/>
-          <p:cNvSpPr/>
-          <p:nvPr/>
-        </p:nvSpPr>
-        <p:spPr>
-          <a:xfrm>
-            <a:off x="6035040" y="2734056"/>
-            <a:ext cx="2743200" cy="64008"/>
-          </a:xfrm>
-          <a:prstGeom prst="rect">
-            <a:avLst/>
-          </a:prstGeom>
-          <a:solidFill>
-            <a:srgbClr val="0D7377"/>
-          </a:solidFill>
-          <a:ln w="12700">
-            <a:solidFill>
-              <a:srgbClr val="0D7377"/>
-            </a:solidFill>
-            <a:prstDash val="solid"/>
-          </a:ln>
-        </p:spPr>
-      </p:sp>
-      <p:sp>
-        <p:nvSpPr>
-          <p:cNvPr id="31" name="Text 29"/>
-          <p:cNvSpPr/>
-          <p:nvPr/>
-        </p:nvSpPr>
-        <p:spPr>
-          <a:xfrm>
-            <a:off x="6035040" y="2898648"/>
-            <a:ext cx="2743200" cy="777240"/>
-          </a:xfrm>
-          <a:prstGeom prst="rect">
-            <a:avLst/>
-          </a:prstGeom>
-          <a:noFill/>
-          <a:ln/>
-        </p:spPr>
-        <p:txBody>
-          <a:bodyPr wrap="square" rtlCol="0" anchor="ctr"/>
-          <a:lstStyle/>
-          <a:p>
-            <a:pPr marL="0" indent="0" algn="ctr">
-              <a:buNone/>
-            </a:pPr>
-            <a:r>
-              <a:rPr lang="en-US" sz="3600" b="1" dirty="0">
-                <a:solidFill>
-                  <a:srgbClr val="1A2F5A"/>
-                </a:solidFill>
-                <a:latin typeface="Calibri" pitchFamily="34" charset="0"/>
-                <a:ea typeface="Calibri" pitchFamily="34" charset="-122"/>
-                <a:cs typeface="Calibri" pitchFamily="34" charset="-120"/>
-              </a:rPr>
-              <a:t>+351%</a:t>
-            </a:r>
-            <a:endParaRPr lang="en-US" sz="3600" dirty="0"/>
-          </a:p>
-        </p:txBody>
-      </p:sp>
-      <p:sp>
-        <p:nvSpPr>
-          <p:cNvPr id="32" name="Text 30"/>
-          <p:cNvSpPr/>
-          <p:nvPr/>
-        </p:nvSpPr>
-        <p:spPr>
-          <a:xfrm>
-            <a:off x="6035040" y="3648456"/>
-            <a:ext cx="2743200" cy="457200"/>
-          </a:xfrm>
-          <a:prstGeom prst="rect">
-            <a:avLst/>
-          </a:prstGeom>
-          <a:noFill/>
-          <a:ln/>
-        </p:spPr>
-        <p:txBody>
-          <a:bodyPr wrap="square" rtlCol="0" anchor="ctr"/>
-          <a:lstStyle/>
-          <a:p>
-            <a:pPr marL="0" indent="0" algn="ctr">
-              <a:buNone/>
-            </a:pPr>
-            <a:r>
-              <a:rPr lang="en-US" sz="1200" dirty="0">
-                <a:solidFill>
-                  <a:srgbClr val="64748B"/>
-                </a:solidFill>
-                <a:latin typeface="Calibri" pitchFamily="34" charset="0"/>
-                <a:ea typeface="Calibri" pitchFamily="34" charset="-122"/>
-                <a:cs typeface="Calibri" pitchFamily="34" charset="-120"/>
-              </a:rPr>
-              <a:t>Higher education</a:t>
-            </a:r>
-            <a:endParaRPr lang="en-US" sz="1200" dirty="0"/>
-          </a:p>
-        </p:txBody>
-      </p:sp>
-      <p:sp>
-        <p:nvSpPr>
-          <p:cNvPr id="33" name="Text 31"/>
-          <p:cNvSpPr/>
-          <p:nvPr/>
-        </p:nvSpPr>
-        <p:spPr>
-          <a:xfrm>
-            <a:off x="6035040" y="4059936"/>
-            <a:ext cx="2743200" cy="320040"/>
-          </a:xfrm>
-          <a:prstGeom prst="rect">
-            <a:avLst/>
-          </a:prstGeom>
-          <a:noFill/>
-          <a:ln/>
-        </p:spPr>
-        <p:txBody>
-          <a:bodyPr wrap="square" rtlCol="0" anchor="ctr"/>
-          <a:lstStyle/>
-          <a:p>
-            <a:pPr marL="0" indent="0" algn="ctr">
-              <a:buNone/>
-            </a:pPr>
-            <a:r>
-              <a:rPr lang="en-US" sz="1100" i="1" dirty="0">
-                <a:solidFill>
-                  <a:srgbClr val="14BDBD"/>
-                </a:solidFill>
-                <a:latin typeface="Calibri" pitchFamily="34" charset="0"/>
-                <a:ea typeface="Calibri" pitchFamily="34" charset="-122"/>
-                <a:cs typeface="Calibri" pitchFamily="34" charset="-120"/>
-              </a:rPr>
-              <a:t>1989–2022</a:t>
-            </a:r>
-            <a:endParaRPr lang="en-US" sz="1100" dirty="0"/>
+            <a:endParaRPr lang="en-US" dirty="0">
+              <a:solidFill>
+                <a:schemeClr val="bg1"/>
+              </a:solidFill>
+              <a:latin typeface="Consolas" panose="020B0609020204030204" pitchFamily="49" charset="0"/>
+            </a:endParaRPr>
           </a:p>
         </p:txBody>
       </p:sp>
     </p:spTree>
+    <p:extLst>
+      <p:ext uri="{BB962C8B-B14F-4D97-AF65-F5344CB8AC3E}">
+        <p14:creationId xmlns:p14="http://schemas.microsoft.com/office/powerpoint/2010/main" val="1976545537"/>
+      </p:ext>
+    </p:extLst>
   </p:cSld>
   <p:clrMapOvr>
     <a:masterClrMapping/>
@@ -12557,6 +13942,328 @@
 </file>
 
 <file path=ppt/slides/slide3.xml><?xml version="1.0" encoding="utf-8"?>
+<p:sld xmlns:a="http://schemas.openxmlformats.org/drawingml/2006/main" xmlns:r="http://schemas.openxmlformats.org/officeDocument/2006/relationships" xmlns:p="http://schemas.openxmlformats.org/presentationml/2006/main">
+  <p:cSld>
+    <p:spTree>
+      <p:nvGrpSpPr>
+        <p:cNvPr id="1" name=""/>
+        <p:cNvGrpSpPr/>
+        <p:nvPr/>
+      </p:nvGrpSpPr>
+      <p:grpSpPr>
+        <a:xfrm>
+          <a:off x="0" y="0"/>
+          <a:ext cx="0" cy="0"/>
+          <a:chOff x="0" y="0"/>
+          <a:chExt cx="0" cy="0"/>
+        </a:xfrm>
+      </p:grpSpPr>
+      <p:sp>
+        <p:nvSpPr>
+          <p:cNvPr id="3" name="TextBox 2">
+            <a:extLst>
+              <a:ext uri="{FF2B5EF4-FFF2-40B4-BE49-F238E27FC236}">
+                <a16:creationId xmlns:a16="http://schemas.microsoft.com/office/drawing/2014/main" id="{BCE94F3D-A4F1-5298-AFEE-CA71FF6EBA8F}"/>
+              </a:ext>
+            </a:extLst>
+          </p:cNvPr>
+          <p:cNvSpPr txBox="1"/>
+          <p:nvPr/>
+        </p:nvSpPr>
+        <p:spPr>
+          <a:xfrm>
+            <a:off x="479181" y="1626031"/>
+            <a:ext cx="7983414" cy="2620333"/>
+          </a:xfrm>
+          <a:prstGeom prst="rect">
+            <a:avLst/>
+          </a:prstGeom>
+          <a:noFill/>
+        </p:spPr>
+        <p:txBody>
+          <a:bodyPr wrap="square">
+            <a:spAutoFit/>
+          </a:bodyPr>
+          <a:lstStyle/>
+          <a:p>
+            <a:pPr marL="342900" indent="-342900">
+              <a:lnSpc>
+                <a:spcPts val="1425"/>
+              </a:lnSpc>
+              <a:buAutoNum type="arabicPeriod"/>
+            </a:pPr>
+            <a:r>
+              <a:rPr lang="en-US" b="0" dirty="0">
+                <a:solidFill>
+                  <a:schemeClr val="accent2">
+                    <a:lumMod val="75000"/>
+                  </a:schemeClr>
+                </a:solidFill>
+                <a:effectLst/>
+                <a:latin typeface="Consolas" panose="020B0609020204030204" pitchFamily="49" charset="0"/>
+              </a:rPr>
+              <a:t>How has population literacy evolved across the four census years (1989–2022)?</a:t>
+            </a:r>
+          </a:p>
+          <a:p>
+            <a:pPr marL="342900" indent="-342900">
+              <a:lnSpc>
+                <a:spcPts val="1425"/>
+              </a:lnSpc>
+              <a:buAutoNum type="arabicPeriod"/>
+            </a:pPr>
+            <a:endParaRPr lang="en-US" b="0" dirty="0">
+              <a:effectLst/>
+              <a:latin typeface="Consolas" panose="020B0609020204030204" pitchFamily="49" charset="0"/>
+            </a:endParaRPr>
+          </a:p>
+          <a:p>
+            <a:pPr>
+              <a:lnSpc>
+                <a:spcPts val="1425"/>
+              </a:lnSpc>
+              <a:buNone/>
+            </a:pPr>
+            <a:r>
+              <a:rPr lang="en-US" b="0" dirty="0">
+                <a:solidFill>
+                  <a:schemeClr val="accent4">
+                    <a:lumMod val="75000"/>
+                  </a:schemeClr>
+                </a:solidFill>
+                <a:effectLst/>
+                <a:latin typeface="Consolas" panose="020B0609020204030204" pitchFamily="49" charset="0"/>
+              </a:rPr>
+              <a:t>2. </a:t>
+            </a:r>
+            <a:r>
+              <a:rPr lang="en-US" dirty="0">
+                <a:solidFill>
+                  <a:schemeClr val="accent6">
+                    <a:lumMod val="75000"/>
+                  </a:schemeClr>
+                </a:solidFill>
+              </a:rPr>
+              <a:t>What is the overall trend in international student enrollment, and do CIS and non-CIS students follow different growth patterns?</a:t>
+            </a:r>
+          </a:p>
+          <a:p>
+            <a:pPr>
+              <a:lnSpc>
+                <a:spcPts val="1425"/>
+              </a:lnSpc>
+              <a:buNone/>
+            </a:pPr>
+            <a:endParaRPr lang="en-US" b="0" dirty="0">
+              <a:effectLst/>
+              <a:latin typeface="Consolas" panose="020B0609020204030204" pitchFamily="49" charset="0"/>
+            </a:endParaRPr>
+          </a:p>
+          <a:p>
+            <a:pPr>
+              <a:lnSpc>
+                <a:spcPts val="1425"/>
+              </a:lnSpc>
+              <a:buNone/>
+            </a:pPr>
+            <a:r>
+              <a:rPr lang="en-US" b="0" dirty="0">
+                <a:solidFill>
+                  <a:schemeClr val="accent5">
+                    <a:lumMod val="75000"/>
+                  </a:schemeClr>
+                </a:solidFill>
+                <a:effectLst/>
+                <a:latin typeface="Consolas" panose="020B0609020204030204" pitchFamily="49" charset="0"/>
+              </a:rPr>
+              <a:t>3. </a:t>
+            </a:r>
+            <a:r>
+              <a:rPr lang="en-US" dirty="0">
+                <a:solidFill>
+                  <a:schemeClr val="accent4">
+                    <a:lumMod val="75000"/>
+                  </a:schemeClr>
+                </a:solidFill>
+              </a:rPr>
+              <a:t>Is there a statistically significant correlation between the national education budget and international student enrollment?</a:t>
+            </a:r>
+          </a:p>
+          <a:p>
+            <a:pPr>
+              <a:lnSpc>
+                <a:spcPts val="1425"/>
+              </a:lnSpc>
+              <a:buNone/>
+            </a:pPr>
+            <a:endParaRPr lang="en-US" b="0" dirty="0">
+              <a:effectLst/>
+              <a:latin typeface="Consolas" panose="020B0609020204030204" pitchFamily="49" charset="0"/>
+            </a:endParaRPr>
+          </a:p>
+          <a:p>
+            <a:pPr>
+              <a:lnSpc>
+                <a:spcPts val="1425"/>
+              </a:lnSpc>
+              <a:buNone/>
+            </a:pPr>
+            <a:r>
+              <a:rPr lang="en-US" b="0" dirty="0">
+                <a:solidFill>
+                  <a:schemeClr val="accent6">
+                    <a:lumMod val="75000"/>
+                  </a:schemeClr>
+                </a:solidFill>
+                <a:effectLst/>
+                <a:latin typeface="Consolas" panose="020B0609020204030204" pitchFamily="49" charset="0"/>
+              </a:rPr>
+              <a:t>4. </a:t>
+            </a:r>
+            <a:r>
+              <a:rPr lang="en-US" dirty="0">
+                <a:solidFill>
+                  <a:schemeClr val="accent1">
+                    <a:lumMod val="60000"/>
+                    <a:lumOff val="40000"/>
+                  </a:schemeClr>
+                </a:solidFill>
+              </a:rPr>
+              <a:t>How is the education budget allocated across sub-sectors such as pre-school, general secondary, higher, and vocational education?</a:t>
+            </a:r>
+          </a:p>
+          <a:p>
+            <a:pPr>
+              <a:lnSpc>
+                <a:spcPts val="1425"/>
+              </a:lnSpc>
+              <a:buNone/>
+            </a:pPr>
+            <a:endParaRPr lang="en-US" b="0" dirty="0">
+              <a:effectLst/>
+              <a:latin typeface="Consolas" panose="020B0609020204030204" pitchFamily="49" charset="0"/>
+            </a:endParaRPr>
+          </a:p>
+          <a:p>
+            <a:pPr>
+              <a:lnSpc>
+                <a:spcPts val="1425"/>
+              </a:lnSpc>
+              <a:buNone/>
+            </a:pPr>
+            <a:r>
+              <a:rPr lang="en-US" b="0" dirty="0">
+                <a:effectLst/>
+                <a:latin typeface="Consolas" panose="020B0609020204030204" pitchFamily="49" charset="0"/>
+              </a:rPr>
+              <a:t>5. Is the growth in non-CIS students significantly different from CIS students (hypothesis test)?</a:t>
+            </a:r>
+          </a:p>
+        </p:txBody>
+      </p:sp>
+      <p:sp>
+        <p:nvSpPr>
+          <p:cNvPr id="4" name="Shape 0">
+            <a:extLst>
+              <a:ext uri="{FF2B5EF4-FFF2-40B4-BE49-F238E27FC236}">
+                <a16:creationId xmlns:a16="http://schemas.microsoft.com/office/drawing/2014/main" id="{9B0FC7C5-5DEA-E977-2B06-A7164AB6A33B}"/>
+              </a:ext>
+            </a:extLst>
+          </p:cNvPr>
+          <p:cNvSpPr/>
+          <p:nvPr/>
+        </p:nvSpPr>
+        <p:spPr>
+          <a:xfrm>
+            <a:off x="0" y="0"/>
+            <a:ext cx="9144000" cy="685800"/>
+          </a:xfrm>
+          <a:prstGeom prst="rect">
+            <a:avLst/>
+          </a:prstGeom>
+          <a:solidFill>
+            <a:srgbClr val="1A2F5A"/>
+          </a:solidFill>
+          <a:ln w="12700">
+            <a:solidFill>
+              <a:srgbClr val="1A2F5A"/>
+            </a:solidFill>
+            <a:prstDash val="solid"/>
+          </a:ln>
+        </p:spPr>
+        <p:txBody>
+          <a:bodyPr/>
+          <a:lstStyle/>
+          <a:p>
+            <a:pPr>
+              <a:lnSpc>
+                <a:spcPts val="1425"/>
+              </a:lnSpc>
+              <a:buNone/>
+            </a:pPr>
+            <a:r>
+              <a:rPr lang="en-US" b="1" dirty="0">
+                <a:latin typeface="Consolas" panose="020B0609020204030204" pitchFamily="49" charset="0"/>
+              </a:rPr>
+              <a:t>   </a:t>
+            </a:r>
+          </a:p>
+          <a:p>
+            <a:pPr>
+              <a:lnSpc>
+                <a:spcPts val="1425"/>
+              </a:lnSpc>
+            </a:pPr>
+            <a:r>
+              <a:rPr lang="en-US" b="1" dirty="0">
+                <a:latin typeface="Consolas" panose="020B0609020204030204" pitchFamily="49" charset="0"/>
+              </a:rPr>
+              <a:t>    </a:t>
+            </a:r>
+            <a:r>
+              <a:rPr lang="en-US" b="1" dirty="0">
+                <a:solidFill>
+                  <a:schemeClr val="bg1"/>
+                </a:solidFill>
+              </a:rPr>
+              <a:t> Research Questions</a:t>
+            </a:r>
+            <a:endParaRPr lang="en-US" dirty="0">
+              <a:solidFill>
+                <a:schemeClr val="bg1"/>
+              </a:solidFill>
+            </a:endParaRPr>
+          </a:p>
+          <a:p>
+            <a:pPr>
+              <a:lnSpc>
+                <a:spcPts val="1425"/>
+              </a:lnSpc>
+              <a:buNone/>
+            </a:pPr>
+            <a:endParaRPr lang="en-US" dirty="0">
+              <a:solidFill>
+                <a:schemeClr val="bg1"/>
+              </a:solidFill>
+              <a:latin typeface="Consolas" panose="020B0609020204030204" pitchFamily="49" charset="0"/>
+            </a:endParaRPr>
+          </a:p>
+        </p:txBody>
+      </p:sp>
+    </p:spTree>
+    <p:extLst>
+      <p:ext uri="{BB962C8B-B14F-4D97-AF65-F5344CB8AC3E}">
+        <p14:creationId xmlns:p14="http://schemas.microsoft.com/office/powerpoint/2010/main" val="4157779929"/>
+      </p:ext>
+    </p:extLst>
+  </p:cSld>
+  <p:clrMapOvr>
+    <a:masterClrMapping/>
+  </p:clrMapOvr>
+</p:sld>
+</file>
+
+<file path=ppt/slides/slide4.xml><?xml version="1.0" encoding="utf-8"?>
 <p:sld xmlns:a="http://schemas.openxmlformats.org/drawingml/2006/main" xmlns:r="http://schemas.openxmlformats.org/officeDocument/2006/relationships" xmlns:p="http://schemas.openxmlformats.org/presentationml/2006/main">
   <p:cSld name="Slide 3">
     <p:bg>
@@ -15306,7 +17013,7 @@
 </p:sld>
 </file>
 
-<file path=ppt/slides/slide4.xml><?xml version="1.0" encoding="utf-8"?>
+<file path=ppt/slides/slide5.xml><?xml version="1.0" encoding="utf-8"?>
 <p:sld xmlns:a="http://schemas.openxmlformats.org/drawingml/2006/main" xmlns:r="http://schemas.openxmlformats.org/officeDocument/2006/relationships" xmlns:p="http://schemas.openxmlformats.org/presentationml/2006/main">
   <p:cSld name="Slide 4">
     <p:bg>
@@ -23247,7 +24954,7 @@
 </p:sld>
 </file>
 
-<file path=ppt/slides/slide5.xml><?xml version="1.0" encoding="utf-8"?>
+<file path=ppt/slides/slide6.xml><?xml version="1.0" encoding="utf-8"?>
 <p:sld xmlns:a="http://schemas.openxmlformats.org/drawingml/2006/main" xmlns:r="http://schemas.openxmlformats.org/officeDocument/2006/relationships" xmlns:p="http://schemas.openxmlformats.org/presentationml/2006/main">
   <p:cSld>
     <p:spTree>
@@ -23307,7 +25014,7 @@
 </p:sld>
 </file>
 
-<file path=ppt/slides/slide6.xml><?xml version="1.0" encoding="utf-8"?>
+<file path=ppt/slides/slide7.xml><?xml version="1.0" encoding="utf-8"?>
 <p:sld xmlns:a="http://schemas.openxmlformats.org/drawingml/2006/main" xmlns:r="http://schemas.openxmlformats.org/officeDocument/2006/relationships" xmlns:p="http://schemas.openxmlformats.org/presentationml/2006/main">
   <p:cSld name="Slide 5">
     <p:bg>
@@ -28768,7 +30475,7 @@
 </p:sld>
 </file>
 
-<file path=ppt/slides/slide7.xml><?xml version="1.0" encoding="utf-8"?>
+<file path=ppt/slides/slide8.xml><?xml version="1.0" encoding="utf-8"?>
 <p:sld xmlns:a="http://schemas.openxmlformats.org/drawingml/2006/main" xmlns:r="http://schemas.openxmlformats.org/officeDocument/2006/relationships" xmlns:p="http://schemas.openxmlformats.org/presentationml/2006/main">
   <p:cSld name="Slide 6">
     <p:bg>
@@ -30339,7 +32046,7 @@
 </p:sld>
 </file>
 
-<file path=ppt/slides/slide8.xml><?xml version="1.0" encoding="utf-8"?>
+<file path=ppt/slides/slide9.xml><?xml version="1.0" encoding="utf-8"?>
 <p:sld xmlns:a="http://schemas.openxmlformats.org/drawingml/2006/main" xmlns:r="http://schemas.openxmlformats.org/officeDocument/2006/relationships" xmlns:p="http://schemas.openxmlformats.org/presentationml/2006/main">
   <p:cSld>
     <p:spTree>
@@ -30392,2282 +32099,6 @@
         <p14:creationId xmlns:p14="http://schemas.microsoft.com/office/powerpoint/2010/main" val="4027790119"/>
       </p:ext>
     </p:extLst>
-  </p:cSld>
-  <p:clrMapOvr>
-    <a:masterClrMapping/>
-  </p:clrMapOvr>
-</p:sld>
-</file>
-
-<file path=ppt/slides/slide9.xml><?xml version="1.0" encoding="utf-8"?>
-<p:sld xmlns:a="http://schemas.openxmlformats.org/drawingml/2006/main" xmlns:r="http://schemas.openxmlformats.org/officeDocument/2006/relationships" xmlns:p="http://schemas.openxmlformats.org/presentationml/2006/main">
-  <p:cSld name="Slide 7">
-    <p:bg>
-      <p:bgPr>
-        <a:solidFill>
-          <a:srgbClr val="F4F7FB"/>
-        </a:solidFill>
-        <a:effectLst/>
-      </p:bgPr>
-    </p:bg>
-    <p:spTree>
-      <p:nvGrpSpPr>
-        <p:cNvPr id="1" name=""/>
-        <p:cNvGrpSpPr/>
-        <p:nvPr/>
-      </p:nvGrpSpPr>
-      <p:grpSpPr>
-        <a:xfrm>
-          <a:off x="0" y="0"/>
-          <a:ext cx="0" cy="0"/>
-          <a:chOff x="0" y="0"/>
-          <a:chExt cx="0" cy="0"/>
-        </a:xfrm>
-      </p:grpSpPr>
-      <p:sp>
-        <p:nvSpPr>
-          <p:cNvPr id="2" name="Shape 0"/>
-          <p:cNvSpPr/>
-          <p:nvPr/>
-        </p:nvSpPr>
-        <p:spPr>
-          <a:xfrm>
-            <a:off x="0" y="0"/>
-            <a:ext cx="9144000" cy="685800"/>
-          </a:xfrm>
-          <a:prstGeom prst="rect">
-            <a:avLst/>
-          </a:prstGeom>
-          <a:solidFill>
-            <a:srgbClr val="1A2F5A"/>
-          </a:solidFill>
-          <a:ln w="12700">
-            <a:solidFill>
-              <a:srgbClr val="1A2F5A"/>
-            </a:solidFill>
-            <a:prstDash val="solid"/>
-          </a:ln>
-        </p:spPr>
-      </p:sp>
-      <p:sp>
-        <p:nvSpPr>
-          <p:cNvPr id="3" name="Text 1"/>
-          <p:cNvSpPr/>
-          <p:nvPr/>
-        </p:nvSpPr>
-        <p:spPr>
-          <a:xfrm>
-            <a:off x="274320" y="0"/>
-            <a:ext cx="8595360" cy="685800"/>
-          </a:xfrm>
-          <a:prstGeom prst="rect">
-            <a:avLst/>
-          </a:prstGeom>
-          <a:noFill/>
-          <a:ln/>
-        </p:spPr>
-        <p:txBody>
-          <a:bodyPr wrap="square" rtlCol="0" anchor="ctr"/>
-          <a:lstStyle/>
-          <a:p>
-            <a:pPr marL="0" indent="0">
-              <a:buNone/>
-            </a:pPr>
-            <a:r>
-              <a:rPr lang="en-US" sz="2000" b="1" dirty="0">
-                <a:solidFill>
-                  <a:srgbClr val="FFFFFF"/>
-                </a:solidFill>
-                <a:latin typeface="Calibri" pitchFamily="34" charset="0"/>
-                <a:ea typeface="Calibri" pitchFamily="34" charset="-122"/>
-                <a:cs typeface="Calibri" pitchFamily="34" charset="-120"/>
-              </a:rPr>
-              <a:t>7 · Hypothesis Testing — CIS vs Non-CIS Growth</a:t>
-            </a:r>
-            <a:endParaRPr lang="en-US" sz="2000" dirty="0"/>
-          </a:p>
-        </p:txBody>
-      </p:sp>
-      <p:sp>
-        <p:nvSpPr>
-          <p:cNvPr id="4" name="Text 2"/>
-          <p:cNvSpPr/>
-          <p:nvPr/>
-        </p:nvSpPr>
-        <p:spPr>
-          <a:xfrm>
-            <a:off x="274320" y="777240"/>
-            <a:ext cx="8595360" cy="274320"/>
-          </a:xfrm>
-          <a:prstGeom prst="rect">
-            <a:avLst/>
-          </a:prstGeom>
-          <a:noFill/>
-          <a:ln/>
-        </p:spPr>
-        <p:txBody>
-          <a:bodyPr wrap="square" rtlCol="0" anchor="ctr"/>
-          <a:lstStyle/>
-          <a:p>
-            <a:pPr marL="0" indent="0">
-              <a:buNone/>
-            </a:pPr>
-            <a:r>
-              <a:rPr lang="en-US" sz="1200" b="1" dirty="0">
-                <a:solidFill>
-                  <a:srgbClr val="1A2F5A"/>
-                </a:solidFill>
-                <a:latin typeface="Calibri" pitchFamily="34" charset="0"/>
-                <a:ea typeface="Calibri" pitchFamily="34" charset="-122"/>
-                <a:cs typeface="Calibri" pitchFamily="34" charset="-120"/>
-              </a:rPr>
-              <a:t>Growth Rate Descriptive Statistics (Annual YoY %)</a:t>
-            </a:r>
-            <a:endParaRPr lang="en-US" sz="1200" dirty="0"/>
-          </a:p>
-        </p:txBody>
-      </p:sp>
-      <p:graphicFrame>
-        <p:nvGraphicFramePr>
-          <p:cNvPr id="8" name="Table 0"/>
-          <p:cNvGraphicFramePr>
-            <a:graphicFrameLocks noGrp="1"/>
-          </p:cNvGraphicFramePr>
-          <p:nvPr>
-            <p:extLst>
-              <p:ext uri="{D42A27DB-BD31-4B8C-83A1-F6EECF244321}">
-                <p14:modId xmlns:p14="http://schemas.microsoft.com/office/powerpoint/2010/main" val="1579011935"/>
-              </p:ext>
-            </p:extLst>
-          </p:nvPr>
-        </p:nvGraphicFramePr>
-        <p:xfrm>
-          <a:off x="274320" y="1097280"/>
-          <a:ext cx="3200400" cy="2285997"/>
-        </p:xfrm>
-        <a:graphic>
-          <a:graphicData uri="http://schemas.openxmlformats.org/drawingml/2006/table">
-            <a:tbl>
-              <a:tblPr/>
-              <a:tblGrid>
-                <a:gridCol w="1280160">
-                  <a:extLst>
-                    <a:ext uri="{9D8B030D-6E8A-4147-A177-3AD203B41FA5}">
-                      <a16:colId xmlns:a16="http://schemas.microsoft.com/office/drawing/2014/main" val="20000"/>
-                    </a:ext>
-                  </a:extLst>
-                </a:gridCol>
-                <a:gridCol w="960120">
-                  <a:extLst>
-                    <a:ext uri="{9D8B030D-6E8A-4147-A177-3AD203B41FA5}">
-                      <a16:colId xmlns:a16="http://schemas.microsoft.com/office/drawing/2014/main" val="20001"/>
-                    </a:ext>
-                  </a:extLst>
-                </a:gridCol>
-                <a:gridCol w="960120">
-                  <a:extLst>
-                    <a:ext uri="{9D8B030D-6E8A-4147-A177-3AD203B41FA5}">
-                      <a16:colId xmlns:a16="http://schemas.microsoft.com/office/drawing/2014/main" val="20002"/>
-                    </a:ext>
-                  </a:extLst>
-                </a:gridCol>
-              </a:tblGrid>
-              <a:tr h="326571">
-                <a:tc>
-                  <a:txBody>
-                    <a:bodyPr/>
-                    <a:lstStyle/>
-                    <a:p>
-                      <a:pPr marL="0" indent="0">
-                        <a:buNone/>
-                      </a:pPr>
-                      <a:endParaRPr lang="en-US" sz="1100" dirty="0">
-                        <a:latin typeface="Calibri" charset="0"/>
-                        <a:ea typeface="Calibri" charset="0"/>
-                        <a:cs typeface="Calibri" charset="0"/>
-                      </a:endParaRPr>
-                    </a:p>
-                  </a:txBody>
-                  <a:tcPr>
-                    <a:lnL w="5080" cap="flat" cmpd="sng" algn="ctr">
-                      <a:solidFill>
-                        <a:srgbClr val="E2E8F0"/>
-                      </a:solidFill>
-                      <a:prstDash val="solid"/>
-                      <a:round/>
-                      <a:headEnd type="none" w="med" len="med"/>
-                      <a:tailEnd type="none" w="med" len="med"/>
-                    </a:lnL>
-                    <a:lnR w="5080" cap="flat" cmpd="sng" algn="ctr">
-                      <a:solidFill>
-                        <a:srgbClr val="E2E8F0"/>
-                      </a:solidFill>
-                      <a:prstDash val="solid"/>
-                      <a:round/>
-                      <a:headEnd type="none" w="med" len="med"/>
-                      <a:tailEnd type="none" w="med" len="med"/>
-                    </a:lnR>
-                    <a:lnT w="5080" cap="flat" cmpd="sng" algn="ctr">
-                      <a:solidFill>
-                        <a:srgbClr val="E2E8F0"/>
-                      </a:solidFill>
-                      <a:prstDash val="solid"/>
-                      <a:round/>
-                      <a:headEnd type="none" w="med" len="med"/>
-                      <a:tailEnd type="none" w="med" len="med"/>
-                    </a:lnT>
-                    <a:lnB w="5080" cap="flat" cmpd="sng" algn="ctr">
-                      <a:solidFill>
-                        <a:srgbClr val="E2E8F0"/>
-                      </a:solidFill>
-                      <a:prstDash val="solid"/>
-                      <a:round/>
-                      <a:headEnd type="none" w="med" len="med"/>
-                      <a:tailEnd type="none" w="med" len="med"/>
-                    </a:lnB>
-                    <a:solidFill>
-                      <a:srgbClr val="1A2F5A"/>
-                    </a:solidFill>
-                  </a:tcPr>
-                </a:tc>
-                <a:tc>
-                  <a:txBody>
-                    <a:bodyPr/>
-                    <a:lstStyle/>
-                    <a:p>
-                      <a:pPr marL="0" indent="0" algn="ctr">
-                        <a:buNone/>
-                      </a:pPr>
-                      <a:r>
-                        <a:rPr lang="en-US" sz="1100" b="1" dirty="0">
-                          <a:solidFill>
-                            <a:srgbClr val="FFFFFF"/>
-                          </a:solidFill>
-                          <a:latin typeface="Calibri" pitchFamily="34" charset="0"/>
-                          <a:ea typeface="Calibri" pitchFamily="34" charset="-122"/>
-                          <a:cs typeface="Calibri" pitchFamily="34" charset="-120"/>
-                        </a:rPr>
-                        <a:t>CIS</a:t>
-                      </a:r>
-                      <a:endParaRPr lang="en-US" sz="1100" dirty="0">
-                        <a:latin typeface="Calibri" charset="0"/>
-                        <a:ea typeface="Calibri" charset="0"/>
-                        <a:cs typeface="Calibri" charset="0"/>
-                      </a:endParaRPr>
-                    </a:p>
-                  </a:txBody>
-                  <a:tcPr>
-                    <a:lnL w="5080" cap="flat" cmpd="sng" algn="ctr">
-                      <a:solidFill>
-                        <a:srgbClr val="E2E8F0"/>
-                      </a:solidFill>
-                      <a:prstDash val="solid"/>
-                      <a:round/>
-                      <a:headEnd type="none" w="med" len="med"/>
-                      <a:tailEnd type="none" w="med" len="med"/>
-                    </a:lnL>
-                    <a:lnR w="5080" cap="flat" cmpd="sng" algn="ctr">
-                      <a:solidFill>
-                        <a:srgbClr val="E2E8F0"/>
-                      </a:solidFill>
-                      <a:prstDash val="solid"/>
-                      <a:round/>
-                      <a:headEnd type="none" w="med" len="med"/>
-                      <a:tailEnd type="none" w="med" len="med"/>
-                    </a:lnR>
-                    <a:lnT w="5080" cap="flat" cmpd="sng" algn="ctr">
-                      <a:solidFill>
-                        <a:srgbClr val="E2E8F0"/>
-                      </a:solidFill>
-                      <a:prstDash val="solid"/>
-                      <a:round/>
-                      <a:headEnd type="none" w="med" len="med"/>
-                      <a:tailEnd type="none" w="med" len="med"/>
-                    </a:lnT>
-                    <a:lnB w="5080" cap="flat" cmpd="sng" algn="ctr">
-                      <a:solidFill>
-                        <a:srgbClr val="E2E8F0"/>
-                      </a:solidFill>
-                      <a:prstDash val="solid"/>
-                      <a:round/>
-                      <a:headEnd type="none" w="med" len="med"/>
-                      <a:tailEnd type="none" w="med" len="med"/>
-                    </a:lnB>
-                    <a:solidFill>
-                      <a:srgbClr val="1A2F5A"/>
-                    </a:solidFill>
-                  </a:tcPr>
-                </a:tc>
-                <a:tc>
-                  <a:txBody>
-                    <a:bodyPr/>
-                    <a:lstStyle/>
-                    <a:p>
-                      <a:pPr marL="0" indent="0" algn="ctr">
-                        <a:buNone/>
-                      </a:pPr>
-                      <a:r>
-                        <a:rPr lang="en-US" sz="1100" b="1" dirty="0">
-                          <a:solidFill>
-                            <a:srgbClr val="FFFFFF"/>
-                          </a:solidFill>
-                          <a:latin typeface="Calibri" pitchFamily="34" charset="0"/>
-                          <a:ea typeface="Calibri" pitchFamily="34" charset="-122"/>
-                          <a:cs typeface="Calibri" pitchFamily="34" charset="-120"/>
-                        </a:rPr>
-                        <a:t>Non-CIS</a:t>
-                      </a:r>
-                      <a:endParaRPr lang="en-US" sz="1100" dirty="0">
-                        <a:latin typeface="Calibri" charset="0"/>
-                        <a:ea typeface="Calibri" charset="0"/>
-                        <a:cs typeface="Calibri" charset="0"/>
-                      </a:endParaRPr>
-                    </a:p>
-                  </a:txBody>
-                  <a:tcPr>
-                    <a:lnL w="5080" cap="flat" cmpd="sng" algn="ctr">
-                      <a:solidFill>
-                        <a:srgbClr val="E2E8F0"/>
-                      </a:solidFill>
-                      <a:prstDash val="solid"/>
-                      <a:round/>
-                      <a:headEnd type="none" w="med" len="med"/>
-                      <a:tailEnd type="none" w="med" len="med"/>
-                    </a:lnL>
-                    <a:lnR w="5080" cap="flat" cmpd="sng" algn="ctr">
-                      <a:solidFill>
-                        <a:srgbClr val="E2E8F0"/>
-                      </a:solidFill>
-                      <a:prstDash val="solid"/>
-                      <a:round/>
-                      <a:headEnd type="none" w="med" len="med"/>
-                      <a:tailEnd type="none" w="med" len="med"/>
-                    </a:lnR>
-                    <a:lnT w="5080" cap="flat" cmpd="sng" algn="ctr">
-                      <a:solidFill>
-                        <a:srgbClr val="E2E8F0"/>
-                      </a:solidFill>
-                      <a:prstDash val="solid"/>
-                      <a:round/>
-                      <a:headEnd type="none" w="med" len="med"/>
-                      <a:tailEnd type="none" w="med" len="med"/>
-                    </a:lnT>
-                    <a:lnB w="5080" cap="flat" cmpd="sng" algn="ctr">
-                      <a:solidFill>
-                        <a:srgbClr val="E2E8F0"/>
-                      </a:solidFill>
-                      <a:prstDash val="solid"/>
-                      <a:round/>
-                      <a:headEnd type="none" w="med" len="med"/>
-                      <a:tailEnd type="none" w="med" len="med"/>
-                    </a:lnB>
-                    <a:solidFill>
-                      <a:srgbClr val="1A2F5A"/>
-                    </a:solidFill>
-                  </a:tcPr>
-                </a:tc>
-                <a:extLst>
-                  <a:ext uri="{0D108BD9-81ED-4DB2-BD59-A6C34878D82A}">
-                    <a16:rowId xmlns:a16="http://schemas.microsoft.com/office/drawing/2014/main" val="10000"/>
-                  </a:ext>
-                </a:extLst>
-              </a:tr>
-              <a:tr h="326571">
-                <a:tc>
-                  <a:txBody>
-                    <a:bodyPr/>
-                    <a:lstStyle/>
-                    <a:p>
-                      <a:pPr marL="0" indent="0">
-                        <a:buNone/>
-                      </a:pPr>
-                      <a:r>
-                        <a:rPr lang="en-US" sz="1100" dirty="0">
-                          <a:solidFill>
-                            <a:srgbClr val="1E293B"/>
-                          </a:solidFill>
-                          <a:latin typeface="Calibri" pitchFamily="34" charset="0"/>
-                          <a:ea typeface="Calibri" pitchFamily="34" charset="-122"/>
-                          <a:cs typeface="Calibri" pitchFamily="34" charset="-120"/>
-                        </a:rPr>
-                        <a:t>n</a:t>
-                      </a:r>
-                      <a:endParaRPr lang="en-US" sz="1100" dirty="0">
-                        <a:latin typeface="Calibri" charset="0"/>
-                        <a:ea typeface="Calibri" charset="0"/>
-                        <a:cs typeface="Calibri" charset="0"/>
-                      </a:endParaRPr>
-                    </a:p>
-                  </a:txBody>
-                  <a:tcPr>
-                    <a:lnL w="5080" cap="flat" cmpd="sng" algn="ctr">
-                      <a:solidFill>
-                        <a:srgbClr val="E2E8F0"/>
-                      </a:solidFill>
-                      <a:prstDash val="solid"/>
-                      <a:round/>
-                      <a:headEnd type="none" w="med" len="med"/>
-                      <a:tailEnd type="none" w="med" len="med"/>
-                    </a:lnL>
-                    <a:lnR w="5080" cap="flat" cmpd="sng" algn="ctr">
-                      <a:solidFill>
-                        <a:srgbClr val="E2E8F0"/>
-                      </a:solidFill>
-                      <a:prstDash val="solid"/>
-                      <a:round/>
-                      <a:headEnd type="none" w="med" len="med"/>
-                      <a:tailEnd type="none" w="med" len="med"/>
-                    </a:lnR>
-                    <a:lnT w="5080" cap="flat" cmpd="sng" algn="ctr">
-                      <a:solidFill>
-                        <a:srgbClr val="E2E8F0"/>
-                      </a:solidFill>
-                      <a:prstDash val="solid"/>
-                      <a:round/>
-                      <a:headEnd type="none" w="med" len="med"/>
-                      <a:tailEnd type="none" w="med" len="med"/>
-                    </a:lnT>
-                    <a:lnB w="5080" cap="flat" cmpd="sng" algn="ctr">
-                      <a:solidFill>
-                        <a:srgbClr val="E2E8F0"/>
-                      </a:solidFill>
-                      <a:prstDash val="solid"/>
-                      <a:round/>
-                      <a:headEnd type="none" w="med" len="med"/>
-                      <a:tailEnd type="none" w="med" len="med"/>
-                    </a:lnB>
-                    <a:solidFill>
-                      <a:srgbClr val="FFFFFF"/>
-                    </a:solidFill>
-                  </a:tcPr>
-                </a:tc>
-                <a:tc>
-                  <a:txBody>
-                    <a:bodyPr/>
-                    <a:lstStyle/>
-                    <a:p>
-                      <a:pPr marL="0" indent="0" algn="ctr">
-                        <a:buNone/>
-                      </a:pPr>
-                      <a:r>
-                        <a:rPr lang="en-US" sz="1100" dirty="0">
-                          <a:solidFill>
-                            <a:srgbClr val="1E293B"/>
-                          </a:solidFill>
-                          <a:latin typeface="Calibri" pitchFamily="34" charset="0"/>
-                          <a:ea typeface="Calibri" pitchFamily="34" charset="-122"/>
-                          <a:cs typeface="Calibri" pitchFamily="34" charset="-120"/>
-                        </a:rPr>
-                        <a:t>14</a:t>
-                      </a:r>
-                      <a:endParaRPr lang="en-US" sz="1100" dirty="0">
-                        <a:latin typeface="Calibri" charset="0"/>
-                        <a:ea typeface="Calibri" charset="0"/>
-                        <a:cs typeface="Calibri" charset="0"/>
-                      </a:endParaRPr>
-                    </a:p>
-                  </a:txBody>
-                  <a:tcPr>
-                    <a:lnL w="5080" cap="flat" cmpd="sng" algn="ctr">
-                      <a:solidFill>
-                        <a:srgbClr val="E2E8F0"/>
-                      </a:solidFill>
-                      <a:prstDash val="solid"/>
-                      <a:round/>
-                      <a:headEnd type="none" w="med" len="med"/>
-                      <a:tailEnd type="none" w="med" len="med"/>
-                    </a:lnL>
-                    <a:lnR w="5080" cap="flat" cmpd="sng" algn="ctr">
-                      <a:solidFill>
-                        <a:srgbClr val="E2E8F0"/>
-                      </a:solidFill>
-                      <a:prstDash val="solid"/>
-                      <a:round/>
-                      <a:headEnd type="none" w="med" len="med"/>
-                      <a:tailEnd type="none" w="med" len="med"/>
-                    </a:lnR>
-                    <a:lnT w="5080" cap="flat" cmpd="sng" algn="ctr">
-                      <a:solidFill>
-                        <a:srgbClr val="E2E8F0"/>
-                      </a:solidFill>
-                      <a:prstDash val="solid"/>
-                      <a:round/>
-                      <a:headEnd type="none" w="med" len="med"/>
-                      <a:tailEnd type="none" w="med" len="med"/>
-                    </a:lnT>
-                    <a:lnB w="5080" cap="flat" cmpd="sng" algn="ctr">
-                      <a:solidFill>
-                        <a:srgbClr val="E2E8F0"/>
-                      </a:solidFill>
-                      <a:prstDash val="solid"/>
-                      <a:round/>
-                      <a:headEnd type="none" w="med" len="med"/>
-                      <a:tailEnd type="none" w="med" len="med"/>
-                    </a:lnB>
-                    <a:solidFill>
-                      <a:srgbClr val="FFFFFF"/>
-                    </a:solidFill>
-                  </a:tcPr>
-                </a:tc>
-                <a:tc>
-                  <a:txBody>
-                    <a:bodyPr/>
-                    <a:lstStyle/>
-                    <a:p>
-                      <a:pPr marL="0" indent="0" algn="ctr">
-                        <a:buNone/>
-                      </a:pPr>
-                      <a:r>
-                        <a:rPr lang="en-US" sz="1100" dirty="0">
-                          <a:solidFill>
-                            <a:srgbClr val="1E293B"/>
-                          </a:solidFill>
-                          <a:latin typeface="Calibri" pitchFamily="34" charset="0"/>
-                          <a:ea typeface="Calibri" pitchFamily="34" charset="-122"/>
-                          <a:cs typeface="Calibri" pitchFamily="34" charset="-120"/>
-                        </a:rPr>
-                        <a:t>14</a:t>
-                      </a:r>
-                      <a:endParaRPr lang="en-US" sz="1100" dirty="0">
-                        <a:latin typeface="Calibri" charset="0"/>
-                        <a:ea typeface="Calibri" charset="0"/>
-                        <a:cs typeface="Calibri" charset="0"/>
-                      </a:endParaRPr>
-                    </a:p>
-                  </a:txBody>
-                  <a:tcPr>
-                    <a:lnL w="5080" cap="flat" cmpd="sng" algn="ctr">
-                      <a:solidFill>
-                        <a:srgbClr val="E2E8F0"/>
-                      </a:solidFill>
-                      <a:prstDash val="solid"/>
-                      <a:round/>
-                      <a:headEnd type="none" w="med" len="med"/>
-                      <a:tailEnd type="none" w="med" len="med"/>
-                    </a:lnL>
-                    <a:lnR w="5080" cap="flat" cmpd="sng" algn="ctr">
-                      <a:solidFill>
-                        <a:srgbClr val="E2E8F0"/>
-                      </a:solidFill>
-                      <a:prstDash val="solid"/>
-                      <a:round/>
-                      <a:headEnd type="none" w="med" len="med"/>
-                      <a:tailEnd type="none" w="med" len="med"/>
-                    </a:lnR>
-                    <a:lnT w="5080" cap="flat" cmpd="sng" algn="ctr">
-                      <a:solidFill>
-                        <a:srgbClr val="E2E8F0"/>
-                      </a:solidFill>
-                      <a:prstDash val="solid"/>
-                      <a:round/>
-                      <a:headEnd type="none" w="med" len="med"/>
-                      <a:tailEnd type="none" w="med" len="med"/>
-                    </a:lnT>
-                    <a:lnB w="5080" cap="flat" cmpd="sng" algn="ctr">
-                      <a:solidFill>
-                        <a:srgbClr val="E2E8F0"/>
-                      </a:solidFill>
-                      <a:prstDash val="solid"/>
-                      <a:round/>
-                      <a:headEnd type="none" w="med" len="med"/>
-                      <a:tailEnd type="none" w="med" len="med"/>
-                    </a:lnB>
-                    <a:solidFill>
-                      <a:srgbClr val="FFFFFF"/>
-                    </a:solidFill>
-                  </a:tcPr>
-                </a:tc>
-                <a:extLst>
-                  <a:ext uri="{0D108BD9-81ED-4DB2-BD59-A6C34878D82A}">
-                    <a16:rowId xmlns:a16="http://schemas.microsoft.com/office/drawing/2014/main" val="10001"/>
-                  </a:ext>
-                </a:extLst>
-              </a:tr>
-              <a:tr h="326571">
-                <a:tc>
-                  <a:txBody>
-                    <a:bodyPr/>
-                    <a:lstStyle/>
-                    <a:p>
-                      <a:pPr marL="0" indent="0">
-                        <a:buNone/>
-                      </a:pPr>
-                      <a:r>
-                        <a:rPr lang="en-US" sz="1100" dirty="0">
-                          <a:solidFill>
-                            <a:srgbClr val="1E293B"/>
-                          </a:solidFill>
-                          <a:latin typeface="Calibri" pitchFamily="34" charset="0"/>
-                          <a:ea typeface="Calibri" pitchFamily="34" charset="-122"/>
-                          <a:cs typeface="Calibri" pitchFamily="34" charset="-120"/>
-                        </a:rPr>
-                        <a:t>Mean</a:t>
-                      </a:r>
-                      <a:endParaRPr lang="en-US" sz="1100" dirty="0">
-                        <a:latin typeface="Calibri" charset="0"/>
-                        <a:ea typeface="Calibri" charset="0"/>
-                        <a:cs typeface="Calibri" charset="0"/>
-                      </a:endParaRPr>
-                    </a:p>
-                  </a:txBody>
-                  <a:tcPr>
-                    <a:lnL w="5080" cap="flat" cmpd="sng" algn="ctr">
-                      <a:solidFill>
-                        <a:srgbClr val="E2E8F0"/>
-                      </a:solidFill>
-                      <a:prstDash val="solid"/>
-                      <a:round/>
-                      <a:headEnd type="none" w="med" len="med"/>
-                      <a:tailEnd type="none" w="med" len="med"/>
-                    </a:lnL>
-                    <a:lnR w="5080" cap="flat" cmpd="sng" algn="ctr">
-                      <a:solidFill>
-                        <a:srgbClr val="E2E8F0"/>
-                      </a:solidFill>
-                      <a:prstDash val="solid"/>
-                      <a:round/>
-                      <a:headEnd type="none" w="med" len="med"/>
-                      <a:tailEnd type="none" w="med" len="med"/>
-                    </a:lnR>
-                    <a:lnT w="5080" cap="flat" cmpd="sng" algn="ctr">
-                      <a:solidFill>
-                        <a:srgbClr val="E2E8F0"/>
-                      </a:solidFill>
-                      <a:prstDash val="solid"/>
-                      <a:round/>
-                      <a:headEnd type="none" w="med" len="med"/>
-                      <a:tailEnd type="none" w="med" len="med"/>
-                    </a:lnT>
-                    <a:lnB w="5080" cap="flat" cmpd="sng" algn="ctr">
-                      <a:solidFill>
-                        <a:srgbClr val="E2E8F0"/>
-                      </a:solidFill>
-                      <a:prstDash val="solid"/>
-                      <a:round/>
-                      <a:headEnd type="none" w="med" len="med"/>
-                      <a:tailEnd type="none" w="med" len="med"/>
-                    </a:lnB>
-                    <a:solidFill>
-                      <a:srgbClr val="EBF3FB"/>
-                    </a:solidFill>
-                  </a:tcPr>
-                </a:tc>
-                <a:tc>
-                  <a:txBody>
-                    <a:bodyPr/>
-                    <a:lstStyle/>
-                    <a:p>
-                      <a:pPr marL="0" indent="0" algn="ctr">
-                        <a:buNone/>
-                      </a:pPr>
-                      <a:r>
-                        <a:rPr lang="en-US" sz="1100" dirty="0">
-                          <a:solidFill>
-                            <a:srgbClr val="1E293B"/>
-                          </a:solidFill>
-                          <a:latin typeface="Calibri" pitchFamily="34" charset="0"/>
-                          <a:ea typeface="Calibri" pitchFamily="34" charset="-122"/>
-                          <a:cs typeface="Calibri" pitchFamily="34" charset="-120"/>
-                        </a:rPr>
-                        <a:t>14.59%</a:t>
-                      </a:r>
-                      <a:endParaRPr lang="en-US" sz="1100" dirty="0">
-                        <a:latin typeface="Calibri" charset="0"/>
-                        <a:ea typeface="Calibri" charset="0"/>
-                        <a:cs typeface="Calibri" charset="0"/>
-                      </a:endParaRPr>
-                    </a:p>
-                  </a:txBody>
-                  <a:tcPr>
-                    <a:lnL w="5080" cap="flat" cmpd="sng" algn="ctr">
-                      <a:solidFill>
-                        <a:srgbClr val="E2E8F0"/>
-                      </a:solidFill>
-                      <a:prstDash val="solid"/>
-                      <a:round/>
-                      <a:headEnd type="none" w="med" len="med"/>
-                      <a:tailEnd type="none" w="med" len="med"/>
-                    </a:lnL>
-                    <a:lnR w="5080" cap="flat" cmpd="sng" algn="ctr">
-                      <a:solidFill>
-                        <a:srgbClr val="E2E8F0"/>
-                      </a:solidFill>
-                      <a:prstDash val="solid"/>
-                      <a:round/>
-                      <a:headEnd type="none" w="med" len="med"/>
-                      <a:tailEnd type="none" w="med" len="med"/>
-                    </a:lnR>
-                    <a:lnT w="5080" cap="flat" cmpd="sng" algn="ctr">
-                      <a:solidFill>
-                        <a:srgbClr val="E2E8F0"/>
-                      </a:solidFill>
-                      <a:prstDash val="solid"/>
-                      <a:round/>
-                      <a:headEnd type="none" w="med" len="med"/>
-                      <a:tailEnd type="none" w="med" len="med"/>
-                    </a:lnT>
-                    <a:lnB w="5080" cap="flat" cmpd="sng" algn="ctr">
-                      <a:solidFill>
-                        <a:srgbClr val="E2E8F0"/>
-                      </a:solidFill>
-                      <a:prstDash val="solid"/>
-                      <a:round/>
-                      <a:headEnd type="none" w="med" len="med"/>
-                      <a:tailEnd type="none" w="med" len="med"/>
-                    </a:lnB>
-                    <a:solidFill>
-                      <a:srgbClr val="EBF3FB"/>
-                    </a:solidFill>
-                  </a:tcPr>
-                </a:tc>
-                <a:tc>
-                  <a:txBody>
-                    <a:bodyPr/>
-                    <a:lstStyle/>
-                    <a:p>
-                      <a:pPr marL="0" indent="0" algn="ctr">
-                        <a:buNone/>
-                      </a:pPr>
-                      <a:r>
-                        <a:rPr lang="en-US" sz="1100" dirty="0">
-                          <a:solidFill>
-                            <a:srgbClr val="1E293B"/>
-                          </a:solidFill>
-                          <a:latin typeface="Calibri" pitchFamily="34" charset="0"/>
-                          <a:ea typeface="Calibri" pitchFamily="34" charset="-122"/>
-                          <a:cs typeface="Calibri" pitchFamily="34" charset="-120"/>
-                        </a:rPr>
-                        <a:t>16.19%</a:t>
-                      </a:r>
-                      <a:endParaRPr lang="en-US" sz="1100" dirty="0">
-                        <a:latin typeface="Calibri" charset="0"/>
-                        <a:ea typeface="Calibri" charset="0"/>
-                        <a:cs typeface="Calibri" charset="0"/>
-                      </a:endParaRPr>
-                    </a:p>
-                  </a:txBody>
-                  <a:tcPr>
-                    <a:lnL w="5080" cap="flat" cmpd="sng" algn="ctr">
-                      <a:solidFill>
-                        <a:srgbClr val="E2E8F0"/>
-                      </a:solidFill>
-                      <a:prstDash val="solid"/>
-                      <a:round/>
-                      <a:headEnd type="none" w="med" len="med"/>
-                      <a:tailEnd type="none" w="med" len="med"/>
-                    </a:lnL>
-                    <a:lnR w="5080" cap="flat" cmpd="sng" algn="ctr">
-                      <a:solidFill>
-                        <a:srgbClr val="E2E8F0"/>
-                      </a:solidFill>
-                      <a:prstDash val="solid"/>
-                      <a:round/>
-                      <a:headEnd type="none" w="med" len="med"/>
-                      <a:tailEnd type="none" w="med" len="med"/>
-                    </a:lnR>
-                    <a:lnT w="5080" cap="flat" cmpd="sng" algn="ctr">
-                      <a:solidFill>
-                        <a:srgbClr val="E2E8F0"/>
-                      </a:solidFill>
-                      <a:prstDash val="solid"/>
-                      <a:round/>
-                      <a:headEnd type="none" w="med" len="med"/>
-                      <a:tailEnd type="none" w="med" len="med"/>
-                    </a:lnT>
-                    <a:lnB w="5080" cap="flat" cmpd="sng" algn="ctr">
-                      <a:solidFill>
-                        <a:srgbClr val="E2E8F0"/>
-                      </a:solidFill>
-                      <a:prstDash val="solid"/>
-                      <a:round/>
-                      <a:headEnd type="none" w="med" len="med"/>
-                      <a:tailEnd type="none" w="med" len="med"/>
-                    </a:lnB>
-                    <a:solidFill>
-                      <a:srgbClr val="EBF3FB"/>
-                    </a:solidFill>
-                  </a:tcPr>
-                </a:tc>
-                <a:extLst>
-                  <a:ext uri="{0D108BD9-81ED-4DB2-BD59-A6C34878D82A}">
-                    <a16:rowId xmlns:a16="http://schemas.microsoft.com/office/drawing/2014/main" val="10002"/>
-                  </a:ext>
-                </a:extLst>
-              </a:tr>
-              <a:tr h="326571">
-                <a:tc>
-                  <a:txBody>
-                    <a:bodyPr/>
-                    <a:lstStyle/>
-                    <a:p>
-                      <a:pPr marL="0" indent="0">
-                        <a:buNone/>
-                      </a:pPr>
-                      <a:r>
-                        <a:rPr lang="en-US" sz="1100" dirty="0">
-                          <a:solidFill>
-                            <a:srgbClr val="1E293B"/>
-                          </a:solidFill>
-                          <a:latin typeface="Calibri" pitchFamily="34" charset="0"/>
-                          <a:ea typeface="Calibri" pitchFamily="34" charset="-122"/>
-                          <a:cs typeface="Calibri" pitchFamily="34" charset="-120"/>
-                        </a:rPr>
-                        <a:t>Median</a:t>
-                      </a:r>
-                      <a:endParaRPr lang="en-US" sz="1100" dirty="0">
-                        <a:latin typeface="Calibri" charset="0"/>
-                        <a:ea typeface="Calibri" charset="0"/>
-                        <a:cs typeface="Calibri" charset="0"/>
-                      </a:endParaRPr>
-                    </a:p>
-                  </a:txBody>
-                  <a:tcPr>
-                    <a:lnL w="5080" cap="flat" cmpd="sng" algn="ctr">
-                      <a:solidFill>
-                        <a:srgbClr val="E2E8F0"/>
-                      </a:solidFill>
-                      <a:prstDash val="solid"/>
-                      <a:round/>
-                      <a:headEnd type="none" w="med" len="med"/>
-                      <a:tailEnd type="none" w="med" len="med"/>
-                    </a:lnL>
-                    <a:lnR w="5080" cap="flat" cmpd="sng" algn="ctr">
-                      <a:solidFill>
-                        <a:srgbClr val="E2E8F0"/>
-                      </a:solidFill>
-                      <a:prstDash val="solid"/>
-                      <a:round/>
-                      <a:headEnd type="none" w="med" len="med"/>
-                      <a:tailEnd type="none" w="med" len="med"/>
-                    </a:lnR>
-                    <a:lnT w="5080" cap="flat" cmpd="sng" algn="ctr">
-                      <a:solidFill>
-                        <a:srgbClr val="E2E8F0"/>
-                      </a:solidFill>
-                      <a:prstDash val="solid"/>
-                      <a:round/>
-                      <a:headEnd type="none" w="med" len="med"/>
-                      <a:tailEnd type="none" w="med" len="med"/>
-                    </a:lnT>
-                    <a:lnB w="5080" cap="flat" cmpd="sng" algn="ctr">
-                      <a:solidFill>
-                        <a:srgbClr val="E2E8F0"/>
-                      </a:solidFill>
-                      <a:prstDash val="solid"/>
-                      <a:round/>
-                      <a:headEnd type="none" w="med" len="med"/>
-                      <a:tailEnd type="none" w="med" len="med"/>
-                    </a:lnB>
-                    <a:solidFill>
-                      <a:srgbClr val="FFFFFF"/>
-                    </a:solidFill>
-                  </a:tcPr>
-                </a:tc>
-                <a:tc>
-                  <a:txBody>
-                    <a:bodyPr/>
-                    <a:lstStyle/>
-                    <a:p>
-                      <a:pPr marL="0" indent="0" algn="ctr">
-                        <a:buNone/>
-                      </a:pPr>
-                      <a:r>
-                        <a:rPr lang="en-US" sz="1100" dirty="0">
-                          <a:solidFill>
-                            <a:srgbClr val="1E293B"/>
-                          </a:solidFill>
-                          <a:latin typeface="Calibri" pitchFamily="34" charset="0"/>
-                          <a:ea typeface="Calibri" pitchFamily="34" charset="-122"/>
-                          <a:cs typeface="Calibri" pitchFamily="34" charset="-120"/>
-                        </a:rPr>
-                        <a:t>3.02%</a:t>
-                      </a:r>
-                      <a:endParaRPr lang="en-US" sz="1100" dirty="0">
-                        <a:latin typeface="Calibri" charset="0"/>
-                        <a:ea typeface="Calibri" charset="0"/>
-                        <a:cs typeface="Calibri" charset="0"/>
-                      </a:endParaRPr>
-                    </a:p>
-                  </a:txBody>
-                  <a:tcPr>
-                    <a:lnL w="5080" cap="flat" cmpd="sng" algn="ctr">
-                      <a:solidFill>
-                        <a:srgbClr val="E2E8F0"/>
-                      </a:solidFill>
-                      <a:prstDash val="solid"/>
-                      <a:round/>
-                      <a:headEnd type="none" w="med" len="med"/>
-                      <a:tailEnd type="none" w="med" len="med"/>
-                    </a:lnL>
-                    <a:lnR w="5080" cap="flat" cmpd="sng" algn="ctr">
-                      <a:solidFill>
-                        <a:srgbClr val="E2E8F0"/>
-                      </a:solidFill>
-                      <a:prstDash val="solid"/>
-                      <a:round/>
-                      <a:headEnd type="none" w="med" len="med"/>
-                      <a:tailEnd type="none" w="med" len="med"/>
-                    </a:lnR>
-                    <a:lnT w="5080" cap="flat" cmpd="sng" algn="ctr">
-                      <a:solidFill>
-                        <a:srgbClr val="E2E8F0"/>
-                      </a:solidFill>
-                      <a:prstDash val="solid"/>
-                      <a:round/>
-                      <a:headEnd type="none" w="med" len="med"/>
-                      <a:tailEnd type="none" w="med" len="med"/>
-                    </a:lnT>
-                    <a:lnB w="5080" cap="flat" cmpd="sng" algn="ctr">
-                      <a:solidFill>
-                        <a:srgbClr val="E2E8F0"/>
-                      </a:solidFill>
-                      <a:prstDash val="solid"/>
-                      <a:round/>
-                      <a:headEnd type="none" w="med" len="med"/>
-                      <a:tailEnd type="none" w="med" len="med"/>
-                    </a:lnB>
-                    <a:solidFill>
-                      <a:srgbClr val="FFFFFF"/>
-                    </a:solidFill>
-                  </a:tcPr>
-                </a:tc>
-                <a:tc>
-                  <a:txBody>
-                    <a:bodyPr/>
-                    <a:lstStyle/>
-                    <a:p>
-                      <a:pPr marL="0" indent="0" algn="ctr">
-                        <a:buNone/>
-                      </a:pPr>
-                      <a:r>
-                        <a:rPr lang="en-US" sz="1100" dirty="0">
-                          <a:solidFill>
-                            <a:srgbClr val="1E293B"/>
-                          </a:solidFill>
-                          <a:latin typeface="Calibri" pitchFamily="34" charset="0"/>
-                          <a:ea typeface="Calibri" pitchFamily="34" charset="-122"/>
-                          <a:cs typeface="Calibri" pitchFamily="34" charset="-120"/>
-                        </a:rPr>
-                        <a:t>18.35%</a:t>
-                      </a:r>
-                      <a:endParaRPr lang="en-US" sz="1100" dirty="0">
-                        <a:latin typeface="Calibri" charset="0"/>
-                        <a:ea typeface="Calibri" charset="0"/>
-                        <a:cs typeface="Calibri" charset="0"/>
-                      </a:endParaRPr>
-                    </a:p>
-                  </a:txBody>
-                  <a:tcPr>
-                    <a:lnL w="5080" cap="flat" cmpd="sng" algn="ctr">
-                      <a:solidFill>
-                        <a:srgbClr val="E2E8F0"/>
-                      </a:solidFill>
-                      <a:prstDash val="solid"/>
-                      <a:round/>
-                      <a:headEnd type="none" w="med" len="med"/>
-                      <a:tailEnd type="none" w="med" len="med"/>
-                    </a:lnL>
-                    <a:lnR w="5080" cap="flat" cmpd="sng" algn="ctr">
-                      <a:solidFill>
-                        <a:srgbClr val="E2E8F0"/>
-                      </a:solidFill>
-                      <a:prstDash val="solid"/>
-                      <a:round/>
-                      <a:headEnd type="none" w="med" len="med"/>
-                      <a:tailEnd type="none" w="med" len="med"/>
-                    </a:lnR>
-                    <a:lnT w="5080" cap="flat" cmpd="sng" algn="ctr">
-                      <a:solidFill>
-                        <a:srgbClr val="E2E8F0"/>
-                      </a:solidFill>
-                      <a:prstDash val="solid"/>
-                      <a:round/>
-                      <a:headEnd type="none" w="med" len="med"/>
-                      <a:tailEnd type="none" w="med" len="med"/>
-                    </a:lnT>
-                    <a:lnB w="5080" cap="flat" cmpd="sng" algn="ctr">
-                      <a:solidFill>
-                        <a:srgbClr val="E2E8F0"/>
-                      </a:solidFill>
-                      <a:prstDash val="solid"/>
-                      <a:round/>
-                      <a:headEnd type="none" w="med" len="med"/>
-                      <a:tailEnd type="none" w="med" len="med"/>
-                    </a:lnB>
-                    <a:solidFill>
-                      <a:srgbClr val="FFFFFF"/>
-                    </a:solidFill>
-                  </a:tcPr>
-                </a:tc>
-                <a:extLst>
-                  <a:ext uri="{0D108BD9-81ED-4DB2-BD59-A6C34878D82A}">
-                    <a16:rowId xmlns:a16="http://schemas.microsoft.com/office/drawing/2014/main" val="10003"/>
-                  </a:ext>
-                </a:extLst>
-              </a:tr>
-              <a:tr h="326571">
-                <a:tc>
-                  <a:txBody>
-                    <a:bodyPr/>
-                    <a:lstStyle/>
-                    <a:p>
-                      <a:pPr marL="0" indent="0">
-                        <a:buNone/>
-                      </a:pPr>
-                      <a:r>
-                        <a:rPr lang="en-US" sz="1100" dirty="0">
-                          <a:solidFill>
-                            <a:srgbClr val="1E293B"/>
-                          </a:solidFill>
-                          <a:latin typeface="Calibri" pitchFamily="34" charset="0"/>
-                          <a:ea typeface="Calibri" pitchFamily="34" charset="-122"/>
-                          <a:cs typeface="Calibri" pitchFamily="34" charset="-120"/>
-                        </a:rPr>
-                        <a:t>Std Dev</a:t>
-                      </a:r>
-                      <a:endParaRPr lang="en-US" sz="1100" dirty="0">
-                        <a:latin typeface="Calibri" charset="0"/>
-                        <a:ea typeface="Calibri" charset="0"/>
-                        <a:cs typeface="Calibri" charset="0"/>
-                      </a:endParaRPr>
-                    </a:p>
-                  </a:txBody>
-                  <a:tcPr>
-                    <a:lnL w="5080" cap="flat" cmpd="sng" algn="ctr">
-                      <a:solidFill>
-                        <a:srgbClr val="E2E8F0"/>
-                      </a:solidFill>
-                      <a:prstDash val="solid"/>
-                      <a:round/>
-                      <a:headEnd type="none" w="med" len="med"/>
-                      <a:tailEnd type="none" w="med" len="med"/>
-                    </a:lnL>
-                    <a:lnR w="5080" cap="flat" cmpd="sng" algn="ctr">
-                      <a:solidFill>
-                        <a:srgbClr val="E2E8F0"/>
-                      </a:solidFill>
-                      <a:prstDash val="solid"/>
-                      <a:round/>
-                      <a:headEnd type="none" w="med" len="med"/>
-                      <a:tailEnd type="none" w="med" len="med"/>
-                    </a:lnR>
-                    <a:lnT w="5080" cap="flat" cmpd="sng" algn="ctr">
-                      <a:solidFill>
-                        <a:srgbClr val="E2E8F0"/>
-                      </a:solidFill>
-                      <a:prstDash val="solid"/>
-                      <a:round/>
-                      <a:headEnd type="none" w="med" len="med"/>
-                      <a:tailEnd type="none" w="med" len="med"/>
-                    </a:lnT>
-                    <a:lnB w="5080" cap="flat" cmpd="sng" algn="ctr">
-                      <a:solidFill>
-                        <a:srgbClr val="E2E8F0"/>
-                      </a:solidFill>
-                      <a:prstDash val="solid"/>
-                      <a:round/>
-                      <a:headEnd type="none" w="med" len="med"/>
-                      <a:tailEnd type="none" w="med" len="med"/>
-                    </a:lnB>
-                    <a:solidFill>
-                      <a:srgbClr val="EBF3FB"/>
-                    </a:solidFill>
-                  </a:tcPr>
-                </a:tc>
-                <a:tc>
-                  <a:txBody>
-                    <a:bodyPr/>
-                    <a:lstStyle/>
-                    <a:p>
-                      <a:pPr marL="0" indent="0" algn="ctr">
-                        <a:buNone/>
-                      </a:pPr>
-                      <a:r>
-                        <a:rPr lang="en-US" sz="1100" dirty="0">
-                          <a:solidFill>
-                            <a:srgbClr val="1E293B"/>
-                          </a:solidFill>
-                          <a:latin typeface="Calibri" pitchFamily="34" charset="0"/>
-                          <a:ea typeface="Calibri" pitchFamily="34" charset="-122"/>
-                          <a:cs typeface="Calibri" pitchFamily="34" charset="-120"/>
-                        </a:rPr>
-                        <a:t>50.02%</a:t>
-                      </a:r>
-                      <a:endParaRPr lang="en-US" sz="1100" dirty="0">
-                        <a:latin typeface="Calibri" charset="0"/>
-                        <a:ea typeface="Calibri" charset="0"/>
-                        <a:cs typeface="Calibri" charset="0"/>
-                      </a:endParaRPr>
-                    </a:p>
-                  </a:txBody>
-                  <a:tcPr>
-                    <a:lnL w="5080" cap="flat" cmpd="sng" algn="ctr">
-                      <a:solidFill>
-                        <a:srgbClr val="E2E8F0"/>
-                      </a:solidFill>
-                      <a:prstDash val="solid"/>
-                      <a:round/>
-                      <a:headEnd type="none" w="med" len="med"/>
-                      <a:tailEnd type="none" w="med" len="med"/>
-                    </a:lnL>
-                    <a:lnR w="5080" cap="flat" cmpd="sng" algn="ctr">
-                      <a:solidFill>
-                        <a:srgbClr val="E2E8F0"/>
-                      </a:solidFill>
-                      <a:prstDash val="solid"/>
-                      <a:round/>
-                      <a:headEnd type="none" w="med" len="med"/>
-                      <a:tailEnd type="none" w="med" len="med"/>
-                    </a:lnR>
-                    <a:lnT w="5080" cap="flat" cmpd="sng" algn="ctr">
-                      <a:solidFill>
-                        <a:srgbClr val="E2E8F0"/>
-                      </a:solidFill>
-                      <a:prstDash val="solid"/>
-                      <a:round/>
-                      <a:headEnd type="none" w="med" len="med"/>
-                      <a:tailEnd type="none" w="med" len="med"/>
-                    </a:lnT>
-                    <a:lnB w="5080" cap="flat" cmpd="sng" algn="ctr">
-                      <a:solidFill>
-                        <a:srgbClr val="E2E8F0"/>
-                      </a:solidFill>
-                      <a:prstDash val="solid"/>
-                      <a:round/>
-                      <a:headEnd type="none" w="med" len="med"/>
-                      <a:tailEnd type="none" w="med" len="med"/>
-                    </a:lnB>
-                    <a:solidFill>
-                      <a:srgbClr val="EBF3FB"/>
-                    </a:solidFill>
-                  </a:tcPr>
-                </a:tc>
-                <a:tc>
-                  <a:txBody>
-                    <a:bodyPr/>
-                    <a:lstStyle/>
-                    <a:p>
-                      <a:pPr marL="0" indent="0" algn="ctr">
-                        <a:buNone/>
-                      </a:pPr>
-                      <a:r>
-                        <a:rPr lang="en-US" sz="1100" dirty="0">
-                          <a:solidFill>
-                            <a:srgbClr val="1E293B"/>
-                          </a:solidFill>
-                          <a:latin typeface="Calibri" pitchFamily="34" charset="0"/>
-                          <a:ea typeface="Calibri" pitchFamily="34" charset="-122"/>
-                          <a:cs typeface="Calibri" pitchFamily="34" charset="-120"/>
-                        </a:rPr>
-                        <a:t>15.47%</a:t>
-                      </a:r>
-                      <a:endParaRPr lang="en-US" sz="1100" dirty="0">
-                        <a:latin typeface="Calibri" charset="0"/>
-                        <a:ea typeface="Calibri" charset="0"/>
-                        <a:cs typeface="Calibri" charset="0"/>
-                      </a:endParaRPr>
-                    </a:p>
-                  </a:txBody>
-                  <a:tcPr>
-                    <a:lnL w="5080" cap="flat" cmpd="sng" algn="ctr">
-                      <a:solidFill>
-                        <a:srgbClr val="E2E8F0"/>
-                      </a:solidFill>
-                      <a:prstDash val="solid"/>
-                      <a:round/>
-                      <a:headEnd type="none" w="med" len="med"/>
-                      <a:tailEnd type="none" w="med" len="med"/>
-                    </a:lnL>
-                    <a:lnR w="5080" cap="flat" cmpd="sng" algn="ctr">
-                      <a:solidFill>
-                        <a:srgbClr val="E2E8F0"/>
-                      </a:solidFill>
-                      <a:prstDash val="solid"/>
-                      <a:round/>
-                      <a:headEnd type="none" w="med" len="med"/>
-                      <a:tailEnd type="none" w="med" len="med"/>
-                    </a:lnR>
-                    <a:lnT w="5080" cap="flat" cmpd="sng" algn="ctr">
-                      <a:solidFill>
-                        <a:srgbClr val="E2E8F0"/>
-                      </a:solidFill>
-                      <a:prstDash val="solid"/>
-                      <a:round/>
-                      <a:headEnd type="none" w="med" len="med"/>
-                      <a:tailEnd type="none" w="med" len="med"/>
-                    </a:lnT>
-                    <a:lnB w="5080" cap="flat" cmpd="sng" algn="ctr">
-                      <a:solidFill>
-                        <a:srgbClr val="E2E8F0"/>
-                      </a:solidFill>
-                      <a:prstDash val="solid"/>
-                      <a:round/>
-                      <a:headEnd type="none" w="med" len="med"/>
-                      <a:tailEnd type="none" w="med" len="med"/>
-                    </a:lnB>
-                    <a:solidFill>
-                      <a:srgbClr val="EBF3FB"/>
-                    </a:solidFill>
-                  </a:tcPr>
-                </a:tc>
-                <a:extLst>
-                  <a:ext uri="{0D108BD9-81ED-4DB2-BD59-A6C34878D82A}">
-                    <a16:rowId xmlns:a16="http://schemas.microsoft.com/office/drawing/2014/main" val="10004"/>
-                  </a:ext>
-                </a:extLst>
-              </a:tr>
-              <a:tr h="326571">
-                <a:tc>
-                  <a:txBody>
-                    <a:bodyPr/>
-                    <a:lstStyle/>
-                    <a:p>
-                      <a:pPr marL="0" indent="0">
-                        <a:buNone/>
-                      </a:pPr>
-                      <a:r>
-                        <a:rPr lang="en-US" sz="1100" dirty="0">
-                          <a:solidFill>
-                            <a:srgbClr val="1E293B"/>
-                          </a:solidFill>
-                          <a:latin typeface="Calibri" pitchFamily="34" charset="0"/>
-                          <a:ea typeface="Calibri" pitchFamily="34" charset="-122"/>
-                          <a:cs typeface="Calibri" pitchFamily="34" charset="-120"/>
-                        </a:rPr>
-                        <a:t>Min</a:t>
-                      </a:r>
-                      <a:endParaRPr lang="en-US" sz="1100" dirty="0">
-                        <a:latin typeface="Calibri" charset="0"/>
-                        <a:ea typeface="Calibri" charset="0"/>
-                        <a:cs typeface="Calibri" charset="0"/>
-                      </a:endParaRPr>
-                    </a:p>
-                  </a:txBody>
-                  <a:tcPr>
-                    <a:lnL w="5080" cap="flat" cmpd="sng" algn="ctr">
-                      <a:solidFill>
-                        <a:srgbClr val="E2E8F0"/>
-                      </a:solidFill>
-                      <a:prstDash val="solid"/>
-                      <a:round/>
-                      <a:headEnd type="none" w="med" len="med"/>
-                      <a:tailEnd type="none" w="med" len="med"/>
-                    </a:lnL>
-                    <a:lnR w="5080" cap="flat" cmpd="sng" algn="ctr">
-                      <a:solidFill>
-                        <a:srgbClr val="E2E8F0"/>
-                      </a:solidFill>
-                      <a:prstDash val="solid"/>
-                      <a:round/>
-                      <a:headEnd type="none" w="med" len="med"/>
-                      <a:tailEnd type="none" w="med" len="med"/>
-                    </a:lnR>
-                    <a:lnT w="5080" cap="flat" cmpd="sng" algn="ctr">
-                      <a:solidFill>
-                        <a:srgbClr val="E2E8F0"/>
-                      </a:solidFill>
-                      <a:prstDash val="solid"/>
-                      <a:round/>
-                      <a:headEnd type="none" w="med" len="med"/>
-                      <a:tailEnd type="none" w="med" len="med"/>
-                    </a:lnT>
-                    <a:lnB w="5080" cap="flat" cmpd="sng" algn="ctr">
-                      <a:solidFill>
-                        <a:srgbClr val="E2E8F0"/>
-                      </a:solidFill>
-                      <a:prstDash val="solid"/>
-                      <a:round/>
-                      <a:headEnd type="none" w="med" len="med"/>
-                      <a:tailEnd type="none" w="med" len="med"/>
-                    </a:lnB>
-                    <a:solidFill>
-                      <a:srgbClr val="FFFFFF"/>
-                    </a:solidFill>
-                  </a:tcPr>
-                </a:tc>
-                <a:tc>
-                  <a:txBody>
-                    <a:bodyPr/>
-                    <a:lstStyle/>
-                    <a:p>
-                      <a:pPr marL="0" indent="0" algn="ctr">
-                        <a:buNone/>
-                      </a:pPr>
-                      <a:r>
-                        <a:rPr lang="en-US" sz="1100" dirty="0">
-                          <a:solidFill>
-                            <a:srgbClr val="DC2626"/>
-                          </a:solidFill>
-                          <a:latin typeface="Calibri" pitchFamily="34" charset="0"/>
-                          <a:ea typeface="Calibri" pitchFamily="34" charset="-122"/>
-                          <a:cs typeface="Calibri" pitchFamily="34" charset="-120"/>
-                        </a:rPr>
-                        <a:t>-35.16%</a:t>
-                      </a:r>
-                      <a:endParaRPr lang="en-US" sz="1100" dirty="0">
-                        <a:latin typeface="Calibri" charset="0"/>
-                        <a:ea typeface="Calibri" charset="0"/>
-                        <a:cs typeface="Calibri" charset="0"/>
-                      </a:endParaRPr>
-                    </a:p>
-                  </a:txBody>
-                  <a:tcPr>
-                    <a:lnL w="5080" cap="flat" cmpd="sng" algn="ctr">
-                      <a:solidFill>
-                        <a:srgbClr val="E2E8F0"/>
-                      </a:solidFill>
-                      <a:prstDash val="solid"/>
-                      <a:round/>
-                      <a:headEnd type="none" w="med" len="med"/>
-                      <a:tailEnd type="none" w="med" len="med"/>
-                    </a:lnL>
-                    <a:lnR w="5080" cap="flat" cmpd="sng" algn="ctr">
-                      <a:solidFill>
-                        <a:srgbClr val="E2E8F0"/>
-                      </a:solidFill>
-                      <a:prstDash val="solid"/>
-                      <a:round/>
-                      <a:headEnd type="none" w="med" len="med"/>
-                      <a:tailEnd type="none" w="med" len="med"/>
-                    </a:lnR>
-                    <a:lnT w="5080" cap="flat" cmpd="sng" algn="ctr">
-                      <a:solidFill>
-                        <a:srgbClr val="E2E8F0"/>
-                      </a:solidFill>
-                      <a:prstDash val="solid"/>
-                      <a:round/>
-                      <a:headEnd type="none" w="med" len="med"/>
-                      <a:tailEnd type="none" w="med" len="med"/>
-                    </a:lnT>
-                    <a:lnB w="5080" cap="flat" cmpd="sng" algn="ctr">
-                      <a:solidFill>
-                        <a:srgbClr val="E2E8F0"/>
-                      </a:solidFill>
-                      <a:prstDash val="solid"/>
-                      <a:round/>
-                      <a:headEnd type="none" w="med" len="med"/>
-                      <a:tailEnd type="none" w="med" len="med"/>
-                    </a:lnB>
-                    <a:solidFill>
-                      <a:srgbClr val="FFFFFF"/>
-                    </a:solidFill>
-                  </a:tcPr>
-                </a:tc>
-                <a:tc>
-                  <a:txBody>
-                    <a:bodyPr/>
-                    <a:lstStyle/>
-                    <a:p>
-                      <a:pPr marL="0" indent="0" algn="ctr">
-                        <a:buNone/>
-                      </a:pPr>
-                      <a:r>
-                        <a:rPr lang="en-US" sz="1100" dirty="0">
-                          <a:solidFill>
-                            <a:srgbClr val="DC2626"/>
-                          </a:solidFill>
-                          <a:latin typeface="Calibri" pitchFamily="34" charset="0"/>
-                          <a:ea typeface="Calibri" pitchFamily="34" charset="-122"/>
-                          <a:cs typeface="Calibri" pitchFamily="34" charset="-120"/>
-                        </a:rPr>
-                        <a:t>-7.93%</a:t>
-                      </a:r>
-                      <a:endParaRPr lang="en-US" sz="1100" dirty="0">
-                        <a:latin typeface="Calibri" charset="0"/>
-                        <a:ea typeface="Calibri" charset="0"/>
-                        <a:cs typeface="Calibri" charset="0"/>
-                      </a:endParaRPr>
-                    </a:p>
-                  </a:txBody>
-                  <a:tcPr>
-                    <a:lnL w="5080" cap="flat" cmpd="sng" algn="ctr">
-                      <a:solidFill>
-                        <a:srgbClr val="E2E8F0"/>
-                      </a:solidFill>
-                      <a:prstDash val="solid"/>
-                      <a:round/>
-                      <a:headEnd type="none" w="med" len="med"/>
-                      <a:tailEnd type="none" w="med" len="med"/>
-                    </a:lnL>
-                    <a:lnR w="5080" cap="flat" cmpd="sng" algn="ctr">
-                      <a:solidFill>
-                        <a:srgbClr val="E2E8F0"/>
-                      </a:solidFill>
-                      <a:prstDash val="solid"/>
-                      <a:round/>
-                      <a:headEnd type="none" w="med" len="med"/>
-                      <a:tailEnd type="none" w="med" len="med"/>
-                    </a:lnR>
-                    <a:lnT w="5080" cap="flat" cmpd="sng" algn="ctr">
-                      <a:solidFill>
-                        <a:srgbClr val="E2E8F0"/>
-                      </a:solidFill>
-                      <a:prstDash val="solid"/>
-                      <a:round/>
-                      <a:headEnd type="none" w="med" len="med"/>
-                      <a:tailEnd type="none" w="med" len="med"/>
-                    </a:lnT>
-                    <a:lnB w="5080" cap="flat" cmpd="sng" algn="ctr">
-                      <a:solidFill>
-                        <a:srgbClr val="E2E8F0"/>
-                      </a:solidFill>
-                      <a:prstDash val="solid"/>
-                      <a:round/>
-                      <a:headEnd type="none" w="med" len="med"/>
-                      <a:tailEnd type="none" w="med" len="med"/>
-                    </a:lnB>
-                    <a:solidFill>
-                      <a:srgbClr val="FFFFFF"/>
-                    </a:solidFill>
-                  </a:tcPr>
-                </a:tc>
-                <a:extLst>
-                  <a:ext uri="{0D108BD9-81ED-4DB2-BD59-A6C34878D82A}">
-                    <a16:rowId xmlns:a16="http://schemas.microsoft.com/office/drawing/2014/main" val="10005"/>
-                  </a:ext>
-                </a:extLst>
-              </a:tr>
-              <a:tr h="326571">
-                <a:tc>
-                  <a:txBody>
-                    <a:bodyPr/>
-                    <a:lstStyle/>
-                    <a:p>
-                      <a:pPr marL="0" indent="0">
-                        <a:buNone/>
-                      </a:pPr>
-                      <a:r>
-                        <a:rPr lang="en-US" sz="1100" dirty="0">
-                          <a:solidFill>
-                            <a:srgbClr val="1E293B"/>
-                          </a:solidFill>
-                          <a:latin typeface="Calibri" pitchFamily="34" charset="0"/>
-                          <a:ea typeface="Calibri" pitchFamily="34" charset="-122"/>
-                          <a:cs typeface="Calibri" pitchFamily="34" charset="-120"/>
-                        </a:rPr>
-                        <a:t>Max</a:t>
-                      </a:r>
-                      <a:endParaRPr lang="en-US" sz="1100" dirty="0">
-                        <a:latin typeface="Calibri" charset="0"/>
-                        <a:ea typeface="Calibri" charset="0"/>
-                        <a:cs typeface="Calibri" charset="0"/>
-                      </a:endParaRPr>
-                    </a:p>
-                  </a:txBody>
-                  <a:tcPr>
-                    <a:lnL w="5080" cap="flat" cmpd="sng" algn="ctr">
-                      <a:solidFill>
-                        <a:srgbClr val="E2E8F0"/>
-                      </a:solidFill>
-                      <a:prstDash val="solid"/>
-                      <a:round/>
-                      <a:headEnd type="none" w="med" len="med"/>
-                      <a:tailEnd type="none" w="med" len="med"/>
-                    </a:lnL>
-                    <a:lnR w="5080" cap="flat" cmpd="sng" algn="ctr">
-                      <a:solidFill>
-                        <a:srgbClr val="E2E8F0"/>
-                      </a:solidFill>
-                      <a:prstDash val="solid"/>
-                      <a:round/>
-                      <a:headEnd type="none" w="med" len="med"/>
-                      <a:tailEnd type="none" w="med" len="med"/>
-                    </a:lnR>
-                    <a:lnT w="5080" cap="flat" cmpd="sng" algn="ctr">
-                      <a:solidFill>
-                        <a:srgbClr val="E2E8F0"/>
-                      </a:solidFill>
-                      <a:prstDash val="solid"/>
-                      <a:round/>
-                      <a:headEnd type="none" w="med" len="med"/>
-                      <a:tailEnd type="none" w="med" len="med"/>
-                    </a:lnT>
-                    <a:lnB w="5080" cap="flat" cmpd="sng" algn="ctr">
-                      <a:solidFill>
-                        <a:srgbClr val="E2E8F0"/>
-                      </a:solidFill>
-                      <a:prstDash val="solid"/>
-                      <a:round/>
-                      <a:headEnd type="none" w="med" len="med"/>
-                      <a:tailEnd type="none" w="med" len="med"/>
-                    </a:lnB>
-                    <a:solidFill>
-                      <a:srgbClr val="EBF3FB"/>
-                    </a:solidFill>
-                  </a:tcPr>
-                </a:tc>
-                <a:tc>
-                  <a:txBody>
-                    <a:bodyPr/>
-                    <a:lstStyle/>
-                    <a:p>
-                      <a:pPr marL="0" indent="0" algn="ctr">
-                        <a:buNone/>
-                      </a:pPr>
-                      <a:r>
-                        <a:rPr lang="en-US" sz="1100" dirty="0">
-                          <a:solidFill>
-                            <a:srgbClr val="16A34A"/>
-                          </a:solidFill>
-                          <a:latin typeface="Calibri" pitchFamily="34" charset="0"/>
-                          <a:ea typeface="Calibri" pitchFamily="34" charset="-122"/>
-                          <a:cs typeface="Calibri" pitchFamily="34" charset="-120"/>
-                        </a:rPr>
-                        <a:t>140.18%</a:t>
-                      </a:r>
-                      <a:endParaRPr lang="en-US" sz="1100" dirty="0">
-                        <a:latin typeface="Calibri" charset="0"/>
-                        <a:ea typeface="Calibri" charset="0"/>
-                        <a:cs typeface="Calibri" charset="0"/>
-                      </a:endParaRPr>
-                    </a:p>
-                  </a:txBody>
-                  <a:tcPr>
-                    <a:lnL w="5080" cap="flat" cmpd="sng" algn="ctr">
-                      <a:solidFill>
-                        <a:srgbClr val="E2E8F0"/>
-                      </a:solidFill>
-                      <a:prstDash val="solid"/>
-                      <a:round/>
-                      <a:headEnd type="none" w="med" len="med"/>
-                      <a:tailEnd type="none" w="med" len="med"/>
-                    </a:lnL>
-                    <a:lnR w="5080" cap="flat" cmpd="sng" algn="ctr">
-                      <a:solidFill>
-                        <a:srgbClr val="E2E8F0"/>
-                      </a:solidFill>
-                      <a:prstDash val="solid"/>
-                      <a:round/>
-                      <a:headEnd type="none" w="med" len="med"/>
-                      <a:tailEnd type="none" w="med" len="med"/>
-                    </a:lnR>
-                    <a:lnT w="5080" cap="flat" cmpd="sng" algn="ctr">
-                      <a:solidFill>
-                        <a:srgbClr val="E2E8F0"/>
-                      </a:solidFill>
-                      <a:prstDash val="solid"/>
-                      <a:round/>
-                      <a:headEnd type="none" w="med" len="med"/>
-                      <a:tailEnd type="none" w="med" len="med"/>
-                    </a:lnT>
-                    <a:lnB w="5080" cap="flat" cmpd="sng" algn="ctr">
-                      <a:solidFill>
-                        <a:srgbClr val="E2E8F0"/>
-                      </a:solidFill>
-                      <a:prstDash val="solid"/>
-                      <a:round/>
-                      <a:headEnd type="none" w="med" len="med"/>
-                      <a:tailEnd type="none" w="med" len="med"/>
-                    </a:lnB>
-                    <a:solidFill>
-                      <a:srgbClr val="EBF3FB"/>
-                    </a:solidFill>
-                  </a:tcPr>
-                </a:tc>
-                <a:tc>
-                  <a:txBody>
-                    <a:bodyPr/>
-                    <a:lstStyle/>
-                    <a:p>
-                      <a:pPr marL="0" indent="0" algn="ctr">
-                        <a:buNone/>
-                      </a:pPr>
-                      <a:r>
-                        <a:rPr lang="en-US" sz="1100" dirty="0">
-                          <a:solidFill>
-                            <a:srgbClr val="16A34A"/>
-                          </a:solidFill>
-                          <a:latin typeface="Calibri" pitchFamily="34" charset="0"/>
-                          <a:ea typeface="Calibri" pitchFamily="34" charset="-122"/>
-                          <a:cs typeface="Calibri" pitchFamily="34" charset="-120"/>
-                        </a:rPr>
-                        <a:t>43.13%</a:t>
-                      </a:r>
-                      <a:endParaRPr lang="en-US" sz="1100" dirty="0">
-                        <a:latin typeface="Calibri" charset="0"/>
-                        <a:ea typeface="Calibri" charset="0"/>
-                        <a:cs typeface="Calibri" charset="0"/>
-                      </a:endParaRPr>
-                    </a:p>
-                  </a:txBody>
-                  <a:tcPr>
-                    <a:lnL w="5080" cap="flat" cmpd="sng" algn="ctr">
-                      <a:solidFill>
-                        <a:srgbClr val="E2E8F0"/>
-                      </a:solidFill>
-                      <a:prstDash val="solid"/>
-                      <a:round/>
-                      <a:headEnd type="none" w="med" len="med"/>
-                      <a:tailEnd type="none" w="med" len="med"/>
-                    </a:lnL>
-                    <a:lnR w="5080" cap="flat" cmpd="sng" algn="ctr">
-                      <a:solidFill>
-                        <a:srgbClr val="E2E8F0"/>
-                      </a:solidFill>
-                      <a:prstDash val="solid"/>
-                      <a:round/>
-                      <a:headEnd type="none" w="med" len="med"/>
-                      <a:tailEnd type="none" w="med" len="med"/>
-                    </a:lnR>
-                    <a:lnT w="5080" cap="flat" cmpd="sng" algn="ctr">
-                      <a:solidFill>
-                        <a:srgbClr val="E2E8F0"/>
-                      </a:solidFill>
-                      <a:prstDash val="solid"/>
-                      <a:round/>
-                      <a:headEnd type="none" w="med" len="med"/>
-                      <a:tailEnd type="none" w="med" len="med"/>
-                    </a:lnT>
-                    <a:lnB w="5080" cap="flat" cmpd="sng" algn="ctr">
-                      <a:solidFill>
-                        <a:srgbClr val="E2E8F0"/>
-                      </a:solidFill>
-                      <a:prstDash val="solid"/>
-                      <a:round/>
-                      <a:headEnd type="none" w="med" len="med"/>
-                      <a:tailEnd type="none" w="med" len="med"/>
-                    </a:lnB>
-                    <a:solidFill>
-                      <a:srgbClr val="EBF3FB"/>
-                    </a:solidFill>
-                  </a:tcPr>
-                </a:tc>
-                <a:extLst>
-                  <a:ext uri="{0D108BD9-81ED-4DB2-BD59-A6C34878D82A}">
-                    <a16:rowId xmlns:a16="http://schemas.microsoft.com/office/drawing/2014/main" val="10006"/>
-                  </a:ext>
-                </a:extLst>
-              </a:tr>
-            </a:tbl>
-          </a:graphicData>
-        </a:graphic>
-      </p:graphicFrame>
-      <p:sp>
-        <p:nvSpPr>
-          <p:cNvPr id="6" name="Text 3"/>
-          <p:cNvSpPr/>
-          <p:nvPr/>
-        </p:nvSpPr>
-        <p:spPr>
-          <a:xfrm>
-            <a:off x="3749040" y="777240"/>
-            <a:ext cx="5120640" cy="274320"/>
-          </a:xfrm>
-          <a:prstGeom prst="rect">
-            <a:avLst/>
-          </a:prstGeom>
-          <a:noFill/>
-          <a:ln/>
-        </p:spPr>
-        <p:txBody>
-          <a:bodyPr wrap="square" rtlCol="0" anchor="ctr"/>
-          <a:lstStyle/>
-          <a:p>
-            <a:pPr marL="0" indent="0">
-              <a:buNone/>
-            </a:pPr>
-            <a:r>
-              <a:rPr lang="en-US" sz="1200" b="1" dirty="0">
-                <a:solidFill>
-                  <a:srgbClr val="1A2F5A"/>
-                </a:solidFill>
-                <a:latin typeface="Calibri" pitchFamily="34" charset="0"/>
-                <a:ea typeface="Calibri" pitchFamily="34" charset="-122"/>
-                <a:cs typeface="Calibri" pitchFamily="34" charset="-120"/>
-              </a:rPr>
-              <a:t>Statistical Tests</a:t>
-            </a:r>
-            <a:endParaRPr lang="en-US" sz="1200" dirty="0"/>
-          </a:p>
-        </p:txBody>
-      </p:sp>
-      <p:sp>
-        <p:nvSpPr>
-          <p:cNvPr id="7" name="Shape 4"/>
-          <p:cNvSpPr/>
-          <p:nvPr/>
-        </p:nvSpPr>
-        <p:spPr>
-          <a:xfrm>
-            <a:off x="3749040" y="1097280"/>
-            <a:ext cx="5120640" cy="1005840"/>
-          </a:xfrm>
-          <a:prstGeom prst="rect">
-            <a:avLst/>
-          </a:prstGeom>
-          <a:solidFill>
-            <a:srgbClr val="FFF7ED"/>
-          </a:solidFill>
-          <a:ln w="12700">
-            <a:solidFill>
-              <a:srgbClr val="E2E8F0"/>
-            </a:solidFill>
-            <a:prstDash val="solid"/>
-          </a:ln>
-          <a:effectLst>
-            <a:outerShdw blurRad="38100" dist="12700" dir="8100000" algn="bl" rotWithShape="0">
-              <a:srgbClr val="000000">
-                <a:alpha val="7000"/>
-              </a:srgbClr>
-            </a:outerShdw>
-          </a:effectLst>
-        </p:spPr>
-      </p:sp>
-      <p:sp>
-        <p:nvSpPr>
-          <p:cNvPr id="5" name="Text 5"/>
-          <p:cNvSpPr/>
-          <p:nvPr/>
-        </p:nvSpPr>
-        <p:spPr>
-          <a:xfrm>
-            <a:off x="3858768" y="1143000"/>
-            <a:ext cx="3200400" cy="256032"/>
-          </a:xfrm>
-          <a:prstGeom prst="rect">
-            <a:avLst/>
-          </a:prstGeom>
-          <a:noFill/>
-          <a:ln/>
-        </p:spPr>
-        <p:txBody>
-          <a:bodyPr wrap="square" rtlCol="0" anchor="ctr"/>
-          <a:lstStyle/>
-          <a:p>
-            <a:pPr marL="0" indent="0">
-              <a:buNone/>
-            </a:pPr>
-            <a:r>
-              <a:rPr lang="en-US" sz="1100" b="1" dirty="0">
-                <a:solidFill>
-                  <a:srgbClr val="1A2F5A"/>
-                </a:solidFill>
-                <a:latin typeface="Calibri" pitchFamily="34" charset="0"/>
-                <a:ea typeface="Calibri" pitchFamily="34" charset="-122"/>
-                <a:cs typeface="Calibri" pitchFamily="34" charset="-120"/>
-              </a:rPr>
-              <a:t>Welch t-test (one-tailed)</a:t>
-            </a:r>
-            <a:endParaRPr lang="en-US" sz="1100" dirty="0"/>
-          </a:p>
-        </p:txBody>
-      </p:sp>
-      <p:sp>
-        <p:nvSpPr>
-          <p:cNvPr id="9" name="Text 6"/>
-          <p:cNvSpPr/>
-          <p:nvPr/>
-        </p:nvSpPr>
-        <p:spPr>
-          <a:xfrm>
-            <a:off x="3858768" y="1389888"/>
-            <a:ext cx="3017520" cy="502920"/>
-          </a:xfrm>
-          <a:prstGeom prst="rect">
-            <a:avLst/>
-          </a:prstGeom>
-          <a:noFill/>
-          <a:ln/>
-        </p:spPr>
-        <p:txBody>
-          <a:bodyPr wrap="square" rtlCol="0" anchor="ctr"/>
-          <a:lstStyle/>
-          <a:p>
-            <a:pPr marL="0" indent="0">
-              <a:buNone/>
-            </a:pPr>
-            <a:r>
-              <a:rPr lang="en-US" sz="950" dirty="0">
-                <a:solidFill>
-                  <a:srgbClr val="64748B"/>
-                </a:solidFill>
-                <a:latin typeface="Calibri" pitchFamily="34" charset="0"/>
-                <a:ea typeface="Calibri" pitchFamily="34" charset="-122"/>
-                <a:cs typeface="Calibri" pitchFamily="34" charset="-120"/>
-              </a:rPr>
-              <a:t>H₀: mean growth Non-CIS ≤ CIS   ·   t-statistic = 0.1141   ·   p (two-tailed) = 0.9107   ·   p (one-tailed) = 0.4553</a:t>
-            </a:r>
-            <a:endParaRPr lang="en-US" sz="950" dirty="0"/>
-          </a:p>
-        </p:txBody>
-      </p:sp>
-      <p:sp>
-        <p:nvSpPr>
-          <p:cNvPr id="10" name="Shape 7"/>
-          <p:cNvSpPr/>
-          <p:nvPr/>
-        </p:nvSpPr>
-        <p:spPr>
-          <a:xfrm>
-            <a:off x="6995160" y="1234440"/>
-            <a:ext cx="1737360" cy="685800"/>
-          </a:xfrm>
-          <a:prstGeom prst="rect">
-            <a:avLst/>
-          </a:prstGeom>
-          <a:solidFill>
-            <a:srgbClr val="D97706"/>
-          </a:solidFill>
-          <a:ln w="12700">
-            <a:solidFill>
-              <a:srgbClr val="D97706"/>
-            </a:solidFill>
-            <a:prstDash val="solid"/>
-          </a:ln>
-        </p:spPr>
-      </p:sp>
-      <p:sp>
-        <p:nvSpPr>
-          <p:cNvPr id="11" name="Text 8"/>
-          <p:cNvSpPr/>
-          <p:nvPr/>
-        </p:nvSpPr>
-        <p:spPr>
-          <a:xfrm>
-            <a:off x="6995160" y="1234440"/>
-            <a:ext cx="1737360" cy="685800"/>
-          </a:xfrm>
-          <a:prstGeom prst="rect">
-            <a:avLst/>
-          </a:prstGeom>
-          <a:noFill/>
-          <a:ln/>
-        </p:spPr>
-        <p:txBody>
-          <a:bodyPr wrap="square" rtlCol="0" anchor="ctr"/>
-          <a:lstStyle/>
-          <a:p>
-            <a:pPr marL="0" indent="0" algn="ctr">
-              <a:buNone/>
-            </a:pPr>
-            <a:r>
-              <a:rPr lang="en-US" sz="1000" b="1" dirty="0">
-                <a:solidFill>
-                  <a:srgbClr val="FFFFFF"/>
-                </a:solidFill>
-                <a:latin typeface="Calibri" pitchFamily="34" charset="0"/>
-                <a:ea typeface="Calibri" pitchFamily="34" charset="-122"/>
-                <a:cs typeface="Calibri" pitchFamily="34" charset="-120"/>
-              </a:rPr>
-              <a:t>FAIL TO REJECT H₀</a:t>
-            </a:r>
-            <a:endParaRPr lang="en-US" sz="1000" dirty="0"/>
-          </a:p>
-        </p:txBody>
-      </p:sp>
-      <p:sp>
-        <p:nvSpPr>
-          <p:cNvPr id="12" name="Shape 9"/>
-          <p:cNvSpPr/>
-          <p:nvPr/>
-        </p:nvSpPr>
-        <p:spPr>
-          <a:xfrm>
-            <a:off x="3749040" y="2194560"/>
-            <a:ext cx="5120640" cy="1005840"/>
-          </a:xfrm>
-          <a:prstGeom prst="rect">
-            <a:avLst/>
-          </a:prstGeom>
-          <a:solidFill>
-            <a:srgbClr val="F0FDF4"/>
-          </a:solidFill>
-          <a:ln w="12700">
-            <a:solidFill>
-              <a:srgbClr val="E2E8F0"/>
-            </a:solidFill>
-            <a:prstDash val="solid"/>
-          </a:ln>
-          <a:effectLst>
-            <a:outerShdw blurRad="38100" dist="12700" dir="8100000" algn="bl" rotWithShape="0">
-              <a:srgbClr val="000000">
-                <a:alpha val="7000"/>
-              </a:srgbClr>
-            </a:outerShdw>
-          </a:effectLst>
-        </p:spPr>
-      </p:sp>
-      <p:sp>
-        <p:nvSpPr>
-          <p:cNvPr id="13" name="Text 10"/>
-          <p:cNvSpPr/>
-          <p:nvPr/>
-        </p:nvSpPr>
-        <p:spPr>
-          <a:xfrm>
-            <a:off x="3858768" y="2240280"/>
-            <a:ext cx="3200400" cy="256032"/>
-          </a:xfrm>
-          <a:prstGeom prst="rect">
-            <a:avLst/>
-          </a:prstGeom>
-          <a:noFill/>
-          <a:ln/>
-        </p:spPr>
-        <p:txBody>
-          <a:bodyPr wrap="square" rtlCol="0" anchor="ctr"/>
-          <a:lstStyle/>
-          <a:p>
-            <a:pPr marL="0" indent="0">
-              <a:buNone/>
-            </a:pPr>
-            <a:r>
-              <a:rPr lang="en-US" sz="1100" b="1" dirty="0">
-                <a:solidFill>
-                  <a:srgbClr val="1A2F5A"/>
-                </a:solidFill>
-                <a:latin typeface="Calibri" pitchFamily="34" charset="0"/>
-                <a:ea typeface="Calibri" pitchFamily="34" charset="-122"/>
-                <a:cs typeface="Calibri" pitchFamily="34" charset="-120"/>
-              </a:rPr>
-              <a:t>Mann-Whitney U test</a:t>
-            </a:r>
-            <a:endParaRPr lang="en-US" sz="1100" dirty="0"/>
-          </a:p>
-        </p:txBody>
-      </p:sp>
-      <p:sp>
-        <p:nvSpPr>
-          <p:cNvPr id="14" name="Text 11"/>
-          <p:cNvSpPr/>
-          <p:nvPr/>
-        </p:nvSpPr>
-        <p:spPr>
-          <a:xfrm>
-            <a:off x="3858768" y="2487168"/>
-            <a:ext cx="3017520" cy="502920"/>
-          </a:xfrm>
-          <a:prstGeom prst="rect">
-            <a:avLst/>
-          </a:prstGeom>
-          <a:noFill/>
-          <a:ln/>
-        </p:spPr>
-        <p:txBody>
-          <a:bodyPr wrap="square" rtlCol="0" anchor="ctr"/>
-          <a:lstStyle/>
-          <a:p>
-            <a:pPr marL="0" indent="0">
-              <a:buNone/>
-            </a:pPr>
-            <a:r>
-              <a:rPr lang="en-US" sz="950" dirty="0">
-                <a:solidFill>
-                  <a:srgbClr val="64748B"/>
-                </a:solidFill>
-                <a:latin typeface="Calibri" pitchFamily="34" charset="0"/>
-                <a:ea typeface="Calibri" pitchFamily="34" charset="-122"/>
-                <a:cs typeface="Calibri" pitchFamily="34" charset="-120"/>
-              </a:rPr>
-              <a:t>Non-parametric alternative   ·   U-statistic = 135.0   ·   p-value = 0.0468</a:t>
-            </a:r>
-            <a:endParaRPr lang="en-US" sz="950" dirty="0"/>
-          </a:p>
-        </p:txBody>
-      </p:sp>
-      <p:sp>
-        <p:nvSpPr>
-          <p:cNvPr id="15" name="Shape 12"/>
-          <p:cNvSpPr/>
-          <p:nvPr/>
-        </p:nvSpPr>
-        <p:spPr>
-          <a:xfrm>
-            <a:off x="6995160" y="2331720"/>
-            <a:ext cx="1737360" cy="685800"/>
-          </a:xfrm>
-          <a:prstGeom prst="rect">
-            <a:avLst/>
-          </a:prstGeom>
-          <a:solidFill>
-            <a:srgbClr val="16A34A"/>
-          </a:solidFill>
-          <a:ln w="12700">
-            <a:solidFill>
-              <a:srgbClr val="16A34A"/>
-            </a:solidFill>
-            <a:prstDash val="solid"/>
-          </a:ln>
-        </p:spPr>
-      </p:sp>
-      <p:sp>
-        <p:nvSpPr>
-          <p:cNvPr id="16" name="Text 13"/>
-          <p:cNvSpPr/>
-          <p:nvPr/>
-        </p:nvSpPr>
-        <p:spPr>
-          <a:xfrm>
-            <a:off x="6995160" y="2331720"/>
-            <a:ext cx="1737360" cy="685800"/>
-          </a:xfrm>
-          <a:prstGeom prst="rect">
-            <a:avLst/>
-          </a:prstGeom>
-          <a:noFill/>
-          <a:ln/>
-        </p:spPr>
-        <p:txBody>
-          <a:bodyPr wrap="square" rtlCol="0" anchor="ctr"/>
-          <a:lstStyle/>
-          <a:p>
-            <a:pPr marL="0" indent="0" algn="ctr">
-              <a:buNone/>
-            </a:pPr>
-            <a:r>
-              <a:rPr lang="en-US" sz="1000" b="1" dirty="0">
-                <a:solidFill>
-                  <a:srgbClr val="FFFFFF"/>
-                </a:solidFill>
-                <a:latin typeface="Calibri" pitchFamily="34" charset="0"/>
-                <a:ea typeface="Calibri" pitchFamily="34" charset="-122"/>
-                <a:cs typeface="Calibri" pitchFamily="34" charset="-120"/>
-              </a:rPr>
-              <a:t>REJECT H₀</a:t>
-            </a:r>
-            <a:endParaRPr lang="en-US" sz="1000" dirty="0"/>
-          </a:p>
-        </p:txBody>
-      </p:sp>
-      <p:sp>
-        <p:nvSpPr>
-          <p:cNvPr id="17" name="Shape 14"/>
-          <p:cNvSpPr/>
-          <p:nvPr/>
-        </p:nvSpPr>
-        <p:spPr>
-          <a:xfrm>
-            <a:off x="3749040" y="3291840"/>
-            <a:ext cx="5120640" cy="1005840"/>
-          </a:xfrm>
-          <a:prstGeom prst="rect">
-            <a:avLst/>
-          </a:prstGeom>
-          <a:solidFill>
-            <a:srgbClr val="F8FAFC"/>
-          </a:solidFill>
-          <a:ln w="12700">
-            <a:solidFill>
-              <a:srgbClr val="E2E8F0"/>
-            </a:solidFill>
-            <a:prstDash val="solid"/>
-          </a:ln>
-          <a:effectLst>
-            <a:outerShdw blurRad="38100" dist="12700" dir="8100000" algn="bl" rotWithShape="0">
-              <a:srgbClr val="000000">
-                <a:alpha val="7000"/>
-              </a:srgbClr>
-            </a:outerShdw>
-          </a:effectLst>
-        </p:spPr>
-      </p:sp>
-      <p:sp>
-        <p:nvSpPr>
-          <p:cNvPr id="18" name="Text 15"/>
-          <p:cNvSpPr/>
-          <p:nvPr/>
-        </p:nvSpPr>
-        <p:spPr>
-          <a:xfrm>
-            <a:off x="3858768" y="3337560"/>
-            <a:ext cx="3200400" cy="256032"/>
-          </a:xfrm>
-          <a:prstGeom prst="rect">
-            <a:avLst/>
-          </a:prstGeom>
-          <a:noFill/>
-          <a:ln/>
-        </p:spPr>
-        <p:txBody>
-          <a:bodyPr wrap="square" rtlCol="0" anchor="ctr"/>
-          <a:lstStyle/>
-          <a:p>
-            <a:pPr marL="0" indent="0">
-              <a:buNone/>
-            </a:pPr>
-            <a:r>
-              <a:rPr lang="en-US" sz="1100" b="1" dirty="0">
-                <a:solidFill>
-                  <a:srgbClr val="1A2F5A"/>
-                </a:solidFill>
-                <a:latin typeface="Calibri" pitchFamily="34" charset="0"/>
-                <a:ea typeface="Calibri" pitchFamily="34" charset="-122"/>
-                <a:cs typeface="Calibri" pitchFamily="34" charset="-120"/>
-              </a:rPr>
-              <a:t>Cohen's d Effect Size</a:t>
-            </a:r>
-            <a:endParaRPr lang="en-US" sz="1100" dirty="0"/>
-          </a:p>
-        </p:txBody>
-      </p:sp>
-      <p:sp>
-        <p:nvSpPr>
-          <p:cNvPr id="19" name="Text 16"/>
-          <p:cNvSpPr/>
-          <p:nvPr/>
-        </p:nvSpPr>
-        <p:spPr>
-          <a:xfrm>
-            <a:off x="3858768" y="3584448"/>
-            <a:ext cx="3017520" cy="502920"/>
-          </a:xfrm>
-          <a:prstGeom prst="rect">
-            <a:avLst/>
-          </a:prstGeom>
-          <a:noFill/>
-          <a:ln/>
-        </p:spPr>
-        <p:txBody>
-          <a:bodyPr wrap="square" rtlCol="0" anchor="ctr"/>
-          <a:lstStyle/>
-          <a:p>
-            <a:pPr marL="0" indent="0">
-              <a:buNone/>
-            </a:pPr>
-            <a:r>
-              <a:rPr lang="en-US" sz="950" dirty="0">
-                <a:solidFill>
-                  <a:srgbClr val="64748B"/>
-                </a:solidFill>
-                <a:latin typeface="Calibri" pitchFamily="34" charset="0"/>
-                <a:ea typeface="Calibri" pitchFamily="34" charset="-122"/>
-                <a:cs typeface="Calibri" pitchFamily="34" charset="-120"/>
-              </a:rPr>
-              <a:t>d = 0.0431   ·   (small effect)</a:t>
-            </a:r>
-            <a:endParaRPr lang="en-US" sz="950" dirty="0"/>
-          </a:p>
-        </p:txBody>
-      </p:sp>
-      <p:sp>
-        <p:nvSpPr>
-          <p:cNvPr id="20" name="Shape 17"/>
-          <p:cNvSpPr/>
-          <p:nvPr/>
-        </p:nvSpPr>
-        <p:spPr>
-          <a:xfrm>
-            <a:off x="6995160" y="3429000"/>
-            <a:ext cx="1737360" cy="685800"/>
-          </a:xfrm>
-          <a:prstGeom prst="rect">
-            <a:avLst/>
-          </a:prstGeom>
-          <a:solidFill>
-            <a:srgbClr val="64748B"/>
-          </a:solidFill>
-          <a:ln w="12700">
-            <a:solidFill>
-              <a:srgbClr val="64748B"/>
-            </a:solidFill>
-            <a:prstDash val="solid"/>
-          </a:ln>
-        </p:spPr>
-      </p:sp>
-      <p:sp>
-        <p:nvSpPr>
-          <p:cNvPr id="21" name="Text 18"/>
-          <p:cNvSpPr/>
-          <p:nvPr/>
-        </p:nvSpPr>
-        <p:spPr>
-          <a:xfrm>
-            <a:off x="6995160" y="3429000"/>
-            <a:ext cx="1737360" cy="685800"/>
-          </a:xfrm>
-          <a:prstGeom prst="rect">
-            <a:avLst/>
-          </a:prstGeom>
-          <a:noFill/>
-          <a:ln/>
-        </p:spPr>
-        <p:txBody>
-          <a:bodyPr wrap="square" rtlCol="0" anchor="ctr"/>
-          <a:lstStyle/>
-          <a:p>
-            <a:pPr marL="0" indent="0" algn="ctr">
-              <a:buNone/>
-            </a:pPr>
-            <a:r>
-              <a:rPr lang="en-US" sz="1000" b="1" dirty="0">
-                <a:solidFill>
-                  <a:srgbClr val="FFFFFF"/>
-                </a:solidFill>
-                <a:latin typeface="Calibri" pitchFamily="34" charset="0"/>
-                <a:ea typeface="Calibri" pitchFamily="34" charset="-122"/>
-                <a:cs typeface="Calibri" pitchFamily="34" charset="-120"/>
-              </a:rPr>
-              <a:t>SMALL EFFECT</a:t>
-            </a:r>
-            <a:endParaRPr lang="en-US" sz="1000" dirty="0"/>
-          </a:p>
-        </p:txBody>
-      </p:sp>
-      <p:sp>
-        <p:nvSpPr>
-          <p:cNvPr id="22" name="Shape 19"/>
-          <p:cNvSpPr/>
-          <p:nvPr/>
-        </p:nvSpPr>
-        <p:spPr>
-          <a:xfrm>
-            <a:off x="274320" y="4343400"/>
-            <a:ext cx="8595360" cy="640080"/>
-          </a:xfrm>
-          <a:prstGeom prst="rect">
-            <a:avLst/>
-          </a:prstGeom>
-          <a:solidFill>
-            <a:srgbClr val="FFF3CD"/>
-          </a:solidFill>
-          <a:ln w="12700">
-            <a:solidFill>
-              <a:srgbClr val="F59E0B"/>
-            </a:solidFill>
-            <a:prstDash val="solid"/>
-          </a:ln>
-        </p:spPr>
-      </p:sp>
-      <p:sp>
-        <p:nvSpPr>
-          <p:cNvPr id="23" name="Text 20"/>
-          <p:cNvSpPr/>
-          <p:nvPr/>
-        </p:nvSpPr>
-        <p:spPr>
-          <a:xfrm>
-            <a:off x="365760" y="4361688"/>
-            <a:ext cx="8412480" cy="603504"/>
-          </a:xfrm>
-          <a:prstGeom prst="rect">
-            <a:avLst/>
-          </a:prstGeom>
-          <a:noFill/>
-          <a:ln/>
-        </p:spPr>
-        <p:txBody>
-          <a:bodyPr wrap="square" rtlCol="0" anchor="ctr"/>
-          <a:lstStyle/>
-          <a:p>
-            <a:pPr marL="0" indent="0">
-              <a:buNone/>
-            </a:pPr>
-            <a:r>
-              <a:rPr lang="en-US" sz="1000" dirty="0">
-                <a:solidFill>
-                  <a:srgbClr val="1E293B"/>
-                </a:solidFill>
-                <a:latin typeface="Calibri" pitchFamily="34" charset="0"/>
-                <a:ea typeface="Calibri" pitchFamily="34" charset="-122"/>
-                <a:cs typeface="Calibri" pitchFamily="34" charset="-120"/>
-              </a:rPr>
-              <a:t>Conclusion: Mann-Whitney U test (p=0.0468) rejects H₀ at α=0.05, but Welch t-test (p=0.4553) fails to reject. Mixed results due to CIS outliers (140% spike in 2019). Cohen's d = 0.04 indicates negligible practical effect.</a:t>
-            </a:r>
-            <a:endParaRPr lang="en-US" sz="1000" dirty="0"/>
-          </a:p>
-        </p:txBody>
-      </p:sp>
-    </p:spTree>
   </p:cSld>
   <p:clrMapOvr>
     <a:masterClrMapping/>

--- a/Kyrgyzstan_Education_Stats_WithConclusion.pptx
+++ b/Kyrgyzstan_Education_Stats_WithConclusion.pptx
@@ -5,7 +5,7 @@
     <p:sldMasterId id="2147483648" r:id="rId1"/>
   </p:sldMasterIdLst>
   <p:notesMasterIdLst>
-    <p:notesMasterId r:id="rId19"/>
+    <p:notesMasterId r:id="rId20"/>
   </p:notesMasterIdLst>
   <p:sldIdLst>
     <p:sldId id="256" r:id="rId2"/>
@@ -14,17 +14,18 @@
     <p:sldId id="258" r:id="rId5"/>
     <p:sldId id="259" r:id="rId6"/>
     <p:sldId id="266" r:id="rId7"/>
-    <p:sldId id="260" r:id="rId8"/>
-    <p:sldId id="261" r:id="rId9"/>
-    <p:sldId id="267" r:id="rId10"/>
-    <p:sldId id="262" r:id="rId11"/>
-    <p:sldId id="271" r:id="rId12"/>
-    <p:sldId id="263" r:id="rId13"/>
-    <p:sldId id="264" r:id="rId14"/>
-    <p:sldId id="268" r:id="rId15"/>
-    <p:sldId id="269" r:id="rId16"/>
-    <p:sldId id="265" r:id="rId17"/>
-    <p:sldId id="270" r:id="rId18"/>
+    <p:sldId id="274" r:id="rId8"/>
+    <p:sldId id="260" r:id="rId9"/>
+    <p:sldId id="261" r:id="rId10"/>
+    <p:sldId id="267" r:id="rId11"/>
+    <p:sldId id="262" r:id="rId12"/>
+    <p:sldId id="271" r:id="rId13"/>
+    <p:sldId id="263" r:id="rId14"/>
+    <p:sldId id="264" r:id="rId15"/>
+    <p:sldId id="268" r:id="rId16"/>
+    <p:sldId id="269" r:id="rId17"/>
+    <p:sldId id="265" r:id="rId18"/>
+    <p:sldId id="270" r:id="rId19"/>
   </p:sldIdLst>
   <p:sldSz cx="9144000" cy="5143500" type="screen16x9"/>
   <p:notesSz cx="5143500" cy="9144000"/>
@@ -570,7 +571,7 @@
           <a:p>
             <a:fld id="{F7021451-1387-4CA6-816F-3879F97B5CBC}" type="slidenum">
               <a:rPr lang="en-US"/>
-              <a:t>7</a:t>
+              <a:t>8</a:t>
             </a:fld>
             <a:endParaRPr lang="en-US"/>
           </a:p>
@@ -654,7 +655,7 @@
           <a:p>
             <a:fld id="{F7021451-1387-4CA6-816F-3879F97B5CBC}" type="slidenum">
               <a:rPr lang="en-US"/>
-              <a:t>8</a:t>
+              <a:t>9</a:t>
             </a:fld>
             <a:endParaRPr lang="en-US"/>
           </a:p>
@@ -738,7 +739,7 @@
           <a:p>
             <a:fld id="{F7021451-1387-4CA6-816F-3879F97B5CBC}" type="slidenum">
               <a:rPr lang="en-US"/>
-              <a:t>10</a:t>
+              <a:t>11</a:t>
             </a:fld>
             <a:endParaRPr lang="en-US"/>
           </a:p>
@@ -822,7 +823,7 @@
           <a:p>
             <a:fld id="{F7021451-1387-4CA6-816F-3879F97B5CBC}" type="slidenum">
               <a:rPr lang="en-US"/>
-              <a:t>12</a:t>
+              <a:t>13</a:t>
             </a:fld>
             <a:endParaRPr lang="en-US"/>
           </a:p>
@@ -906,7 +907,7 @@
           <a:p>
             <a:fld id="{F7021451-1387-4CA6-816F-3879F97B5CBC}" type="slidenum">
               <a:rPr lang="en-US"/>
-              <a:t>13</a:t>
+              <a:t>14</a:t>
             </a:fld>
             <a:endParaRPr lang="en-US"/>
           </a:p>
@@ -990,7 +991,7 @@
           <a:p>
             <a:fld id="{F7021451-1387-4CA6-816F-3879F97B5CBC}" type="slidenum">
               <a:rPr lang="en-US"/>
-              <a:t>16</a:t>
+              <a:t>17</a:t>
             </a:fld>
             <a:endParaRPr lang="en-US"/>
           </a:p>
@@ -1561,6 +1562,66 @@
 </file>
 
 <file path=ppt/slides/slide10.xml><?xml version="1.0" encoding="utf-8"?>
+<p:sld xmlns:a="http://schemas.openxmlformats.org/drawingml/2006/main" xmlns:r="http://schemas.openxmlformats.org/officeDocument/2006/relationships" xmlns:p="http://schemas.openxmlformats.org/presentationml/2006/main">
+  <p:cSld>
+    <p:spTree>
+      <p:nvGrpSpPr>
+        <p:cNvPr id="1" name=""/>
+        <p:cNvGrpSpPr/>
+        <p:nvPr/>
+      </p:nvGrpSpPr>
+      <p:grpSpPr>
+        <a:xfrm>
+          <a:off x="0" y="0"/>
+          <a:ext cx="0" cy="0"/>
+          <a:chOff x="0" y="0"/>
+          <a:chExt cx="0" cy="0"/>
+        </a:xfrm>
+      </p:grpSpPr>
+      <p:pic>
+        <p:nvPicPr>
+          <p:cNvPr id="3" name="Рисунок 2">
+            <a:extLst>
+              <a:ext uri="{FF2B5EF4-FFF2-40B4-BE49-F238E27FC236}">
+                <a16:creationId xmlns:a16="http://schemas.microsoft.com/office/drawing/2014/main" id="{436DABE1-0D77-FA24-BBB5-454B5B99125A}"/>
+              </a:ext>
+            </a:extLst>
+          </p:cNvPr>
+          <p:cNvPicPr>
+            <a:picLocks noChangeAspect="1"/>
+          </p:cNvPicPr>
+          <p:nvPr/>
+        </p:nvPicPr>
+        <p:blipFill>
+          <a:blip r:embed="rId2"/>
+          <a:stretch>
+            <a:fillRect/>
+          </a:stretch>
+        </p:blipFill>
+        <p:spPr>
+          <a:xfrm>
+            <a:off x="0" y="0"/>
+            <a:ext cx="9144000" cy="5089712"/>
+          </a:xfrm>
+          <a:prstGeom prst="rect">
+            <a:avLst/>
+          </a:prstGeom>
+        </p:spPr>
+      </p:pic>
+    </p:spTree>
+    <p:extLst>
+      <p:ext uri="{BB962C8B-B14F-4D97-AF65-F5344CB8AC3E}">
+        <p14:creationId xmlns:p14="http://schemas.microsoft.com/office/powerpoint/2010/main" val="4027790119"/>
+      </p:ext>
+    </p:extLst>
+  </p:cSld>
+  <p:clrMapOvr>
+    <a:masterClrMapping/>
+  </p:clrMapOvr>
+</p:sld>
+</file>
+
+<file path=ppt/slides/slide11.xml><?xml version="1.0" encoding="utf-8"?>
 <p:sld xmlns:a="http://schemas.openxmlformats.org/drawingml/2006/main" xmlns:r="http://schemas.openxmlformats.org/officeDocument/2006/relationships" xmlns:p="http://schemas.openxmlformats.org/presentationml/2006/main">
   <p:cSld name="Slide 7">
     <p:bg>
@@ -3836,7 +3897,7 @@
 </p:sld>
 </file>
 
-<file path=ppt/slides/slide11.xml><?xml version="1.0" encoding="utf-8"?>
+<file path=ppt/slides/slide12.xml><?xml version="1.0" encoding="utf-8"?>
 <p:sld xmlns:a="http://schemas.openxmlformats.org/drawingml/2006/main" xmlns:r="http://schemas.openxmlformats.org/officeDocument/2006/relationships" xmlns:p="http://schemas.openxmlformats.org/presentationml/2006/main">
   <p:cSld>
     <p:spTree>
@@ -3896,7 +3957,7 @@
 </p:sld>
 </file>
 
-<file path=ppt/slides/slide12.xml><?xml version="1.0" encoding="utf-8"?>
+<file path=ppt/slides/slide13.xml><?xml version="1.0" encoding="utf-8"?>
 <p:sld xmlns:a="http://schemas.openxmlformats.org/drawingml/2006/main" xmlns:r="http://schemas.openxmlformats.org/officeDocument/2006/relationships" xmlns:p="http://schemas.openxmlformats.org/presentationml/2006/main">
   <p:cSld name="Slide 8">
     <p:bg>
@@ -8277,7 +8338,7 @@
 </p:sld>
 </file>
 
-<file path=ppt/slides/slide13.xml><?xml version="1.0" encoding="utf-8"?>
+<file path=ppt/slides/slide14.xml><?xml version="1.0" encoding="utf-8"?>
 <p:sld xmlns:a="http://schemas.openxmlformats.org/drawingml/2006/main" xmlns:r="http://schemas.openxmlformats.org/officeDocument/2006/relationships" xmlns:p="http://schemas.openxmlformats.org/presentationml/2006/main">
   <p:cSld name="Slide 9">
     <p:bg>
@@ -10512,7 +10573,7 @@
 </p:sld>
 </file>
 
-<file path=ppt/slides/slide14.xml><?xml version="1.0" encoding="utf-8"?>
+<file path=ppt/slides/slide15.xml><?xml version="1.0" encoding="utf-8"?>
 <p:sld xmlns:a="http://schemas.openxmlformats.org/drawingml/2006/main" xmlns:r="http://schemas.openxmlformats.org/officeDocument/2006/relationships" xmlns:p="http://schemas.openxmlformats.org/presentationml/2006/main">
   <p:cSld>
     <p:spTree>
@@ -10572,7 +10633,7 @@
 </p:sld>
 </file>
 
-<file path=ppt/slides/slide15.xml><?xml version="1.0" encoding="utf-8"?>
+<file path=ppt/slides/slide16.xml><?xml version="1.0" encoding="utf-8"?>
 <p:sld xmlns:a="http://schemas.openxmlformats.org/drawingml/2006/main" xmlns:r="http://schemas.openxmlformats.org/officeDocument/2006/relationships" xmlns:p="http://schemas.openxmlformats.org/presentationml/2006/main">
   <p:cSld>
     <p:spTree>
@@ -10632,7 +10693,7 @@
 </p:sld>
 </file>
 
-<file path=ppt/slides/slide16.xml><?xml version="1.0" encoding="utf-8"?>
+<file path=ppt/slides/slide17.xml><?xml version="1.0" encoding="utf-8"?>
 <p:sld xmlns:a="http://schemas.openxmlformats.org/drawingml/2006/main" xmlns:r="http://schemas.openxmlformats.org/officeDocument/2006/relationships" xmlns:p="http://schemas.openxmlformats.org/presentationml/2006/main">
   <p:cSld name="Slide 10">
     <p:bg>
@@ -13059,7 +13120,7 @@
 </p:sld>
 </file>
 
-<file path=ppt/slides/slide17.xml><?xml version="1.0" encoding="utf-8"?>
+<file path=ppt/slides/slide18.xml><?xml version="1.0" encoding="utf-8"?>
 <p:sld xmlns:a="http://schemas.openxmlformats.org/drawingml/2006/main" xmlns:r="http://schemas.openxmlformats.org/officeDocument/2006/relationships" xmlns:p="http://schemas.openxmlformats.org/presentationml/2006/main">
   <p:cSld name="Conclusion">
     <p:bg>
@@ -25016,6 +25077,66 @@
 
 <file path=ppt/slides/slide7.xml><?xml version="1.0" encoding="utf-8"?>
 <p:sld xmlns:a="http://schemas.openxmlformats.org/drawingml/2006/main" xmlns:r="http://schemas.openxmlformats.org/officeDocument/2006/relationships" xmlns:p="http://schemas.openxmlformats.org/presentationml/2006/main">
+  <p:cSld>
+    <p:spTree>
+      <p:nvGrpSpPr>
+        <p:cNvPr id="1" name=""/>
+        <p:cNvGrpSpPr/>
+        <p:nvPr/>
+      </p:nvGrpSpPr>
+      <p:grpSpPr>
+        <a:xfrm>
+          <a:off x="0" y="0"/>
+          <a:ext cx="0" cy="0"/>
+          <a:chOff x="0" y="0"/>
+          <a:chExt cx="0" cy="0"/>
+        </a:xfrm>
+      </p:grpSpPr>
+      <p:pic>
+        <p:nvPicPr>
+          <p:cNvPr id="5" name="Рисунок 4">
+            <a:extLst>
+              <a:ext uri="{FF2B5EF4-FFF2-40B4-BE49-F238E27FC236}">
+                <a16:creationId xmlns:a16="http://schemas.microsoft.com/office/drawing/2014/main" id="{1BFCCBF8-F824-E7E4-6336-81F3580D6B1D}"/>
+              </a:ext>
+            </a:extLst>
+          </p:cNvPr>
+          <p:cNvPicPr>
+            <a:picLocks noChangeAspect="1"/>
+          </p:cNvPicPr>
+          <p:nvPr/>
+        </p:nvPicPr>
+        <p:blipFill>
+          <a:blip r:embed="rId2"/>
+          <a:stretch>
+            <a:fillRect/>
+          </a:stretch>
+        </p:blipFill>
+        <p:spPr>
+          <a:xfrm>
+            <a:off x="0" y="-1"/>
+            <a:ext cx="9144000" cy="5107093"/>
+          </a:xfrm>
+          <a:prstGeom prst="rect">
+            <a:avLst/>
+          </a:prstGeom>
+        </p:spPr>
+      </p:pic>
+    </p:spTree>
+    <p:extLst>
+      <p:ext uri="{BB962C8B-B14F-4D97-AF65-F5344CB8AC3E}">
+        <p14:creationId xmlns:p14="http://schemas.microsoft.com/office/powerpoint/2010/main" val="1293636864"/>
+      </p:ext>
+    </p:extLst>
+  </p:cSld>
+  <p:clrMapOvr>
+    <a:masterClrMapping/>
+  </p:clrMapOvr>
+</p:sld>
+</file>
+
+<file path=ppt/slides/slide8.xml><?xml version="1.0" encoding="utf-8"?>
+<p:sld xmlns:a="http://schemas.openxmlformats.org/drawingml/2006/main" xmlns:r="http://schemas.openxmlformats.org/officeDocument/2006/relationships" xmlns:p="http://schemas.openxmlformats.org/presentationml/2006/main">
   <p:cSld name="Slide 5">
     <p:bg>
       <p:bgPr>
@@ -25151,7 +25272,7 @@
           <p:nvPr>
             <p:extLst>
               <p:ext uri="{D42A27DB-BD31-4B8C-83A1-F6EECF244321}">
-                <p14:modId xmlns:p14="http://schemas.microsoft.com/office/powerpoint/2010/main" val="1579011935"/>
+                <p14:modId xmlns:p14="http://schemas.microsoft.com/office/powerpoint/2010/main" val="3285929159"/>
               </p:ext>
             </p:extLst>
           </p:nvPr>
@@ -30475,7 +30596,7 @@
 </p:sld>
 </file>
 
-<file path=ppt/slides/slide8.xml><?xml version="1.0" encoding="utf-8"?>
+<file path=ppt/slides/slide9.xml><?xml version="1.0" encoding="utf-8"?>
 <p:sld xmlns:a="http://schemas.openxmlformats.org/drawingml/2006/main" xmlns:r="http://schemas.openxmlformats.org/officeDocument/2006/relationships" xmlns:p="http://schemas.openxmlformats.org/presentationml/2006/main">
   <p:cSld name="Slide 6">
     <p:bg>
@@ -32046,66 +32167,6 @@
 </p:sld>
 </file>
 
-<file path=ppt/slides/slide9.xml><?xml version="1.0" encoding="utf-8"?>
-<p:sld xmlns:a="http://schemas.openxmlformats.org/drawingml/2006/main" xmlns:r="http://schemas.openxmlformats.org/officeDocument/2006/relationships" xmlns:p="http://schemas.openxmlformats.org/presentationml/2006/main">
-  <p:cSld>
-    <p:spTree>
-      <p:nvGrpSpPr>
-        <p:cNvPr id="1" name=""/>
-        <p:cNvGrpSpPr/>
-        <p:nvPr/>
-      </p:nvGrpSpPr>
-      <p:grpSpPr>
-        <a:xfrm>
-          <a:off x="0" y="0"/>
-          <a:ext cx="0" cy="0"/>
-          <a:chOff x="0" y="0"/>
-          <a:chExt cx="0" cy="0"/>
-        </a:xfrm>
-      </p:grpSpPr>
-      <p:pic>
-        <p:nvPicPr>
-          <p:cNvPr id="3" name="Рисунок 2">
-            <a:extLst>
-              <a:ext uri="{FF2B5EF4-FFF2-40B4-BE49-F238E27FC236}">
-                <a16:creationId xmlns:a16="http://schemas.microsoft.com/office/drawing/2014/main" id="{436DABE1-0D77-FA24-BBB5-454B5B99125A}"/>
-              </a:ext>
-            </a:extLst>
-          </p:cNvPr>
-          <p:cNvPicPr>
-            <a:picLocks noChangeAspect="1"/>
-          </p:cNvPicPr>
-          <p:nvPr/>
-        </p:nvPicPr>
-        <p:blipFill>
-          <a:blip r:embed="rId2"/>
-          <a:stretch>
-            <a:fillRect/>
-          </a:stretch>
-        </p:blipFill>
-        <p:spPr>
-          <a:xfrm>
-            <a:off x="0" y="0"/>
-            <a:ext cx="9144000" cy="5089712"/>
-          </a:xfrm>
-          <a:prstGeom prst="rect">
-            <a:avLst/>
-          </a:prstGeom>
-        </p:spPr>
-      </p:pic>
-    </p:spTree>
-    <p:extLst>
-      <p:ext uri="{BB962C8B-B14F-4D97-AF65-F5344CB8AC3E}">
-        <p14:creationId xmlns:p14="http://schemas.microsoft.com/office/powerpoint/2010/main" val="4027790119"/>
-      </p:ext>
-    </p:extLst>
-  </p:cSld>
-  <p:clrMapOvr>
-    <a:masterClrMapping/>
-  </p:clrMapOvr>
-</p:sld>
-</file>
-
 <file path=ppt/theme/theme1.xml><?xml version="1.0" encoding="utf-8"?>
 <a:theme xmlns:a="http://schemas.openxmlformats.org/drawingml/2006/main" name="Office Theme">
   <a:themeElements>
